--- a/decks/the-inner-critic-lesson-v2.pptx
+++ b/decks/the-inner-critic-lesson-v2.pptx
@@ -17,6 +17,7 @@
     <p:sldId id="265" r:id="rId17"/>
     <p:sldId id="266" r:id="rId18"/>
     <p:sldId id="267" r:id="rId19"/>
+    <p:sldId id="268" r:id="rId20"/>
   </p:sldIdLst>
   <p:sldSz cx="12192000" cy="6858000" type="screen4x3"/>
   <p:notesSz cx="6858000" cy="9144000"/>
@@ -513,7 +514,77 @@
           <a:lstStyle/>
           <a:p>
             <a:r>
-              <a:t>This page and the next three are hidden. They stay in the deck for you and are skipped when you present.</a:t>
+              <a:t>This page is hidden and skipped when you present. The full plan, care notes and research are on the hidden pages at the end of the deck, if you want them.</a:t>
+            </a:r>
+          </a:p>
+        </p:txBody>
+      </p:sp>
+      <p:sp>
+        <p:nvSpPr>
+          <p:cNvPr id="4" name="Slide Number Placeholder 3"/>
+          <p:cNvSpPr>
+            <a:spLocks noGrp="1"/>
+          </p:cNvSpPr>
+          <p:nvPr>
+            <p:ph type="sldNum" idx="5" sz="quarter"/>
+          </p:nvPr>
+        </p:nvSpPr>
+        <p:spPr/>
+      </p:sp>
+    </p:spTree>
+  </p:cSld>
+  <p:clrMapOvr>
+    <a:masterClrMapping/>
+  </p:clrMapOvr>
+</p:notes>
+</file>
+
+<file path=ppt/notesSlides/notesSlide10.xml><?xml version="1.0" encoding="utf-8"?>
+<p:notes xmlns:a="http://schemas.openxmlformats.org/drawingml/2006/main" xmlns:p="http://schemas.openxmlformats.org/presentationml/2006/main" xmlns:r="http://schemas.openxmlformats.org/officeDocument/2006/relationships">
+  <p:cSld>
+    <p:spTree>
+      <p:nvGrpSpPr>
+        <p:cNvPr id="1" name=""/>
+        <p:cNvGrpSpPr/>
+        <p:nvPr/>
+      </p:nvGrpSpPr>
+      <p:grpSpPr>
+        <a:xfrm>
+          <a:off x="0" y="0"/>
+          <a:ext cx="0" cy="0"/>
+          <a:chOff x="0" y="0"/>
+          <a:chExt cx="0" cy="0"/>
+        </a:xfrm>
+      </p:grpSpPr>
+      <p:sp>
+        <p:nvSpPr>
+          <p:cNvPr id="2" name="Slide Image Placeholder 1"/>
+          <p:cNvSpPr>
+            <a:spLocks noGrp="1"/>
+          </p:cNvSpPr>
+          <p:nvPr>
+            <p:ph type="sldImg" idx="2"/>
+          </p:nvPr>
+        </p:nvSpPr>
+        <p:spPr/>
+      </p:sp>
+      <p:sp>
+        <p:nvSpPr>
+          <p:cNvPr id="3" name="Notes Placeholder 2"/>
+          <p:cNvSpPr>
+            <a:spLocks noGrp="1"/>
+          </p:cNvSpPr>
+          <p:nvPr>
+            <p:ph type="body" idx="3" sz="quarter"/>
+          </p:nvPr>
+        </p:nvSpPr>
+        <p:spPr/>
+        <p:txBody>
+          <a:bodyPr/>
+          <a:lstStyle/>
+          <a:p>
+            <a:r>
+              <a:t>If you want more: this page and the next three are hidden and skipped when you present.</a:t>
             </a:r>
           </a:p>
         </p:txBody>
@@ -4165,7 +4236,7 @@
                 </a:solidFill>
                 <a:latin typeface="Inter Tight"/>
               </a:rPr>
-              <a:t>TEACHER PAGE  ·  skipped when you present  ·  Lesson plan</a:t>
+              <a:t>TEACHER PAGE  ·  skipped when you present  ·  Before you start</a:t>
             </a:r>
           </a:p>
         </p:txBody>
@@ -4256,8 +4327,8 @@
         </p:nvSpPr>
         <p:spPr>
           <a:xfrm>
-            <a:off x="548640" y="1828800"/>
-            <a:ext cx="5120640" cy="4389120"/>
+            <a:off x="548640" y="2011680"/>
+            <a:ext cx="11064240" cy="4206240"/>
           </a:xfrm>
           <a:prstGeom prst="rect">
             <a:avLst/>
@@ -4272,43 +4343,43 @@
           <a:p>
             <a:pPr algn="l">
               <a:spcAft>
-                <a:spcPts val="675"/>
-              </a:spcAft>
-            </a:pPr>
-            <a:r>
-              <a:rPr sz="1100" b="1" i="0">
+                <a:spcPts val="900"/>
+              </a:spcAft>
+            </a:pPr>
+            <a:r>
+              <a:rPr sz="1200" b="1" i="0">
                 <a:solidFill>
                   <a:srgbClr val="0B2D5B"/>
                 </a:solidFill>
                 <a:latin typeface="Inter Tight"/>
               </a:rPr>
-              <a:t>GOAL</a:t>
-            </a:r>
-          </a:p>
-          <a:p>
-            <a:pPr algn="l">
-              <a:spcAft>
-                <a:spcPts val="675"/>
-              </a:spcAft>
-            </a:pPr>
-            <a:r>
-              <a:rPr sz="1500" b="0" i="0">
+              <a:t>BEFORE YOU START</a:t>
+            </a:r>
+          </a:p>
+          <a:p>
+            <a:pPr algn="l">
+              <a:spcAft>
+                <a:spcPts val="900"/>
+              </a:spcAft>
+            </a:pPr>
+            <a:r>
+              <a:rPr sz="2000" b="0" i="0">
                 <a:solidFill>
                   <a:srgbClr val="1C1B19"/>
                 </a:solidFill>
                 <a:latin typeface="Source Serif 4"/>
               </a:rPr>
-              <a:t>Students can explain why the inner critic sounds so convincing (it runs on the threat system), what research says about self-compassion and effort, and how to get some distance from the voice. Each student privately rewrites one critic line as a coach on their side would say it.</a:t>
-            </a:r>
-          </a:p>
-          <a:p>
-            <a:pPr algn="l">
-              <a:spcAft>
-                <a:spcPts val="675"/>
-              </a:spcAft>
-            </a:pPr>
-            <a:r>
-              <a:rPr sz="1500" b="0" i="0">
+              <a:t>Students learn why the inner critic sounds so convincing and privately rewrite one critic line the way a coach on their side would say it. Bring index cards, keep the cards private, and pass "worthless" or "hopeless" to a counselor that day.</a:t>
+            </a:r>
+          </a:p>
+          <a:p>
+            <a:pPr algn="l">
+              <a:spcAft>
+                <a:spcPts val="900"/>
+              </a:spcAft>
+            </a:pPr>
+            <a:r>
+              <a:rPr sz="2000" b="0" i="0">
                 <a:solidFill>
                   <a:srgbClr val="1C1B19"/>
                 </a:solidFill>
@@ -4320,327 +4391,33 @@
           <a:p>
             <a:pPr algn="l">
               <a:spcAft>
-                <a:spcPts val="675"/>
-              </a:spcAft>
-            </a:pPr>
-            <a:r>
-              <a:rPr sz="1100" b="1" i="0">
+                <a:spcPts val="900"/>
+              </a:spcAft>
+            </a:pPr>
+            <a:r>
+              <a:rPr sz="1200" b="1" i="0">
                 <a:solidFill>
                   <a:srgbClr val="0B2D5B"/>
                 </a:solidFill>
                 <a:latin typeface="Inter Tight"/>
               </a:rPr>
-              <a:t>MATERIALS</a:t>
-            </a:r>
-          </a:p>
-          <a:p>
-            <a:pPr algn="l">
-              <a:spcAft>
-                <a:spcPts val="675"/>
-              </a:spcAft>
-            </a:pPr>
-            <a:r>
-              <a:rPr sz="1500" b="0" i="0">
+              <a:t>EVERY STUDENT IN THE ROOM</a:t>
+            </a:r>
+          </a:p>
+          <a:p>
+            <a:pPr algn="l">
+              <a:spcAft>
+                <a:spcPts val="900"/>
+              </a:spcAft>
+            </a:pPr>
+            <a:r>
+              <a:rPr sz="2000" b="0" i="0">
                 <a:solidFill>
                   <a:srgbClr val="1C1B19"/>
                 </a:solidFill>
                 <a:latin typeface="Source Serif 4"/>
               </a:rPr>
-              <a:t>Scrap paper for the opening guess</a:t>
-            </a:r>
-          </a:p>
-          <a:p>
-            <a:pPr algn="l">
-              <a:spcAft>
-                <a:spcPts val="675"/>
-              </a:spcAft>
-            </a:pPr>
-            <a:r>
-              <a:rPr sz="1500" b="0" i="0">
-                <a:solidFill>
-                  <a:srgbClr val="1C1B19"/>
-                </a:solidFill>
-                <a:latin typeface="Source Serif 4"/>
-              </a:rPr>
-              <a:t>Index cards for the private critic-to-coach rewrite</a:t>
-            </a:r>
-          </a:p>
-          <a:p>
-            <a:pPr algn="l">
-              <a:spcAft>
-                <a:spcPts val="675"/>
-              </a:spcAft>
-            </a:pPr>
-            <a:r>
-              <a:rPr sz="1500" b="0" i="0">
-                <a:solidFill>
-                  <a:srgbClr val="1C1B19"/>
-                </a:solidFill>
-                <a:latin typeface="Source Serif 4"/>
-              </a:rPr>
-              <a:t>The student page link (last slide) to share after advisory</a:t>
-            </a:r>
-          </a:p>
-        </p:txBody>
-      </p:sp>
-      <p:sp>
-        <p:nvSpPr>
-          <p:cNvPr id="7" name="TextBox 6"/>
-          <p:cNvSpPr txBox="1"/>
-          <p:nvPr/>
-        </p:nvSpPr>
-        <p:spPr>
-          <a:xfrm>
-            <a:off x="6126480" y="1828800"/>
-            <a:ext cx="5486400" cy="4389120"/>
-          </a:xfrm>
-          <a:prstGeom prst="rect">
-            <a:avLst/>
-          </a:prstGeom>
-          <a:noFill/>
-        </p:spPr>
-        <p:txBody>
-          <a:bodyPr wrap="square" anchor="t" lIns="0" rIns="0" tIns="0" bIns="0">
-            <a:spAutoFit/>
-          </a:bodyPr>
-          <a:lstStyle/>
-          <a:p>
-            <a:pPr algn="l">
-              <a:spcAft>
-                <a:spcPts val="630"/>
-              </a:spcAft>
-            </a:pPr>
-            <a:r>
-              <a:rPr sz="1100" b="1" i="0">
-                <a:solidFill>
-                  <a:srgbClr val="0B2D5B"/>
-                </a:solidFill>
-                <a:latin typeface="Inter Tight"/>
-              </a:rPr>
-              <a:t>FLOW</a:t>
-            </a:r>
-          </a:p>
-          <a:p>
-            <a:pPr algn="l">
-              <a:spcAft>
-                <a:spcPts val="630"/>
-              </a:spcAft>
-            </a:pPr>
-            <a:r>
-              <a:rPr sz="1300" b="1" i="0">
-                <a:solidFill>
-                  <a:srgbClr val="F47B20"/>
-                </a:solidFill>
-                <a:latin typeface="Inter Tight"/>
-              </a:rPr>
-              <a:t>3 min   </a:t>
-            </a:r>
-            <a:r>
-              <a:rPr sz="1400" b="0" i="0">
-                <a:solidFill>
-                  <a:srgbClr val="1C1B19"/>
-                </a:solidFill>
-                <a:latin typeface="Source Serif 4"/>
-              </a:rPr>
-              <a:t>The T-shirt guess (spotlight effect)</a:t>
-            </a:r>
-          </a:p>
-          <a:p>
-            <a:pPr algn="l">
-              <a:spcAft>
-                <a:spcPts val="630"/>
-              </a:spcAft>
-            </a:pPr>
-            <a:r>
-              <a:rPr sz="1300" b="1" i="0">
-                <a:solidFill>
-                  <a:srgbClr val="F47B20"/>
-                </a:solidFill>
-                <a:latin typeface="Inter Tight"/>
-              </a:rPr>
-              <a:t>3 min   </a:t>
-            </a:r>
-            <a:r>
-              <a:rPr sz="1400" b="0" i="0">
-                <a:solidFill>
-                  <a:srgbClr val="1C1B19"/>
-                </a:solidFill>
-                <a:latin typeface="Source Serif 4"/>
-              </a:rPr>
-              <a:t>Three systems: threat, drive, soothing</a:t>
-            </a:r>
-          </a:p>
-          <a:p>
-            <a:pPr algn="l">
-              <a:spcAft>
-                <a:spcPts val="630"/>
-              </a:spcAft>
-            </a:pPr>
-            <a:r>
-              <a:rPr sz="1300" b="1" i="0">
-                <a:solidFill>
-                  <a:srgbClr val="F47B20"/>
-                </a:solidFill>
-                <a:latin typeface="Inter Tight"/>
-              </a:rPr>
-              <a:t>3 min   </a:t>
-            </a:r>
-            <a:r>
-              <a:rPr sz="1400" b="0" i="0">
-                <a:solidFill>
-                  <a:srgbClr val="1C1B19"/>
-                </a:solidFill>
-                <a:latin typeface="Source Serif 4"/>
-              </a:rPr>
-              <a:t>Quick vote: does being hard on yourself keep you sharp?</a:t>
-            </a:r>
-          </a:p>
-          <a:p>
-            <a:pPr algn="l">
-              <a:spcAft>
-                <a:spcPts val="630"/>
-              </a:spcAft>
-            </a:pPr>
-            <a:r>
-              <a:rPr sz="1300" b="1" i="0">
-                <a:solidFill>
-                  <a:srgbClr val="F47B20"/>
-                </a:solidFill>
-                <a:latin typeface="Inter Tight"/>
-              </a:rPr>
-              <a:t>3 min   </a:t>
-            </a:r>
-            <a:r>
-              <a:rPr sz="1400" b="0" i="0">
-                <a:solidFill>
-                  <a:srgbClr val="1C1B19"/>
-                </a:solidFill>
-                <a:latin typeface="Source Serif 4"/>
-              </a:rPr>
-              <a:t>Get some distance from the voice</a:t>
-            </a:r>
-          </a:p>
-          <a:p>
-            <a:pPr algn="l">
-              <a:spcAft>
-                <a:spcPts val="630"/>
-              </a:spcAft>
-            </a:pPr>
-            <a:r>
-              <a:rPr sz="1300" b="1" i="0">
-                <a:solidFill>
-                  <a:srgbClr val="F47B20"/>
-                </a:solidFill>
-                <a:latin typeface="Inter Tight"/>
-              </a:rPr>
-              <a:t>4 min   </a:t>
-            </a:r>
-            <a:r>
-              <a:rPr sz="1400" b="0" i="0">
-                <a:solidFill>
-                  <a:srgbClr val="1C1B19"/>
-                </a:solidFill>
-                <a:latin typeface="Source Serif 4"/>
-              </a:rPr>
-              <a:t>Three moments: which voice is talking? (pairs)</a:t>
-            </a:r>
-          </a:p>
-          <a:p>
-            <a:pPr algn="l">
-              <a:spcAft>
-                <a:spcPts val="630"/>
-              </a:spcAft>
-            </a:pPr>
-            <a:r>
-              <a:rPr sz="1300" b="1" i="0">
-                <a:solidFill>
-                  <a:srgbClr val="F47B20"/>
-                </a:solidFill>
-                <a:latin typeface="Inter Tight"/>
-              </a:rPr>
-              <a:t>3 min   </a:t>
-            </a:r>
-            <a:r>
-              <a:rPr sz="1400" b="0" i="0">
-                <a:solidFill>
-                  <a:srgbClr val="1C1B19"/>
-                </a:solidFill>
-                <a:latin typeface="Source Serif 4"/>
-              </a:rPr>
-              <a:t>Rewrite the critic as a coach (private card)</a:t>
-            </a:r>
-          </a:p>
-          <a:p>
-            <a:pPr algn="l">
-              <a:spcAft>
-                <a:spcPts val="630"/>
-              </a:spcAft>
-            </a:pPr>
-            <a:r>
-              <a:rPr sz="1300" b="1" i="0">
-                <a:solidFill>
-                  <a:srgbClr val="F47B20"/>
-                </a:solidFill>
-                <a:latin typeface="Inter Tight"/>
-              </a:rPr>
-              <a:t>1 min   </a:t>
-            </a:r>
-            <a:r>
-              <a:rPr sz="1400" b="0" i="0">
-                <a:solidFill>
-                  <a:srgbClr val="1C1B19"/>
-                </a:solidFill>
-                <a:latin typeface="Source Serif 4"/>
-              </a:rPr>
-              <a:t>One thing to try, and the student page</a:t>
-            </a:r>
-          </a:p>
-          <a:p>
-            <a:pPr algn="l">
-              <a:spcAft>
-                <a:spcPts val="630"/>
-              </a:spcAft>
-            </a:pPr>
-            <a:r>
-              <a:rPr sz="1400" b="0" i="0">
-                <a:solidFill>
-                  <a:srgbClr val="1C1B19"/>
-                </a:solidFill>
-                <a:latin typeface="Source Serif 4"/>
-              </a:rPr>
-              <a:t/>
-            </a:r>
-          </a:p>
-          <a:p>
-            <a:pPr algn="l">
-              <a:spcAft>
-                <a:spcPts val="630"/>
-              </a:spcAft>
-            </a:pPr>
-            <a:r>
-              <a:rPr sz="1100" b="1" i="0">
-                <a:solidFill>
-                  <a:srgbClr val="0B2D5B"/>
-                </a:solidFill>
-                <a:latin typeface="Inter Tight"/>
-              </a:rPr>
-              <a:t>SHORT ON TIME (10-MINUTE CHECK-IN)</a:t>
-            </a:r>
-          </a:p>
-          <a:p>
-            <a:pPr algn="l">
-              <a:spcAft>
-                <a:spcPts val="630"/>
-              </a:spcAft>
-            </a:pPr>
-            <a:r>
-              <a:rPr sz="1400" b="0" i="0">
-                <a:solidFill>
-                  <a:srgbClr val="1C1B19"/>
-                </a:solidFill>
-                <a:latin typeface="Source Serif 4"/>
-              </a:rPr>
-              <a:t>The T-shirt guess (2), quick vote and the self-compassion research (3), rewrite the critic as a coach on a private card (4), the student page (1).</a:t>
+              <a:t>Some critic lines start as messages about race, sexuality or body, and some sound like a loving but blunt family; name it without blaming anyone's family.</a:t>
             </a:r>
           </a:p>
         </p:txBody>
@@ -4654,6 +4431,2244 @@
 </file>
 
 <file path=ppt/slides/slide10.xml><?xml version="1.0" encoding="utf-8"?>
+<p:sld xmlns:a="http://schemas.openxmlformats.org/drawingml/2006/main" xmlns:p="http://schemas.openxmlformats.org/presentationml/2006/main" xmlns:r="http://schemas.openxmlformats.org/officeDocument/2006/relationships" show="0">
+  <p:cSld>
+    <p:bg>
+      <p:bgPr>
+        <a:solidFill>
+          <a:srgbClr val="EEEBE4"/>
+        </a:solidFill>
+        <a:effectLst/>
+      </p:bgPr>
+    </p:bg>
+    <p:spTree>
+      <p:nvGrpSpPr>
+        <p:cNvPr id="1" name=""/>
+        <p:cNvGrpSpPr/>
+        <p:nvPr/>
+      </p:nvGrpSpPr>
+      <p:grpSpPr/>
+      <p:sp>
+        <p:nvSpPr>
+          <p:cNvPr id="2" name="Rectangle 1"/>
+          <p:cNvSpPr/>
+          <p:nvPr/>
+        </p:nvSpPr>
+        <p:spPr>
+          <a:xfrm>
+            <a:off x="0" y="0"/>
+            <a:ext cx="12191695" cy="384048"/>
+          </a:xfrm>
+          <a:prstGeom prst="rect">
+            <a:avLst/>
+          </a:prstGeom>
+          <a:solidFill>
+            <a:srgbClr val="0B2D5B"/>
+          </a:solidFill>
+          <a:ln>
+            <a:noFill/>
+          </a:ln>
+          <a:effectLst/>
+        </p:spPr>
+        <p:style>
+          <a:lnRef idx="1">
+            <a:schemeClr val="accent1"/>
+          </a:lnRef>
+          <a:fillRef idx="3">
+            <a:schemeClr val="accent1"/>
+          </a:fillRef>
+          <a:effectRef idx="2">
+            <a:schemeClr val="accent1"/>
+          </a:effectRef>
+          <a:fontRef idx="minor">
+            <a:schemeClr val="lt1"/>
+          </a:fontRef>
+        </p:style>
+        <p:txBody>
+          <a:bodyPr rtlCol="0" anchor="ctr"/>
+          <a:lstStyle/>
+          <a:p>
+            <a:pPr algn="ctr"/>
+          </a:p>
+        </p:txBody>
+      </p:sp>
+      <p:sp>
+        <p:nvSpPr>
+          <p:cNvPr id="3" name="TextBox 2"/>
+          <p:cNvSpPr txBox="1"/>
+          <p:nvPr/>
+        </p:nvSpPr>
+        <p:spPr>
+          <a:xfrm>
+            <a:off x="548640" y="100584"/>
+            <a:ext cx="10972800" cy="274320"/>
+          </a:xfrm>
+          <a:prstGeom prst="rect">
+            <a:avLst/>
+          </a:prstGeom>
+          <a:noFill/>
+        </p:spPr>
+        <p:txBody>
+          <a:bodyPr wrap="square" anchor="t" lIns="0" rIns="0" tIns="0" bIns="0">
+            <a:spAutoFit/>
+          </a:bodyPr>
+          <a:lstStyle/>
+          <a:p>
+            <a:pPr algn="l">
+              <a:spcAft>
+                <a:spcPts val="495"/>
+              </a:spcAft>
+            </a:pPr>
+            <a:r>
+              <a:rPr sz="1100" b="1" i="0">
+                <a:solidFill>
+                  <a:srgbClr val="FFFFFF"/>
+                </a:solidFill>
+                <a:latin typeface="Inter Tight"/>
+              </a:rPr>
+              <a:t>TEACHER PAGE  ·  skipped when you present  ·  Lesson plan</a:t>
+            </a:r>
+          </a:p>
+        </p:txBody>
+      </p:sp>
+      <p:sp>
+        <p:nvSpPr>
+          <p:cNvPr id="4" name="TextBox 3"/>
+          <p:cNvSpPr txBox="1"/>
+          <p:nvPr/>
+        </p:nvSpPr>
+        <p:spPr>
+          <a:xfrm>
+            <a:off x="548640" y="685800"/>
+            <a:ext cx="10972800" cy="731520"/>
+          </a:xfrm>
+          <a:prstGeom prst="rect">
+            <a:avLst/>
+          </a:prstGeom>
+          <a:noFill/>
+        </p:spPr>
+        <p:txBody>
+          <a:bodyPr wrap="square" anchor="t" lIns="0" rIns="0" tIns="0" bIns="0">
+            <a:spAutoFit/>
+          </a:bodyPr>
+          <a:lstStyle/>
+          <a:p>
+            <a:pPr algn="l">
+              <a:spcAft>
+                <a:spcPts val="1530"/>
+              </a:spcAft>
+            </a:pPr>
+            <a:r>
+              <a:rPr sz="3400" b="1" i="0">
+                <a:solidFill>
+                  <a:srgbClr val="1C1B19"/>
+                </a:solidFill>
+                <a:latin typeface="Source Serif 4"/>
+              </a:rPr>
+              <a:t>The Inner Critic</a:t>
+            </a:r>
+          </a:p>
+        </p:txBody>
+      </p:sp>
+      <p:sp>
+        <p:nvSpPr>
+          <p:cNvPr id="5" name="TextBox 4"/>
+          <p:cNvSpPr txBox="1"/>
+          <p:nvPr/>
+        </p:nvSpPr>
+        <p:spPr>
+          <a:xfrm>
+            <a:off x="548640" y="1325880"/>
+            <a:ext cx="10972800" cy="365760"/>
+          </a:xfrm>
+          <a:prstGeom prst="rect">
+            <a:avLst/>
+          </a:prstGeom>
+          <a:noFill/>
+        </p:spPr>
+        <p:txBody>
+          <a:bodyPr wrap="square" anchor="t" lIns="0" rIns="0" tIns="0" bIns="0">
+            <a:spAutoFit/>
+          </a:bodyPr>
+          <a:lstStyle/>
+          <a:p>
+            <a:pPr algn="l">
+              <a:spcAft>
+                <a:spcPts val="630"/>
+              </a:spcAft>
+            </a:pPr>
+            <a:r>
+              <a:rPr sz="1400" b="0" i="0">
+                <a:solidFill>
+                  <a:srgbClr val="5D5A54"/>
+                </a:solidFill>
+                <a:latin typeface="Inter Tight"/>
+              </a:rPr>
+              <a:t>Upper School  ·  20 minutes (fits a 30-minute advisory, with time for your opening check-in; 10-minute version below)  ·  Any grade</a:t>
+            </a:r>
+          </a:p>
+        </p:txBody>
+      </p:sp>
+      <p:sp>
+        <p:nvSpPr>
+          <p:cNvPr id="6" name="TextBox 5"/>
+          <p:cNvSpPr txBox="1"/>
+          <p:nvPr/>
+        </p:nvSpPr>
+        <p:spPr>
+          <a:xfrm>
+            <a:off x="548640" y="1828800"/>
+            <a:ext cx="5120640" cy="4389120"/>
+          </a:xfrm>
+          <a:prstGeom prst="rect">
+            <a:avLst/>
+          </a:prstGeom>
+          <a:noFill/>
+        </p:spPr>
+        <p:txBody>
+          <a:bodyPr wrap="square" anchor="t" lIns="0" rIns="0" tIns="0" bIns="0">
+            <a:spAutoFit/>
+          </a:bodyPr>
+          <a:lstStyle/>
+          <a:p>
+            <a:pPr algn="l">
+              <a:spcAft>
+                <a:spcPts val="675"/>
+              </a:spcAft>
+            </a:pPr>
+            <a:r>
+              <a:rPr sz="1100" b="1" i="0">
+                <a:solidFill>
+                  <a:srgbClr val="0B2D5B"/>
+                </a:solidFill>
+                <a:latin typeface="Inter Tight"/>
+              </a:rPr>
+              <a:t>GOAL</a:t>
+            </a:r>
+          </a:p>
+          <a:p>
+            <a:pPr algn="l">
+              <a:spcAft>
+                <a:spcPts val="675"/>
+              </a:spcAft>
+            </a:pPr>
+            <a:r>
+              <a:rPr sz="1500" b="0" i="0">
+                <a:solidFill>
+                  <a:srgbClr val="1C1B19"/>
+                </a:solidFill>
+                <a:latin typeface="Source Serif 4"/>
+              </a:rPr>
+              <a:t>Students can explain why the inner critic sounds so convincing (it runs on the threat system), what research says about self-compassion and effort, and how to get some distance from the voice. Each student privately rewrites one critic line as a coach on their side would say it.</a:t>
+            </a:r>
+          </a:p>
+          <a:p>
+            <a:pPr algn="l">
+              <a:spcAft>
+                <a:spcPts val="675"/>
+              </a:spcAft>
+            </a:pPr>
+            <a:r>
+              <a:rPr sz="1500" b="0" i="0">
+                <a:solidFill>
+                  <a:srgbClr val="1C1B19"/>
+                </a:solidFill>
+                <a:latin typeface="Source Serif 4"/>
+              </a:rPr>
+              <a:t/>
+            </a:r>
+          </a:p>
+          <a:p>
+            <a:pPr algn="l">
+              <a:spcAft>
+                <a:spcPts val="675"/>
+              </a:spcAft>
+            </a:pPr>
+            <a:r>
+              <a:rPr sz="1100" b="1" i="0">
+                <a:solidFill>
+                  <a:srgbClr val="0B2D5B"/>
+                </a:solidFill>
+                <a:latin typeface="Inter Tight"/>
+              </a:rPr>
+              <a:t>MATERIALS</a:t>
+            </a:r>
+          </a:p>
+          <a:p>
+            <a:pPr algn="l">
+              <a:spcAft>
+                <a:spcPts val="675"/>
+              </a:spcAft>
+            </a:pPr>
+            <a:r>
+              <a:rPr sz="1500" b="0" i="0">
+                <a:solidFill>
+                  <a:srgbClr val="1C1B19"/>
+                </a:solidFill>
+                <a:latin typeface="Source Serif 4"/>
+              </a:rPr>
+              <a:t>Scrap paper for the opening guess</a:t>
+            </a:r>
+          </a:p>
+          <a:p>
+            <a:pPr algn="l">
+              <a:spcAft>
+                <a:spcPts val="675"/>
+              </a:spcAft>
+            </a:pPr>
+            <a:r>
+              <a:rPr sz="1500" b="0" i="0">
+                <a:solidFill>
+                  <a:srgbClr val="1C1B19"/>
+                </a:solidFill>
+                <a:latin typeface="Source Serif 4"/>
+              </a:rPr>
+              <a:t>Index cards for the private critic-to-coach rewrite</a:t>
+            </a:r>
+          </a:p>
+          <a:p>
+            <a:pPr algn="l">
+              <a:spcAft>
+                <a:spcPts val="675"/>
+              </a:spcAft>
+            </a:pPr>
+            <a:r>
+              <a:rPr sz="1500" b="0" i="0">
+                <a:solidFill>
+                  <a:srgbClr val="1C1B19"/>
+                </a:solidFill>
+                <a:latin typeface="Source Serif 4"/>
+              </a:rPr>
+              <a:t>The student page link (last slide) to share after advisory</a:t>
+            </a:r>
+          </a:p>
+        </p:txBody>
+      </p:sp>
+      <p:sp>
+        <p:nvSpPr>
+          <p:cNvPr id="7" name="TextBox 6"/>
+          <p:cNvSpPr txBox="1"/>
+          <p:nvPr/>
+        </p:nvSpPr>
+        <p:spPr>
+          <a:xfrm>
+            <a:off x="6126480" y="1828800"/>
+            <a:ext cx="5486400" cy="4389120"/>
+          </a:xfrm>
+          <a:prstGeom prst="rect">
+            <a:avLst/>
+          </a:prstGeom>
+          <a:noFill/>
+        </p:spPr>
+        <p:txBody>
+          <a:bodyPr wrap="square" anchor="t" lIns="0" rIns="0" tIns="0" bIns="0">
+            <a:spAutoFit/>
+          </a:bodyPr>
+          <a:lstStyle/>
+          <a:p>
+            <a:pPr algn="l">
+              <a:spcAft>
+                <a:spcPts val="630"/>
+              </a:spcAft>
+            </a:pPr>
+            <a:r>
+              <a:rPr sz="1100" b="1" i="0">
+                <a:solidFill>
+                  <a:srgbClr val="0B2D5B"/>
+                </a:solidFill>
+                <a:latin typeface="Inter Tight"/>
+              </a:rPr>
+              <a:t>FLOW</a:t>
+            </a:r>
+          </a:p>
+          <a:p>
+            <a:pPr algn="l">
+              <a:spcAft>
+                <a:spcPts val="630"/>
+              </a:spcAft>
+            </a:pPr>
+            <a:r>
+              <a:rPr sz="1300" b="1" i="0">
+                <a:solidFill>
+                  <a:srgbClr val="F47B20"/>
+                </a:solidFill>
+                <a:latin typeface="Inter Tight"/>
+              </a:rPr>
+              <a:t>3 min   </a:t>
+            </a:r>
+            <a:r>
+              <a:rPr sz="1400" b="0" i="0">
+                <a:solidFill>
+                  <a:srgbClr val="1C1B19"/>
+                </a:solidFill>
+                <a:latin typeface="Source Serif 4"/>
+              </a:rPr>
+              <a:t>The T-shirt guess (spotlight effect)</a:t>
+            </a:r>
+          </a:p>
+          <a:p>
+            <a:pPr algn="l">
+              <a:spcAft>
+                <a:spcPts val="630"/>
+              </a:spcAft>
+            </a:pPr>
+            <a:r>
+              <a:rPr sz="1300" b="1" i="0">
+                <a:solidFill>
+                  <a:srgbClr val="F47B20"/>
+                </a:solidFill>
+                <a:latin typeface="Inter Tight"/>
+              </a:rPr>
+              <a:t>3 min   </a:t>
+            </a:r>
+            <a:r>
+              <a:rPr sz="1400" b="0" i="0">
+                <a:solidFill>
+                  <a:srgbClr val="1C1B19"/>
+                </a:solidFill>
+                <a:latin typeface="Source Serif 4"/>
+              </a:rPr>
+              <a:t>Three systems: threat, drive, soothing</a:t>
+            </a:r>
+          </a:p>
+          <a:p>
+            <a:pPr algn="l">
+              <a:spcAft>
+                <a:spcPts val="630"/>
+              </a:spcAft>
+            </a:pPr>
+            <a:r>
+              <a:rPr sz="1300" b="1" i="0">
+                <a:solidFill>
+                  <a:srgbClr val="F47B20"/>
+                </a:solidFill>
+                <a:latin typeface="Inter Tight"/>
+              </a:rPr>
+              <a:t>3 min   </a:t>
+            </a:r>
+            <a:r>
+              <a:rPr sz="1400" b="0" i="0">
+                <a:solidFill>
+                  <a:srgbClr val="1C1B19"/>
+                </a:solidFill>
+                <a:latin typeface="Source Serif 4"/>
+              </a:rPr>
+              <a:t>Quick vote: does being hard on yourself keep you sharp?</a:t>
+            </a:r>
+          </a:p>
+          <a:p>
+            <a:pPr algn="l">
+              <a:spcAft>
+                <a:spcPts val="630"/>
+              </a:spcAft>
+            </a:pPr>
+            <a:r>
+              <a:rPr sz="1300" b="1" i="0">
+                <a:solidFill>
+                  <a:srgbClr val="F47B20"/>
+                </a:solidFill>
+                <a:latin typeface="Inter Tight"/>
+              </a:rPr>
+              <a:t>3 min   </a:t>
+            </a:r>
+            <a:r>
+              <a:rPr sz="1400" b="0" i="0">
+                <a:solidFill>
+                  <a:srgbClr val="1C1B19"/>
+                </a:solidFill>
+                <a:latin typeface="Source Serif 4"/>
+              </a:rPr>
+              <a:t>Get some distance from the voice</a:t>
+            </a:r>
+          </a:p>
+          <a:p>
+            <a:pPr algn="l">
+              <a:spcAft>
+                <a:spcPts val="630"/>
+              </a:spcAft>
+            </a:pPr>
+            <a:r>
+              <a:rPr sz="1300" b="1" i="0">
+                <a:solidFill>
+                  <a:srgbClr val="F47B20"/>
+                </a:solidFill>
+                <a:latin typeface="Inter Tight"/>
+              </a:rPr>
+              <a:t>4 min   </a:t>
+            </a:r>
+            <a:r>
+              <a:rPr sz="1400" b="0" i="0">
+                <a:solidFill>
+                  <a:srgbClr val="1C1B19"/>
+                </a:solidFill>
+                <a:latin typeface="Source Serif 4"/>
+              </a:rPr>
+              <a:t>Three moments: which voice is talking? (pairs)</a:t>
+            </a:r>
+          </a:p>
+          <a:p>
+            <a:pPr algn="l">
+              <a:spcAft>
+                <a:spcPts val="630"/>
+              </a:spcAft>
+            </a:pPr>
+            <a:r>
+              <a:rPr sz="1300" b="1" i="0">
+                <a:solidFill>
+                  <a:srgbClr val="F47B20"/>
+                </a:solidFill>
+                <a:latin typeface="Inter Tight"/>
+              </a:rPr>
+              <a:t>3 min   </a:t>
+            </a:r>
+            <a:r>
+              <a:rPr sz="1400" b="0" i="0">
+                <a:solidFill>
+                  <a:srgbClr val="1C1B19"/>
+                </a:solidFill>
+                <a:latin typeface="Source Serif 4"/>
+              </a:rPr>
+              <a:t>Rewrite the critic as a coach (private card)</a:t>
+            </a:r>
+          </a:p>
+          <a:p>
+            <a:pPr algn="l">
+              <a:spcAft>
+                <a:spcPts val="630"/>
+              </a:spcAft>
+            </a:pPr>
+            <a:r>
+              <a:rPr sz="1300" b="1" i="0">
+                <a:solidFill>
+                  <a:srgbClr val="F47B20"/>
+                </a:solidFill>
+                <a:latin typeface="Inter Tight"/>
+              </a:rPr>
+              <a:t>1 min   </a:t>
+            </a:r>
+            <a:r>
+              <a:rPr sz="1400" b="0" i="0">
+                <a:solidFill>
+                  <a:srgbClr val="1C1B19"/>
+                </a:solidFill>
+                <a:latin typeface="Source Serif 4"/>
+              </a:rPr>
+              <a:t>One thing to try, and the student page</a:t>
+            </a:r>
+          </a:p>
+          <a:p>
+            <a:pPr algn="l">
+              <a:spcAft>
+                <a:spcPts val="630"/>
+              </a:spcAft>
+            </a:pPr>
+            <a:r>
+              <a:rPr sz="1400" b="0" i="0">
+                <a:solidFill>
+                  <a:srgbClr val="1C1B19"/>
+                </a:solidFill>
+                <a:latin typeface="Source Serif 4"/>
+              </a:rPr>
+              <a:t/>
+            </a:r>
+          </a:p>
+          <a:p>
+            <a:pPr algn="l">
+              <a:spcAft>
+                <a:spcPts val="630"/>
+              </a:spcAft>
+            </a:pPr>
+            <a:r>
+              <a:rPr sz="1100" b="1" i="0">
+                <a:solidFill>
+                  <a:srgbClr val="0B2D5B"/>
+                </a:solidFill>
+                <a:latin typeface="Inter Tight"/>
+              </a:rPr>
+              <a:t>SHORT ON TIME (10-MINUTE CHECK-IN)</a:t>
+            </a:r>
+          </a:p>
+          <a:p>
+            <a:pPr algn="l">
+              <a:spcAft>
+                <a:spcPts val="630"/>
+              </a:spcAft>
+            </a:pPr>
+            <a:r>
+              <a:rPr sz="1400" b="0" i="0">
+                <a:solidFill>
+                  <a:srgbClr val="1C1B19"/>
+                </a:solidFill>
+                <a:latin typeface="Source Serif 4"/>
+              </a:rPr>
+              <a:t>The T-shirt guess (2), quick vote and the self-compassion research (3), rewrite the critic as a coach on a private card (4), the student page (1).</a:t>
+            </a:r>
+          </a:p>
+        </p:txBody>
+      </p:sp>
+    </p:spTree>
+  </p:cSld>
+  <p:clrMapOvr>
+    <a:masterClrMapping/>
+  </p:clrMapOvr>
+</p:sld>
+</file>
+
+<file path=ppt/slides/slide11.xml><?xml version="1.0" encoding="utf-8"?>
+<p:sld xmlns:a="http://schemas.openxmlformats.org/drawingml/2006/main" xmlns:p="http://schemas.openxmlformats.org/presentationml/2006/main" xmlns:r="http://schemas.openxmlformats.org/officeDocument/2006/relationships" show="0">
+  <p:cSld>
+    <p:bg>
+      <p:bgPr>
+        <a:solidFill>
+          <a:srgbClr val="EEEBE4"/>
+        </a:solidFill>
+        <a:effectLst/>
+      </p:bgPr>
+    </p:bg>
+    <p:spTree>
+      <p:nvGrpSpPr>
+        <p:cNvPr id="1" name=""/>
+        <p:cNvGrpSpPr/>
+        <p:nvPr/>
+      </p:nvGrpSpPr>
+      <p:grpSpPr/>
+      <p:sp>
+        <p:nvSpPr>
+          <p:cNvPr id="2" name="Rectangle 1"/>
+          <p:cNvSpPr/>
+          <p:nvPr/>
+        </p:nvSpPr>
+        <p:spPr>
+          <a:xfrm>
+            <a:off x="0" y="0"/>
+            <a:ext cx="12191695" cy="384048"/>
+          </a:xfrm>
+          <a:prstGeom prst="rect">
+            <a:avLst/>
+          </a:prstGeom>
+          <a:solidFill>
+            <a:srgbClr val="0B2D5B"/>
+          </a:solidFill>
+          <a:ln>
+            <a:noFill/>
+          </a:ln>
+          <a:effectLst/>
+        </p:spPr>
+        <p:style>
+          <a:lnRef idx="1">
+            <a:schemeClr val="accent1"/>
+          </a:lnRef>
+          <a:fillRef idx="3">
+            <a:schemeClr val="accent1"/>
+          </a:fillRef>
+          <a:effectRef idx="2">
+            <a:schemeClr val="accent1"/>
+          </a:effectRef>
+          <a:fontRef idx="minor">
+            <a:schemeClr val="lt1"/>
+          </a:fontRef>
+        </p:style>
+        <p:txBody>
+          <a:bodyPr rtlCol="0" anchor="ctr"/>
+          <a:lstStyle/>
+          <a:p>
+            <a:pPr algn="ctr"/>
+          </a:p>
+        </p:txBody>
+      </p:sp>
+      <p:sp>
+        <p:nvSpPr>
+          <p:cNvPr id="3" name="TextBox 2"/>
+          <p:cNvSpPr txBox="1"/>
+          <p:nvPr/>
+        </p:nvSpPr>
+        <p:spPr>
+          <a:xfrm>
+            <a:off x="548640" y="100584"/>
+            <a:ext cx="10972800" cy="274320"/>
+          </a:xfrm>
+          <a:prstGeom prst="rect">
+            <a:avLst/>
+          </a:prstGeom>
+          <a:noFill/>
+        </p:spPr>
+        <p:txBody>
+          <a:bodyPr wrap="square" anchor="t" lIns="0" rIns="0" tIns="0" bIns="0">
+            <a:spAutoFit/>
+          </a:bodyPr>
+          <a:lstStyle/>
+          <a:p>
+            <a:pPr algn="l">
+              <a:spcAft>
+                <a:spcPts val="495"/>
+              </a:spcAft>
+            </a:pPr>
+            <a:r>
+              <a:rPr sz="1100" b="1" i="0">
+                <a:solidFill>
+                  <a:srgbClr val="FFFFFF"/>
+                </a:solidFill>
+                <a:latin typeface="Inter Tight"/>
+              </a:rPr>
+              <a:t>TEACHER PAGE  ·  skipped when you present  ·  Before you teach</a:t>
+            </a:r>
+          </a:p>
+        </p:txBody>
+      </p:sp>
+      <p:sp>
+        <p:nvSpPr>
+          <p:cNvPr id="4" name="TextBox 3"/>
+          <p:cNvSpPr txBox="1"/>
+          <p:nvPr/>
+        </p:nvSpPr>
+        <p:spPr>
+          <a:xfrm>
+            <a:off x="548640" y="685800"/>
+            <a:ext cx="10972800" cy="640080"/>
+          </a:xfrm>
+          <a:prstGeom prst="rect">
+            <a:avLst/>
+          </a:prstGeom>
+          <a:noFill/>
+        </p:spPr>
+        <p:txBody>
+          <a:bodyPr wrap="square" anchor="t" lIns="0" rIns="0" tIns="0" bIns="0">
+            <a:spAutoFit/>
+          </a:bodyPr>
+          <a:lstStyle/>
+          <a:p>
+            <a:pPr algn="l">
+              <a:spcAft>
+                <a:spcPts val="1350"/>
+              </a:spcAft>
+            </a:pPr>
+            <a:r>
+              <a:rPr sz="3000" b="1" i="0">
+                <a:solidFill>
+                  <a:srgbClr val="1C1B19"/>
+                </a:solidFill>
+                <a:latin typeface="Source Serif 4"/>
+              </a:rPr>
+              <a:t>Before you teach</a:t>
+            </a:r>
+          </a:p>
+        </p:txBody>
+      </p:sp>
+      <p:sp>
+        <p:nvSpPr>
+          <p:cNvPr id="5" name="TextBox 4"/>
+          <p:cNvSpPr txBox="1"/>
+          <p:nvPr/>
+        </p:nvSpPr>
+        <p:spPr>
+          <a:xfrm>
+            <a:off x="548640" y="1463040"/>
+            <a:ext cx="5394960" cy="4937760"/>
+          </a:xfrm>
+          <a:prstGeom prst="rect">
+            <a:avLst/>
+          </a:prstGeom>
+          <a:noFill/>
+        </p:spPr>
+        <p:txBody>
+          <a:bodyPr wrap="square" anchor="t" lIns="0" rIns="0" tIns="0" bIns="0">
+            <a:spAutoFit/>
+          </a:bodyPr>
+          <a:lstStyle/>
+          <a:p>
+            <a:pPr algn="l">
+              <a:spcAft>
+                <a:spcPts val="585"/>
+              </a:spcAft>
+            </a:pPr>
+            <a:r>
+              <a:rPr sz="1500" b="1" i="0">
+                <a:solidFill>
+                  <a:srgbClr val="1C1B19"/>
+                </a:solidFill>
+                <a:latin typeface="Source Serif 4"/>
+              </a:rPr>
+              <a:t>Keep the critic's lines private.</a:t>
+            </a:r>
+          </a:p>
+          <a:p>
+            <a:pPr algn="l">
+              <a:spcAft>
+                <a:spcPts val="585"/>
+              </a:spcAft>
+            </a:pPr>
+            <a:r>
+              <a:rPr sz="1300" b="0" i="0">
+                <a:solidFill>
+                  <a:srgbClr val="1C1B19"/>
+                </a:solidFill>
+                <a:latin typeface="Source Serif 4"/>
+              </a:rPr>
+              <a:t>Nobody reads their card aloud or says what their critic tells them. The cards go home with the student.</a:t>
+            </a:r>
+          </a:p>
+          <a:p>
+            <a:pPr algn="l">
+              <a:spcAft>
+                <a:spcPts val="585"/>
+              </a:spcAft>
+            </a:pPr>
+            <a:r>
+              <a:rPr sz="1300" b="0" i="0">
+                <a:solidFill>
+                  <a:srgbClr val="1C1B19"/>
+                </a:solidFill>
+                <a:latin typeface="Source Serif 4"/>
+              </a:rPr>
+              <a:t/>
+            </a:r>
+          </a:p>
+          <a:p>
+            <a:pPr algn="l">
+              <a:spcAft>
+                <a:spcPts val="585"/>
+              </a:spcAft>
+            </a:pPr>
+            <a:r>
+              <a:rPr sz="1500" b="1" i="0">
+                <a:solidFill>
+                  <a:srgbClr val="1C1B19"/>
+                </a:solidFill>
+                <a:latin typeface="Source Serif 4"/>
+              </a:rPr>
+              <a:t>Worthless or hopeless goes to a counselor.</a:t>
+            </a:r>
+          </a:p>
+          <a:p>
+            <a:pPr algn="l">
+              <a:spcAft>
+                <a:spcPts val="585"/>
+              </a:spcAft>
+            </a:pPr>
+            <a:r>
+              <a:rPr sz="1300" b="0" i="0">
+                <a:solidFill>
+                  <a:srgbClr val="1C1B19"/>
+                </a:solidFill>
+                <a:latin typeface="Source Serif 4"/>
+              </a:rPr>
+              <a:t>If a student says the critic is loud most of the day, or that they feel worthless or hopeless, thank them, don't explore it in the circle, and connect them with a counselor that day. Don't ask screening questions in advisory.</a:t>
+            </a:r>
+          </a:p>
+          <a:p>
+            <a:pPr algn="l">
+              <a:spcAft>
+                <a:spcPts val="585"/>
+              </a:spcAft>
+            </a:pPr>
+            <a:r>
+              <a:rPr sz="1300" b="0" i="0">
+                <a:solidFill>
+                  <a:srgbClr val="1C1B19"/>
+                </a:solidFill>
+                <a:latin typeface="Source Serif 4"/>
+              </a:rPr>
+              <a:t/>
+            </a:r>
+          </a:p>
+          <a:p>
+            <a:pPr algn="l">
+              <a:spcAft>
+                <a:spcPts val="585"/>
+              </a:spcAft>
+            </a:pPr>
+            <a:r>
+              <a:rPr sz="1500" b="1" i="0">
+                <a:solidFill>
+                  <a:srgbClr val="1C1B19"/>
+                </a:solidFill>
+                <a:latin typeface="Source Serif 4"/>
+              </a:rPr>
+              <a:t>When the critic is about bodies or food.</a:t>
+            </a:r>
+          </a:p>
+          <a:p>
+            <a:pPr algn="l">
+              <a:spcAft>
+                <a:spcPts val="585"/>
+              </a:spcAft>
+            </a:pPr>
+            <a:r>
+              <a:rPr sz="1300" b="0" i="0">
+                <a:solidFill>
+                  <a:srgbClr val="1C1B19"/>
+                </a:solidFill>
+                <a:latin typeface="Source Serif 4"/>
+              </a:rPr>
+              <a:t>Keep every example away from weight, shape and eating. If a student's critic is mostly about their body, food or weight, that's a counselor conversation. The student page lists help for that.</a:t>
+            </a:r>
+          </a:p>
+          <a:p>
+            <a:pPr algn="l">
+              <a:spcAft>
+                <a:spcPts val="585"/>
+              </a:spcAft>
+            </a:pPr>
+            <a:r>
+              <a:rPr sz="1300" b="0" i="0">
+                <a:solidFill>
+                  <a:srgbClr val="1C1B19"/>
+                </a:solidFill>
+                <a:latin typeface="Source Serif 4"/>
+              </a:rPr>
+              <a:t/>
+            </a:r>
+          </a:p>
+        </p:txBody>
+      </p:sp>
+      <p:sp>
+        <p:nvSpPr>
+          <p:cNvPr id="6" name="TextBox 5"/>
+          <p:cNvSpPr txBox="1"/>
+          <p:nvPr/>
+        </p:nvSpPr>
+        <p:spPr>
+          <a:xfrm>
+            <a:off x="6217920" y="1463040"/>
+            <a:ext cx="5394960" cy="4937760"/>
+          </a:xfrm>
+          <a:prstGeom prst="rect">
+            <a:avLst/>
+          </a:prstGeom>
+          <a:noFill/>
+        </p:spPr>
+        <p:txBody>
+          <a:bodyPr wrap="square" anchor="t" lIns="0" rIns="0" tIns="0" bIns="0">
+            <a:spAutoFit/>
+          </a:bodyPr>
+          <a:lstStyle/>
+          <a:p>
+            <a:pPr algn="l">
+              <a:spcAft>
+                <a:spcPts val="585"/>
+              </a:spcAft>
+            </a:pPr>
+            <a:r>
+              <a:rPr sz="1500" b="1" i="0">
+                <a:solidFill>
+                  <a:srgbClr val="1C1B19"/>
+                </a:solidFill>
+                <a:latin typeface="Source Serif 4"/>
+              </a:rPr>
+              <a:t>Respect where a voice came from.</a:t>
+            </a:r>
+          </a:p>
+          <a:p>
+            <a:pPr algn="l">
+              <a:spcAft>
+                <a:spcPts val="585"/>
+              </a:spcAft>
+            </a:pPr>
+            <a:r>
+              <a:rPr sz="1300" b="0" i="0">
+                <a:solidFill>
+                  <a:srgbClr val="1C1B19"/>
+                </a:solidFill>
+                <a:latin typeface="Source Serif 4"/>
+              </a:rPr>
+              <a:t>Some students hear their critic in a parent's, coach's or grandparent's words. Don't invite anyone to criticize their family. The point from the student page is that a voice can be loving at its source and still not get the last word.</a:t>
+            </a:r>
+          </a:p>
+          <a:p>
+            <a:pPr algn="l">
+              <a:spcAft>
+                <a:spcPts val="585"/>
+              </a:spcAft>
+            </a:pPr>
+            <a:r>
+              <a:rPr sz="1300" b="0" i="0">
+                <a:solidFill>
+                  <a:srgbClr val="1C1B19"/>
+                </a:solidFill>
+                <a:latin typeface="Source Serif 4"/>
+              </a:rPr>
+              <a:t/>
+            </a:r>
+          </a:p>
+          <a:p>
+            <a:pPr algn="l">
+              <a:spcAft>
+                <a:spcPts val="585"/>
+              </a:spcAft>
+            </a:pPr>
+            <a:r>
+              <a:rPr sz="1500" b="1" i="0">
+                <a:solidFill>
+                  <a:srgbClr val="1C1B19"/>
+                </a:solidFill>
+                <a:latin typeface="Source Serif 4"/>
+              </a:rPr>
+              <a:t>The SAT card can land hard.</a:t>
+            </a:r>
+          </a:p>
+          <a:p>
+            <a:pPr algn="l">
+              <a:spcAft>
+                <a:spcPts val="585"/>
+              </a:spcAft>
+            </a:pPr>
+            <a:r>
+              <a:rPr sz="1300" b="0" i="0">
+                <a:solidFill>
+                  <a:srgbClr val="1C1B19"/>
+                </a:solidFill>
+                <a:latin typeface="Source Serif 4"/>
+              </a:rPr>
+              <a:t>Juniors and seniors may be in testing season. Keep it on the character, and don't ask anyone about their own scores.</a:t>
+            </a:r>
+          </a:p>
+          <a:p>
+            <a:pPr algn="l">
+              <a:spcAft>
+                <a:spcPts val="585"/>
+              </a:spcAft>
+            </a:pPr>
+            <a:r>
+              <a:rPr sz="1300" b="0" i="0">
+                <a:solidFill>
+                  <a:srgbClr val="1C1B19"/>
+                </a:solidFill>
+                <a:latin typeface="Source Serif 4"/>
+              </a:rPr>
+              <a:t/>
+            </a:r>
+          </a:p>
+          <a:p>
+            <a:pPr algn="l">
+              <a:spcAft>
+                <a:spcPts val="585"/>
+              </a:spcAft>
+            </a:pPr>
+            <a:r>
+              <a:rPr sz="1500" b="1" i="0">
+                <a:solidFill>
+                  <a:srgbClr val="1C1B19"/>
+                </a:solidFill>
+                <a:latin typeface="Source Serif 4"/>
+              </a:rPr>
+              <a:t>Don't push affirmations.</a:t>
+            </a:r>
+          </a:p>
+          <a:p>
+            <a:pPr algn="l">
+              <a:spcAft>
+                <a:spcPts val="585"/>
+              </a:spcAft>
+            </a:pPr>
+            <a:r>
+              <a:rPr sz="1300" b="0" i="0">
+                <a:solidFill>
+                  <a:srgbClr val="1C1B19"/>
+                </a:solidFill>
+                <a:latin typeface="Source Serif 4"/>
+              </a:rPr>
+              <a:t>If a student says "just tell yourself you're amazing," gently note that glowing lines you don't believe can make the gap feel bigger. Aim for fair and kind.</a:t>
+            </a:r>
+          </a:p>
+          <a:p>
+            <a:pPr algn="l">
+              <a:spcAft>
+                <a:spcPts val="585"/>
+              </a:spcAft>
+            </a:pPr>
+            <a:r>
+              <a:rPr sz="1300" b="0" i="0">
+                <a:solidFill>
+                  <a:srgbClr val="1C1B19"/>
+                </a:solidFill>
+                <a:latin typeface="Source Serif 4"/>
+              </a:rPr>
+              <a:t/>
+            </a:r>
+          </a:p>
+        </p:txBody>
+      </p:sp>
+    </p:spTree>
+  </p:cSld>
+  <p:clrMapOvr>
+    <a:masterClrMapping/>
+  </p:clrMapOvr>
+</p:sld>
+</file>
+
+<file path=ppt/slides/slide12.xml><?xml version="1.0" encoding="utf-8"?>
+<p:sld xmlns:a="http://schemas.openxmlformats.org/drawingml/2006/main" xmlns:p="http://schemas.openxmlformats.org/presentationml/2006/main" xmlns:r="http://schemas.openxmlformats.org/officeDocument/2006/relationships" show="0">
+  <p:cSld>
+    <p:bg>
+      <p:bgPr>
+        <a:solidFill>
+          <a:srgbClr val="EEEBE4"/>
+        </a:solidFill>
+        <a:effectLst/>
+      </p:bgPr>
+    </p:bg>
+    <p:spTree>
+      <p:nvGrpSpPr>
+        <p:cNvPr id="1" name=""/>
+        <p:cNvGrpSpPr/>
+        <p:nvPr/>
+      </p:nvGrpSpPr>
+      <p:grpSpPr/>
+      <p:sp>
+        <p:nvSpPr>
+          <p:cNvPr id="2" name="Rectangle 1"/>
+          <p:cNvSpPr/>
+          <p:nvPr/>
+        </p:nvSpPr>
+        <p:spPr>
+          <a:xfrm>
+            <a:off x="0" y="0"/>
+            <a:ext cx="12191695" cy="384048"/>
+          </a:xfrm>
+          <a:prstGeom prst="rect">
+            <a:avLst/>
+          </a:prstGeom>
+          <a:solidFill>
+            <a:srgbClr val="0B2D5B"/>
+          </a:solidFill>
+          <a:ln>
+            <a:noFill/>
+          </a:ln>
+          <a:effectLst/>
+        </p:spPr>
+        <p:style>
+          <a:lnRef idx="1">
+            <a:schemeClr val="accent1"/>
+          </a:lnRef>
+          <a:fillRef idx="3">
+            <a:schemeClr val="accent1"/>
+          </a:fillRef>
+          <a:effectRef idx="2">
+            <a:schemeClr val="accent1"/>
+          </a:effectRef>
+          <a:fontRef idx="minor">
+            <a:schemeClr val="lt1"/>
+          </a:fontRef>
+        </p:style>
+        <p:txBody>
+          <a:bodyPr rtlCol="0" anchor="ctr"/>
+          <a:lstStyle/>
+          <a:p>
+            <a:pPr algn="ctr"/>
+          </a:p>
+        </p:txBody>
+      </p:sp>
+      <p:sp>
+        <p:nvSpPr>
+          <p:cNvPr id="3" name="TextBox 2"/>
+          <p:cNvSpPr txBox="1"/>
+          <p:nvPr/>
+        </p:nvSpPr>
+        <p:spPr>
+          <a:xfrm>
+            <a:off x="548640" y="100584"/>
+            <a:ext cx="10972800" cy="274320"/>
+          </a:xfrm>
+          <a:prstGeom prst="rect">
+            <a:avLst/>
+          </a:prstGeom>
+          <a:noFill/>
+        </p:spPr>
+        <p:txBody>
+          <a:bodyPr wrap="square" anchor="t" lIns="0" rIns="0" tIns="0" bIns="0">
+            <a:spAutoFit/>
+          </a:bodyPr>
+          <a:lstStyle/>
+          <a:p>
+            <a:pPr algn="l">
+              <a:spcAft>
+                <a:spcPts val="495"/>
+              </a:spcAft>
+            </a:pPr>
+            <a:r>
+              <a:rPr sz="1100" b="1" i="0">
+                <a:solidFill>
+                  <a:srgbClr val="FFFFFF"/>
+                </a:solidFill>
+                <a:latin typeface="Inter Tight"/>
+              </a:rPr>
+              <a:t>TEACHER PAGE  ·  skipped when you present  ·  Every student in the room</a:t>
+            </a:r>
+          </a:p>
+        </p:txBody>
+      </p:sp>
+      <p:sp>
+        <p:nvSpPr>
+          <p:cNvPr id="4" name="TextBox 3"/>
+          <p:cNvSpPr txBox="1"/>
+          <p:nvPr/>
+        </p:nvSpPr>
+        <p:spPr>
+          <a:xfrm>
+            <a:off x="548640" y="685800"/>
+            <a:ext cx="10972800" cy="640080"/>
+          </a:xfrm>
+          <a:prstGeom prst="rect">
+            <a:avLst/>
+          </a:prstGeom>
+          <a:noFill/>
+        </p:spPr>
+        <p:txBody>
+          <a:bodyPr wrap="square" anchor="t" lIns="0" rIns="0" tIns="0" bIns="0">
+            <a:spAutoFit/>
+          </a:bodyPr>
+          <a:lstStyle/>
+          <a:p>
+            <a:pPr algn="l">
+              <a:spcAft>
+                <a:spcPts val="1350"/>
+              </a:spcAft>
+            </a:pPr>
+            <a:r>
+              <a:rPr sz="3000" b="1" i="0">
+                <a:solidFill>
+                  <a:srgbClr val="1C1B19"/>
+                </a:solidFill>
+                <a:latin typeface="Source Serif 4"/>
+              </a:rPr>
+              <a:t>Every student in the room</a:t>
+            </a:r>
+          </a:p>
+        </p:txBody>
+      </p:sp>
+      <p:sp>
+        <p:nvSpPr>
+          <p:cNvPr id="5" name="TextBox 4"/>
+          <p:cNvSpPr txBox="1"/>
+          <p:nvPr/>
+        </p:nvSpPr>
+        <p:spPr>
+          <a:xfrm>
+            <a:off x="548640" y="1325880"/>
+            <a:ext cx="10972800" cy="365760"/>
+          </a:xfrm>
+          <a:prstGeom prst="rect">
+            <a:avLst/>
+          </a:prstGeom>
+          <a:noFill/>
+        </p:spPr>
+        <p:txBody>
+          <a:bodyPr wrap="square" anchor="t" lIns="0" rIns="0" tIns="0" bIns="0">
+            <a:spAutoFit/>
+          </a:bodyPr>
+          <a:lstStyle/>
+          <a:p>
+            <a:pPr algn="l">
+              <a:spcAft>
+                <a:spcPts val="630"/>
+              </a:spcAft>
+            </a:pPr>
+            <a:r>
+              <a:rPr sz="1400" b="0" i="0">
+                <a:solidFill>
+                  <a:srgbClr val="5D5A54"/>
+                </a:solidFill>
+                <a:latin typeface="Inter Tight"/>
+              </a:rPr>
+              <a:t>Culture, family, identity, ability and money: what to keep in mind for this topic.</a:t>
+            </a:r>
+          </a:p>
+        </p:txBody>
+      </p:sp>
+      <p:sp>
+        <p:nvSpPr>
+          <p:cNvPr id="6" name="TextBox 5"/>
+          <p:cNvSpPr txBox="1"/>
+          <p:nvPr/>
+        </p:nvSpPr>
+        <p:spPr>
+          <a:xfrm>
+            <a:off x="548640" y="1828800"/>
+            <a:ext cx="5394960" cy="4572000"/>
+          </a:xfrm>
+          <a:prstGeom prst="rect">
+            <a:avLst/>
+          </a:prstGeom>
+          <a:noFill/>
+        </p:spPr>
+        <p:txBody>
+          <a:bodyPr wrap="square" anchor="t" lIns="0" rIns="0" tIns="0" bIns="0">
+            <a:spAutoFit/>
+          </a:bodyPr>
+          <a:lstStyle/>
+          <a:p>
+            <a:pPr algn="l">
+              <a:spcAft>
+                <a:spcPts val="585"/>
+              </a:spcAft>
+            </a:pPr>
+            <a:r>
+              <a:rPr sz="1500" b="1" i="0">
+                <a:solidFill>
+                  <a:srgbClr val="1C1B19"/>
+                </a:solidFill>
+                <a:latin typeface="Source Serif 4"/>
+              </a:rPr>
+              <a:t>Messages about race and background.</a:t>
+            </a:r>
+          </a:p>
+          <a:p>
+            <a:pPr algn="l">
+              <a:spcAft>
+                <a:spcPts val="585"/>
+              </a:spcAft>
+            </a:pPr>
+            <a:r>
+              <a:rPr sz="1300" b="0" i="0">
+                <a:solidFill>
+                  <a:srgbClr val="1C1B19"/>
+                </a:solidFill>
+                <a:latin typeface="Source Serif 4"/>
+              </a:rPr>
+              <a:t>Some critic lines start as messages students absorbed about their race, culture or background. Name that once, plainly, as something that comes from outside. Don't ask anyone to share which messages they've heard.</a:t>
+            </a:r>
+          </a:p>
+          <a:p>
+            <a:pPr algn="l">
+              <a:spcAft>
+                <a:spcPts val="585"/>
+              </a:spcAft>
+            </a:pPr>
+            <a:r>
+              <a:rPr sz="1300" b="0" i="0">
+                <a:solidFill>
+                  <a:srgbClr val="1C1B19"/>
+                </a:solidFill>
+                <a:latin typeface="Source Serif 4"/>
+              </a:rPr>
+              <a:t/>
+            </a:r>
+          </a:p>
+          <a:p>
+            <a:pPr algn="l">
+              <a:spcAft>
+                <a:spcPts val="585"/>
+              </a:spcAft>
+            </a:pPr>
+            <a:r>
+              <a:rPr sz="1500" b="1" i="0">
+                <a:solidFill>
+                  <a:srgbClr val="1C1B19"/>
+                </a:solidFill>
+                <a:latin typeface="Source Serif 4"/>
+              </a:rPr>
+              <a:t>High expectations at home.</a:t>
+            </a:r>
+          </a:p>
+          <a:p>
+            <a:pPr algn="l">
+              <a:spcAft>
+                <a:spcPts val="585"/>
+              </a:spcAft>
+            </a:pPr>
+            <a:r>
+              <a:rPr sz="1300" b="0" i="0">
+                <a:solidFill>
+                  <a:srgbClr val="1C1B19"/>
+                </a:solidFill>
+                <a:latin typeface="Source Serif 4"/>
+              </a:rPr>
+              <a:t>Some families show love through high expectations and blunt feedback, and for many students that's where drive comes from. Present it as loving and still able to leave a harsh voice behind. Avoid "In X families" generalizations, and say "parent or caregiver."</a:t>
+            </a:r>
+          </a:p>
+          <a:p>
+            <a:pPr algn="l">
+              <a:spcAft>
+                <a:spcPts val="585"/>
+              </a:spcAft>
+            </a:pPr>
+            <a:r>
+              <a:rPr sz="1300" b="0" i="0">
+                <a:solidFill>
+                  <a:srgbClr val="1C1B19"/>
+                </a:solidFill>
+                <a:latin typeface="Source Serif 4"/>
+              </a:rPr>
+              <a:t/>
+            </a:r>
+          </a:p>
+          <a:p>
+            <a:pPr algn="l">
+              <a:spcAft>
+                <a:spcPts val="585"/>
+              </a:spcAft>
+            </a:pPr>
+            <a:r>
+              <a:rPr sz="1500" b="1" i="0">
+                <a:solidFill>
+                  <a:srgbClr val="1C1B19"/>
+                </a:solidFill>
+                <a:latin typeface="Source Serif 4"/>
+              </a:rPr>
+              <a:t>LGBTQ+ students.</a:t>
+            </a:r>
+          </a:p>
+          <a:p>
+            <a:pPr algn="l">
+              <a:spcAft>
+                <a:spcPts val="585"/>
+              </a:spcAft>
+            </a:pPr>
+            <a:r>
+              <a:rPr sz="1300" b="0" i="0">
+                <a:solidFill>
+                  <a:srgbClr val="1C1B19"/>
+                </a:solidFill>
+                <a:latin typeface="Source Serif 4"/>
+              </a:rPr>
+              <a:t>The critic can repeat messages about sexuality or gender identity. If a student raises it privately, connect them with a counselor, who can also share The Trevor Project (1-866-488-7386, or text START to 678-678) and, for gender identity, Trans Lifeline (877-565-8860).</a:t>
+            </a:r>
+          </a:p>
+          <a:p>
+            <a:pPr algn="l">
+              <a:spcAft>
+                <a:spcPts val="585"/>
+              </a:spcAft>
+            </a:pPr>
+            <a:r>
+              <a:rPr sz="1300" b="0" i="0">
+                <a:solidFill>
+                  <a:srgbClr val="1C1B19"/>
+                </a:solidFill>
+                <a:latin typeface="Source Serif 4"/>
+              </a:rPr>
+              <a:t/>
+            </a:r>
+          </a:p>
+        </p:txBody>
+      </p:sp>
+      <p:sp>
+        <p:nvSpPr>
+          <p:cNvPr id="7" name="TextBox 6"/>
+          <p:cNvSpPr txBox="1"/>
+          <p:nvPr/>
+        </p:nvSpPr>
+        <p:spPr>
+          <a:xfrm>
+            <a:off x="6217920" y="1828800"/>
+            <a:ext cx="5394960" cy="4572000"/>
+          </a:xfrm>
+          <a:prstGeom prst="rect">
+            <a:avLst/>
+          </a:prstGeom>
+          <a:noFill/>
+        </p:spPr>
+        <p:txBody>
+          <a:bodyPr wrap="square" anchor="t" lIns="0" rIns="0" tIns="0" bIns="0">
+            <a:spAutoFit/>
+          </a:bodyPr>
+          <a:lstStyle/>
+          <a:p>
+            <a:pPr algn="l">
+              <a:spcAft>
+                <a:spcPts val="585"/>
+              </a:spcAft>
+            </a:pPr>
+            <a:r>
+              <a:rPr sz="1500" b="1" i="0">
+                <a:solidFill>
+                  <a:srgbClr val="1C1B19"/>
+                </a:solidFill>
+                <a:latin typeface="Source Serif 4"/>
+              </a:rPr>
+              <a:t>Students who've heard a lot of correction.</a:t>
+            </a:r>
+          </a:p>
+          <a:p>
+            <a:pPr algn="l">
+              <a:spcAft>
+                <a:spcPts val="585"/>
+              </a:spcAft>
+            </a:pPr>
+            <a:r>
+              <a:rPr sz="1300" b="0" i="0">
+                <a:solidFill>
+                  <a:srgbClr val="1C1B19"/>
+                </a:solidFill>
+                <a:latin typeface="Source Serif 4"/>
+              </a:rPr>
+              <a:t>Students with ADHD, learning differences or a learning plan have often heard more correction than praise, and the critic may sound like years of it. The evidence file helps here. Never use a diagnosis as a casual adjective.</a:t>
+            </a:r>
+          </a:p>
+          <a:p>
+            <a:pPr algn="l">
+              <a:spcAft>
+                <a:spcPts val="585"/>
+              </a:spcAft>
+            </a:pPr>
+            <a:r>
+              <a:rPr sz="1300" b="0" i="0">
+                <a:solidFill>
+                  <a:srgbClr val="1C1B19"/>
+                </a:solidFill>
+                <a:latin typeface="Source Serif 4"/>
+              </a:rPr>
+              <a:t/>
+            </a:r>
+          </a:p>
+          <a:p>
+            <a:pPr algn="l">
+              <a:spcAft>
+                <a:spcPts val="585"/>
+              </a:spcAft>
+            </a:pPr>
+            <a:r>
+              <a:rPr sz="1500" b="1" i="0">
+                <a:solidFill>
+                  <a:srgbClr val="1C1B19"/>
+                </a:solidFill>
+                <a:latin typeface="Source Serif 4"/>
+              </a:rPr>
+              <a:t>Bodies of every size.</a:t>
+            </a:r>
+          </a:p>
+          <a:p>
+            <a:pPr algn="l">
+              <a:spcAft>
+                <a:spcPts val="585"/>
+              </a:spcAft>
+            </a:pPr>
+            <a:r>
+              <a:rPr sz="1300" b="0" i="0">
+                <a:solidFill>
+                  <a:srgbClr val="1C1B19"/>
+                </a:solidFill>
+                <a:latin typeface="Source Serif 4"/>
+              </a:rPr>
+              <a:t>Body talk is part of many students' critic. Keep examples on grades, sports and friendships, and never offer weight loss or appearance as a fix.</a:t>
+            </a:r>
+          </a:p>
+          <a:p>
+            <a:pPr algn="l">
+              <a:spcAft>
+                <a:spcPts val="585"/>
+              </a:spcAft>
+            </a:pPr>
+            <a:r>
+              <a:rPr sz="1300" b="0" i="0">
+                <a:solidFill>
+                  <a:srgbClr val="1C1B19"/>
+                </a:solidFill>
+                <a:latin typeface="Source Serif 4"/>
+              </a:rPr>
+              <a:t/>
+            </a:r>
+          </a:p>
+          <a:p>
+            <a:pPr algn="l">
+              <a:spcAft>
+                <a:spcPts val="585"/>
+              </a:spcAft>
+            </a:pPr>
+            <a:r>
+              <a:rPr sz="1500" b="1" i="0">
+                <a:solidFill>
+                  <a:srgbClr val="1C1B19"/>
+                </a:solidFill>
+                <a:latin typeface="Source Serif 4"/>
+              </a:rPr>
+              <a:t>Retakes and tutoring cost money.</a:t>
+            </a:r>
+          </a:p>
+          <a:p>
+            <a:pPr algn="l">
+              <a:spcAft>
+                <a:spcPts val="585"/>
+              </a:spcAft>
+            </a:pPr>
+            <a:r>
+              <a:rPr sz="1300" b="0" i="0">
+                <a:solidFill>
+                  <a:srgbClr val="1C1B19"/>
+                </a:solidFill>
+                <a:latin typeface="Source Serif 4"/>
+              </a:rPr>
+              <a:t>In the SAT moment, "do I want to retake it?" assumes the fee and time are there. Point out that a coach voice works whether or not a retake happens, and that the college counseling office can talk through options.</a:t>
+            </a:r>
+          </a:p>
+          <a:p>
+            <a:pPr algn="l">
+              <a:spcAft>
+                <a:spcPts val="585"/>
+              </a:spcAft>
+            </a:pPr>
+            <a:r>
+              <a:rPr sz="1300" b="0" i="0">
+                <a:solidFill>
+                  <a:srgbClr val="1C1B19"/>
+                </a:solidFill>
+                <a:latin typeface="Source Serif 4"/>
+              </a:rPr>
+              <a:t/>
+            </a:r>
+          </a:p>
+        </p:txBody>
+      </p:sp>
+    </p:spTree>
+  </p:cSld>
+  <p:clrMapOvr>
+    <a:masterClrMapping/>
+  </p:clrMapOvr>
+</p:sld>
+</file>
+
+<file path=ppt/slides/slide13.xml><?xml version="1.0" encoding="utf-8"?>
+<p:sld xmlns:a="http://schemas.openxmlformats.org/drawingml/2006/main" xmlns:p="http://schemas.openxmlformats.org/presentationml/2006/main" xmlns:r="http://schemas.openxmlformats.org/officeDocument/2006/relationships" show="0">
+  <p:cSld>
+    <p:bg>
+      <p:bgPr>
+        <a:solidFill>
+          <a:srgbClr val="EEEBE4"/>
+        </a:solidFill>
+        <a:effectLst/>
+      </p:bgPr>
+    </p:bg>
+    <p:spTree>
+      <p:nvGrpSpPr>
+        <p:cNvPr id="1" name=""/>
+        <p:cNvGrpSpPr/>
+        <p:nvPr/>
+      </p:nvGrpSpPr>
+      <p:grpSpPr/>
+      <p:sp>
+        <p:nvSpPr>
+          <p:cNvPr id="2" name="Rectangle 1"/>
+          <p:cNvSpPr/>
+          <p:nvPr/>
+        </p:nvSpPr>
+        <p:spPr>
+          <a:xfrm>
+            <a:off x="0" y="0"/>
+            <a:ext cx="12191695" cy="384048"/>
+          </a:xfrm>
+          <a:prstGeom prst="rect">
+            <a:avLst/>
+          </a:prstGeom>
+          <a:solidFill>
+            <a:srgbClr val="0B2D5B"/>
+          </a:solidFill>
+          <a:ln>
+            <a:noFill/>
+          </a:ln>
+          <a:effectLst/>
+        </p:spPr>
+        <p:style>
+          <a:lnRef idx="1">
+            <a:schemeClr val="accent1"/>
+          </a:lnRef>
+          <a:fillRef idx="3">
+            <a:schemeClr val="accent1"/>
+          </a:fillRef>
+          <a:effectRef idx="2">
+            <a:schemeClr val="accent1"/>
+          </a:effectRef>
+          <a:fontRef idx="minor">
+            <a:schemeClr val="lt1"/>
+          </a:fontRef>
+        </p:style>
+        <p:txBody>
+          <a:bodyPr rtlCol="0" anchor="ctr"/>
+          <a:lstStyle/>
+          <a:p>
+            <a:pPr algn="ctr"/>
+          </a:p>
+        </p:txBody>
+      </p:sp>
+      <p:sp>
+        <p:nvSpPr>
+          <p:cNvPr id="3" name="TextBox 2"/>
+          <p:cNvSpPr txBox="1"/>
+          <p:nvPr/>
+        </p:nvSpPr>
+        <p:spPr>
+          <a:xfrm>
+            <a:off x="548640" y="100584"/>
+            <a:ext cx="10972800" cy="274320"/>
+          </a:xfrm>
+          <a:prstGeom prst="rect">
+            <a:avLst/>
+          </a:prstGeom>
+          <a:noFill/>
+        </p:spPr>
+        <p:txBody>
+          <a:bodyPr wrap="square" anchor="t" lIns="0" rIns="0" tIns="0" bIns="0">
+            <a:spAutoFit/>
+          </a:bodyPr>
+          <a:lstStyle/>
+          <a:p>
+            <a:pPr algn="l">
+              <a:spcAft>
+                <a:spcPts val="495"/>
+              </a:spcAft>
+            </a:pPr>
+            <a:r>
+              <a:rPr sz="1100" b="1" i="0">
+                <a:solidFill>
+                  <a:srgbClr val="FFFFFF"/>
+                </a:solidFill>
+                <a:latin typeface="Inter Tight"/>
+              </a:rPr>
+              <a:t>TEACHER PAGE  ·  skipped when you present  ·  Background</a:t>
+            </a:r>
+          </a:p>
+        </p:txBody>
+      </p:sp>
+      <p:sp>
+        <p:nvSpPr>
+          <p:cNvPr id="4" name="TextBox 3"/>
+          <p:cNvSpPr txBox="1"/>
+          <p:nvPr/>
+        </p:nvSpPr>
+        <p:spPr>
+          <a:xfrm>
+            <a:off x="548640" y="685800"/>
+            <a:ext cx="10972800" cy="640080"/>
+          </a:xfrm>
+          <a:prstGeom prst="rect">
+            <a:avLst/>
+          </a:prstGeom>
+          <a:noFill/>
+        </p:spPr>
+        <p:txBody>
+          <a:bodyPr wrap="square" anchor="t" lIns="0" rIns="0" tIns="0" bIns="0">
+            <a:spAutoFit/>
+          </a:bodyPr>
+          <a:lstStyle/>
+          <a:p>
+            <a:pPr algn="l">
+              <a:spcAft>
+                <a:spcPts val="1350"/>
+              </a:spcAft>
+            </a:pPr>
+            <a:r>
+              <a:rPr sz="3000" b="1" i="0">
+                <a:solidFill>
+                  <a:srgbClr val="1C1B19"/>
+                </a:solidFill>
+                <a:latin typeface="Source Serif 4"/>
+              </a:rPr>
+              <a:t>What the research says</a:t>
+            </a:r>
+          </a:p>
+        </p:txBody>
+      </p:sp>
+      <p:sp>
+        <p:nvSpPr>
+          <p:cNvPr id="5" name="TextBox 4"/>
+          <p:cNvSpPr txBox="1"/>
+          <p:nvPr/>
+        </p:nvSpPr>
+        <p:spPr>
+          <a:xfrm>
+            <a:off x="548640" y="1463040"/>
+            <a:ext cx="5394960" cy="4937760"/>
+          </a:xfrm>
+          <a:prstGeom prst="rect">
+            <a:avLst/>
+          </a:prstGeom>
+          <a:noFill/>
+        </p:spPr>
+        <p:txBody>
+          <a:bodyPr wrap="square" anchor="t" lIns="0" rIns="0" tIns="0" bIns="0">
+            <a:spAutoFit/>
+          </a:bodyPr>
+          <a:lstStyle/>
+          <a:p>
+            <a:pPr algn="l">
+              <a:spcAft>
+                <a:spcPts val="585"/>
+              </a:spcAft>
+            </a:pPr>
+            <a:r>
+              <a:rPr sz="1300" b="0" i="0">
+                <a:solidFill>
+                  <a:srgbClr val="1C1B19"/>
+                </a:solidFill>
+                <a:latin typeface="Source Serif 4"/>
+              </a:rPr>
+              <a:t>Psychologist Paul Gilbert describes three emotion systems: threat, drive and soothing. Self-critical people tend to underuse soothing, so the threat system runs unchecked. It's a model of how emotions work and doesn't map to brain regions.</a:t>
+            </a:r>
+          </a:p>
+          <a:p>
+            <a:pPr algn="l">
+              <a:spcAft>
+                <a:spcPts val="585"/>
+              </a:spcAft>
+            </a:pPr>
+            <a:r>
+              <a:rPr sz="1050" b="0" i="0">
+                <a:solidFill>
+                  <a:srgbClr val="5D5A54"/>
+                </a:solidFill>
+                <a:latin typeface="Inter Tight"/>
+              </a:rPr>
+              <a:t>Gilbert, 2009, Advances in Psychiatric Treatment</a:t>
+            </a:r>
+          </a:p>
+          <a:p>
+            <a:pPr algn="l">
+              <a:spcAft>
+                <a:spcPts val="585"/>
+              </a:spcAft>
+            </a:pPr>
+            <a:r>
+              <a:rPr sz="1300" b="0" i="0">
+                <a:solidFill>
+                  <a:srgbClr val="1C1B19"/>
+                </a:solidFill>
+                <a:latin typeface="Source Serif 4"/>
+              </a:rPr>
+              <a:t>After failing a hard test, college students prompted to treat themselves with compassion studied longer for a retest than students prompted to boost their self-esteem, or given no prompt.</a:t>
+            </a:r>
+          </a:p>
+          <a:p>
+            <a:pPr algn="l">
+              <a:spcAft>
+                <a:spcPts val="585"/>
+              </a:spcAft>
+            </a:pPr>
+            <a:r>
+              <a:rPr sz="1050" b="0" i="0">
+                <a:solidFill>
+                  <a:srgbClr val="5D5A54"/>
+                </a:solidFill>
+                <a:latin typeface="Inter Tight"/>
+              </a:rPr>
+              <a:t>Breines and Chen, 2012, Personality and Social Psychology Bulletin</a:t>
+            </a:r>
+          </a:p>
+          <a:p>
+            <a:pPr algn="l">
+              <a:spcAft>
+                <a:spcPts val="585"/>
+              </a:spcAft>
+            </a:pPr>
+            <a:r>
+              <a:rPr sz="1300" b="0" i="0">
+                <a:solidFill>
+                  <a:srgbClr val="1C1B19"/>
+                </a:solidFill>
+                <a:latin typeface="Source Serif 4"/>
+              </a:rPr>
+              <a:t>A review of 19 studies with more than 7,000 adolescents found a large link between higher self-compassion and lower anxiety, depression and stress. These are correlations, so they show a strong connection without proving cause.</a:t>
+            </a:r>
+          </a:p>
+          <a:p>
+            <a:pPr algn="l">
+              <a:spcAft>
+                <a:spcPts val="585"/>
+              </a:spcAft>
+            </a:pPr>
+            <a:r>
+              <a:rPr sz="1050" b="0" i="0">
+                <a:solidFill>
+                  <a:srgbClr val="5D5A54"/>
+                </a:solidFill>
+                <a:latin typeface="Inter Tight"/>
+              </a:rPr>
+              <a:t>Marsh, Chan and MacBeth, 2018, Mindfulness</a:t>
+            </a:r>
+          </a:p>
+        </p:txBody>
+      </p:sp>
+      <p:sp>
+        <p:nvSpPr>
+          <p:cNvPr id="6" name="TextBox 5"/>
+          <p:cNvSpPr txBox="1"/>
+          <p:nvPr/>
+        </p:nvSpPr>
+        <p:spPr>
+          <a:xfrm>
+            <a:off x="6217920" y="1463040"/>
+            <a:ext cx="5394960" cy="4937760"/>
+          </a:xfrm>
+          <a:prstGeom prst="rect">
+            <a:avLst/>
+          </a:prstGeom>
+          <a:noFill/>
+        </p:spPr>
+        <p:txBody>
+          <a:bodyPr wrap="square" anchor="t" lIns="0" rIns="0" tIns="0" bIns="0">
+            <a:spAutoFit/>
+          </a:bodyPr>
+          <a:lstStyle/>
+          <a:p>
+            <a:pPr algn="l">
+              <a:spcAft>
+                <a:spcPts val="585"/>
+              </a:spcAft>
+            </a:pPr>
+            <a:r>
+              <a:rPr sz="1300" b="0" i="0">
+                <a:solidFill>
+                  <a:srgbClr val="1C1B19"/>
+                </a:solidFill>
+                <a:latin typeface="Source Serif 4"/>
+              </a:rPr>
+              <a:t>Students who walked into a room in an embarrassing T-shirt guessed about half the room noticed. Fewer than a quarter did. Psychologists call it the spotlight effect.</a:t>
+            </a:r>
+          </a:p>
+          <a:p>
+            <a:pPr algn="l">
+              <a:spcAft>
+                <a:spcPts val="585"/>
+              </a:spcAft>
+            </a:pPr>
+            <a:r>
+              <a:rPr sz="1050" b="0" i="0">
+                <a:solidFill>
+                  <a:srgbClr val="5D5A54"/>
+                </a:solidFill>
+                <a:latin typeface="Inter Tight"/>
+              </a:rPr>
+              <a:t>Gilovich, Medvec and Savitsky, 2000, Journal of Personality and Social Psychology</a:t>
+            </a:r>
+          </a:p>
+          <a:p>
+            <a:pPr algn="l">
+              <a:spcAft>
+                <a:spcPts val="585"/>
+              </a:spcAft>
+            </a:pPr>
+            <a:r>
+              <a:rPr sz="1300" b="0" i="0">
+                <a:solidFill>
+                  <a:srgbClr val="1C1B19"/>
+                </a:solidFill>
+                <a:latin typeface="Source Serif 4"/>
+              </a:rPr>
+              <a:t>People who prepped for a stressful speech by talking to themselves by name or as "you" felt less anxious and gave better speeches than people who used "I."</a:t>
+            </a:r>
+          </a:p>
+          <a:p>
+            <a:pPr algn="l">
+              <a:spcAft>
+                <a:spcPts val="585"/>
+              </a:spcAft>
+            </a:pPr>
+            <a:r>
+              <a:rPr sz="1050" b="0" i="0">
+                <a:solidFill>
+                  <a:srgbClr val="5D5A54"/>
+                </a:solidFill>
+                <a:latin typeface="Inter Tight"/>
+              </a:rPr>
+              <a:t>Kross et al., 2014, Journal of Personality and Social Psychology</a:t>
+            </a:r>
+          </a:p>
+          <a:p>
+            <a:pPr algn="l">
+              <a:spcAft>
+                <a:spcPts val="585"/>
+              </a:spcAft>
+            </a:pPr>
+            <a:r>
+              <a:rPr sz="1300" b="0" i="0">
+                <a:solidFill>
+                  <a:srgbClr val="1C1B19"/>
+                </a:solidFill>
+                <a:latin typeface="Source Serif 4"/>
+              </a:rPr>
+              <a:t>People told not to think about a white bear ended up thinking about it more.</a:t>
+            </a:r>
+          </a:p>
+          <a:p>
+            <a:pPr algn="l">
+              <a:spcAft>
+                <a:spcPts val="585"/>
+              </a:spcAft>
+            </a:pPr>
+            <a:r>
+              <a:rPr sz="1050" b="0" i="0">
+                <a:solidFill>
+                  <a:srgbClr val="5D5A54"/>
+                </a:solidFill>
+                <a:latin typeface="Inter Tight"/>
+              </a:rPr>
+              <a:t>Wegner et al., 1987, Journal of Personality and Social Psychology</a:t>
+            </a:r>
+          </a:p>
+        </p:txBody>
+      </p:sp>
+    </p:spTree>
+  </p:cSld>
+  <p:clrMapOvr>
+    <a:masterClrMapping/>
+  </p:clrMapOvr>
+</p:sld>
+</file>
+
+<file path=ppt/slides/slide2.xml><?xml version="1.0" encoding="utf-8"?>
+<p:sld xmlns:a="http://schemas.openxmlformats.org/drawingml/2006/main" xmlns:p="http://schemas.openxmlformats.org/presentationml/2006/main" xmlns:r="http://schemas.openxmlformats.org/officeDocument/2006/relationships">
+  <p:cSld>
+    <p:bg>
+      <p:bgPr>
+        <a:solidFill>
+          <a:srgbClr val="0B2D5B"/>
+        </a:solidFill>
+        <a:effectLst/>
+      </p:bgPr>
+    </p:bg>
+    <p:spTree>
+      <p:nvGrpSpPr>
+        <p:cNvPr id="1" name=""/>
+        <p:cNvGrpSpPr/>
+        <p:nvPr/>
+      </p:nvGrpSpPr>
+      <p:grpSpPr/>
+      <p:sp>
+        <p:nvSpPr>
+          <p:cNvPr id="2" name="Rectangle 1"/>
+          <p:cNvSpPr/>
+          <p:nvPr/>
+        </p:nvSpPr>
+        <p:spPr>
+          <a:xfrm>
+            <a:off x="548640" y="502920"/>
+            <a:ext cx="457200" cy="54864"/>
+          </a:xfrm>
+          <a:prstGeom prst="rect">
+            <a:avLst/>
+          </a:prstGeom>
+          <a:solidFill>
+            <a:srgbClr val="F47B20"/>
+          </a:solidFill>
+          <a:ln>
+            <a:noFill/>
+          </a:ln>
+          <a:effectLst/>
+        </p:spPr>
+        <p:style>
+          <a:lnRef idx="1">
+            <a:schemeClr val="accent1"/>
+          </a:lnRef>
+          <a:fillRef idx="3">
+            <a:schemeClr val="accent1"/>
+          </a:fillRef>
+          <a:effectRef idx="2">
+            <a:schemeClr val="accent1"/>
+          </a:effectRef>
+          <a:fontRef idx="minor">
+            <a:schemeClr val="lt1"/>
+          </a:fontRef>
+        </p:style>
+        <p:txBody>
+          <a:bodyPr rtlCol="0" anchor="ctr"/>
+          <a:lstStyle/>
+          <a:p>
+            <a:pPr algn="ctr"/>
+          </a:p>
+        </p:txBody>
+      </p:sp>
+      <p:sp>
+        <p:nvSpPr>
+          <p:cNvPr id="3" name="TextBox 2"/>
+          <p:cNvSpPr txBox="1"/>
+          <p:nvPr/>
+        </p:nvSpPr>
+        <p:spPr>
+          <a:xfrm>
+            <a:off x="1143000" y="393192"/>
+            <a:ext cx="8229600" cy="274320"/>
+          </a:xfrm>
+          <a:prstGeom prst="rect">
+            <a:avLst/>
+          </a:prstGeom>
+          <a:noFill/>
+        </p:spPr>
+        <p:txBody>
+          <a:bodyPr wrap="square" anchor="t" lIns="0" rIns="0" tIns="0" bIns="0">
+            <a:spAutoFit/>
+          </a:bodyPr>
+          <a:lstStyle/>
+          <a:p>
+            <a:pPr algn="l">
+              <a:spcAft>
+                <a:spcPts val="540"/>
+              </a:spcAft>
+            </a:pPr>
+            <a:r>
+              <a:rPr sz="1200" b="1" i="0">
+                <a:solidFill>
+                  <a:srgbClr val="5D5A54"/>
+                </a:solidFill>
+                <a:latin typeface="Inter Tight"/>
+              </a:rPr>
+              <a:t>THE INNER CRITIC</a:t>
+            </a:r>
+          </a:p>
+        </p:txBody>
+      </p:sp>
+      <p:sp>
+        <p:nvSpPr>
+          <p:cNvPr id="4" name="TextBox 3"/>
+          <p:cNvSpPr txBox="1"/>
+          <p:nvPr/>
+        </p:nvSpPr>
+        <p:spPr>
+          <a:xfrm>
+            <a:off x="8229600" y="6400800"/>
+            <a:ext cx="3410712" cy="274320"/>
+          </a:xfrm>
+          <a:prstGeom prst="rect">
+            <a:avLst/>
+          </a:prstGeom>
+          <a:noFill/>
+        </p:spPr>
+        <p:txBody>
+          <a:bodyPr wrap="square" anchor="t" lIns="0" rIns="0" tIns="0" bIns="0">
+            <a:spAutoFit/>
+          </a:bodyPr>
+          <a:lstStyle/>
+          <a:p>
+            <a:pPr algn="r">
+              <a:spcAft>
+                <a:spcPts val="450"/>
+              </a:spcAft>
+            </a:pPr>
+            <a:r>
+              <a:rPr sz="1000" b="0" i="0">
+                <a:solidFill>
+                  <a:srgbClr val="5D5A54"/>
+                </a:solidFill>
+                <a:latin typeface="Inter Tight"/>
+              </a:rPr>
+              <a:t>Beaver Counseling</a:t>
+            </a:r>
+          </a:p>
+        </p:txBody>
+      </p:sp>
+      <p:sp>
+        <p:nvSpPr>
+          <p:cNvPr id="5" name="TextBox 4"/>
+          <p:cNvSpPr txBox="1"/>
+          <p:nvPr/>
+        </p:nvSpPr>
+        <p:spPr>
+          <a:xfrm>
+            <a:off x="822960" y="2011680"/>
+            <a:ext cx="10515600" cy="1463040"/>
+          </a:xfrm>
+          <a:prstGeom prst="rect">
+            <a:avLst/>
+          </a:prstGeom>
+          <a:noFill/>
+        </p:spPr>
+        <p:txBody>
+          <a:bodyPr wrap="square" anchor="b" lIns="0" rIns="0" tIns="0" bIns="0">
+            <a:spAutoFit/>
+          </a:bodyPr>
+          <a:lstStyle/>
+          <a:p>
+            <a:pPr algn="l">
+              <a:spcAft>
+                <a:spcPts val="2700"/>
+              </a:spcAft>
+            </a:pPr>
+            <a:r>
+              <a:rPr sz="6000" b="1" i="0">
+                <a:solidFill>
+                  <a:srgbClr val="FFFFFF"/>
+                </a:solidFill>
+                <a:latin typeface="Source Serif 4"/>
+              </a:rPr>
+              <a:t>The Inner Critic</a:t>
+            </a:r>
+          </a:p>
+        </p:txBody>
+      </p:sp>
+      <p:sp>
+        <p:nvSpPr>
+          <p:cNvPr id="6" name="TextBox 5"/>
+          <p:cNvSpPr txBox="1"/>
+          <p:nvPr/>
+        </p:nvSpPr>
+        <p:spPr>
+          <a:xfrm>
+            <a:off x="822960" y="3611880"/>
+            <a:ext cx="10515600" cy="914400"/>
+          </a:xfrm>
+          <a:prstGeom prst="rect">
+            <a:avLst/>
+          </a:prstGeom>
+          <a:noFill/>
+        </p:spPr>
+        <p:txBody>
+          <a:bodyPr wrap="square" anchor="t" lIns="0" rIns="0" tIns="0" bIns="0">
+            <a:spAutoFit/>
+          </a:bodyPr>
+          <a:lstStyle/>
+          <a:p>
+            <a:pPr algn="l">
+              <a:spcAft>
+                <a:spcPts val="1080"/>
+              </a:spcAft>
+            </a:pPr>
+            <a:r>
+              <a:rPr sz="2400" b="0" i="1">
+                <a:solidFill>
+                  <a:srgbClr val="E8E4DA"/>
+                </a:solidFill>
+                <a:latin typeface="Source Serif 4"/>
+              </a:rPr>
+              <a:t>You would never talk to a friend like this.</a:t>
+            </a:r>
+          </a:p>
+        </p:txBody>
+      </p:sp>
+      <p:sp>
+        <p:nvSpPr>
+          <p:cNvPr id="7" name="TextBox 6"/>
+          <p:cNvSpPr txBox="1"/>
+          <p:nvPr/>
+        </p:nvSpPr>
+        <p:spPr>
+          <a:xfrm>
+            <a:off x="822960" y="6035040"/>
+            <a:ext cx="7315200" cy="365760"/>
+          </a:xfrm>
+          <a:prstGeom prst="rect">
+            <a:avLst/>
+          </a:prstGeom>
+          <a:noFill/>
+        </p:spPr>
+        <p:txBody>
+          <a:bodyPr wrap="square" anchor="t" lIns="0" rIns="0" tIns="0" bIns="0">
+            <a:spAutoFit/>
+          </a:bodyPr>
+          <a:lstStyle/>
+          <a:p>
+            <a:pPr algn="l">
+              <a:spcAft>
+                <a:spcPts val="585"/>
+              </a:spcAft>
+            </a:pPr>
+            <a:r>
+              <a:rPr sz="1300" b="0" i="0">
+                <a:solidFill>
+                  <a:srgbClr val="E8E4DA"/>
+                </a:solidFill>
+                <a:latin typeface="Inter Tight"/>
+              </a:rPr>
+              <a:t>Beaver Upper School · Counseling</a:t>
+            </a:r>
+          </a:p>
+        </p:txBody>
+      </p:sp>
+    </p:spTree>
+  </p:cSld>
+  <p:clrMapOvr>
+    <a:masterClrMapping/>
+  </p:clrMapOvr>
+</p:sld>
+</file>
+
+<file path=ppt/slides/slide3.xml><?xml version="1.0" encoding="utf-8"?>
 <p:sld xmlns:a="http://schemas.openxmlformats.org/drawingml/2006/main" xmlns:p="http://schemas.openxmlformats.org/presentationml/2006/main" xmlns:r="http://schemas.openxmlformats.org/officeDocument/2006/relationships">
   <p:cSld>
     <p:bg>
@@ -4749,7 +6764,7 @@
                 </a:solidFill>
                 <a:latin typeface="Inter Tight"/>
               </a:rPr>
-              <a:t>THREE MOMENTS</a:t>
+              <a:t>THE GUESS</a:t>
             </a:r>
           </a:p>
         </p:txBody>
@@ -4795,64 +6810,23 @@
       </p:sp>
       <p:sp>
         <p:nvSpPr>
-          <p:cNvPr id="5" name="TextBox 4"/>
-          <p:cNvSpPr txBox="1"/>
-          <p:nvPr/>
-        </p:nvSpPr>
-        <p:spPr>
-          <a:xfrm>
-            <a:off x="822960" y="1005840"/>
-            <a:ext cx="10515600" cy="914400"/>
-          </a:xfrm>
-          <a:prstGeom prst="rect">
-            <a:avLst/>
-          </a:prstGeom>
-          <a:noFill/>
-        </p:spPr>
-        <p:txBody>
-          <a:bodyPr wrap="square" anchor="t" lIns="0" rIns="0" tIns="0" bIns="0">
-            <a:spAutoFit/>
-          </a:bodyPr>
-          <a:lstStyle/>
-          <a:p>
-            <a:pPr algn="l">
-              <a:spcAft>
-                <a:spcPts val="1530"/>
-              </a:spcAft>
-            </a:pPr>
-            <a:r>
-              <a:rPr sz="3400" b="1" i="0">
-                <a:solidFill>
-                  <a:srgbClr val="1C1B19"/>
-                </a:solidFill>
-                <a:latin typeface="Source Serif 4"/>
-              </a:rPr>
-              <a:t>Which voice is talking?</a:t>
-            </a:r>
-          </a:p>
-        </p:txBody>
-      </p:sp>
-      <p:sp>
-        <p:nvSpPr>
-          <p:cNvPr id="6" name="Rectangle 5"/>
+          <p:cNvPr id="5" name="Rectangle 4"/>
           <p:cNvSpPr/>
           <p:nvPr/>
         </p:nvSpPr>
         <p:spPr>
           <a:xfrm>
-            <a:off x="822960" y="2103120"/>
-            <a:ext cx="3322320" cy="3840480"/>
+            <a:off x="822960" y="1371600"/>
+            <a:ext cx="73152" cy="3566160"/>
           </a:xfrm>
           <a:prstGeom prst="rect">
             <a:avLst/>
           </a:prstGeom>
           <a:solidFill>
-            <a:srgbClr val="FFFFFF"/>
+            <a:srgbClr val="F47B20"/>
           </a:solidFill>
-          <a:ln w="15875">
-            <a:solidFill>
-              <a:srgbClr val="D8D2C6"/>
-            </a:solidFill>
+          <a:ln>
+            <a:noFill/>
           </a:ln>
           <a:effectLst/>
         </p:spPr>
@@ -4880,14 +6854,53 @@
       </p:sp>
       <p:sp>
         <p:nvSpPr>
+          <p:cNvPr id="6" name="TextBox 5"/>
+          <p:cNvSpPr txBox="1"/>
+          <p:nvPr/>
+        </p:nvSpPr>
+        <p:spPr>
+          <a:xfrm>
+            <a:off x="1188720" y="1371600"/>
+            <a:ext cx="10058400" cy="3566160"/>
+          </a:xfrm>
+          <a:prstGeom prst="rect">
+            <a:avLst/>
+          </a:prstGeom>
+          <a:noFill/>
+        </p:spPr>
+        <p:txBody>
+          <a:bodyPr wrap="square" anchor="ctr" lIns="0" rIns="0" tIns="0" bIns="0">
+            <a:spAutoFit/>
+          </a:bodyPr>
+          <a:lstStyle/>
+          <a:p>
+            <a:pPr algn="l">
+              <a:spcAft>
+                <a:spcPts val="1800"/>
+              </a:spcAft>
+            </a:pPr>
+            <a:r>
+              <a:rPr sz="4000" b="0" i="1">
+                <a:solidFill>
+                  <a:srgbClr val="1C1B19"/>
+                </a:solidFill>
+                <a:latin typeface="Source Serif 4"/>
+              </a:rPr>
+              <a:t>You walk in wearing an embarrassing T-shirt. Who notices?</a:t>
+            </a:r>
+          </a:p>
+        </p:txBody>
+      </p:sp>
+      <p:sp>
+        <p:nvSpPr>
           <p:cNvPr id="7" name="TextBox 6"/>
           <p:cNvSpPr txBox="1"/>
           <p:nvPr/>
         </p:nvSpPr>
         <p:spPr>
           <a:xfrm>
-            <a:off x="1051560" y="2286000"/>
-            <a:ext cx="2865120" cy="365760"/>
+            <a:off x="1188720" y="5120640"/>
+            <a:ext cx="10058400" cy="914400"/>
           </a:xfrm>
           <a:prstGeom prst="rect">
             <a:avLst/>
@@ -4902,304 +6915,17 @@
           <a:p>
             <a:pPr algn="l">
               <a:spcAft>
-                <a:spcPts val="585"/>
-              </a:spcAft>
-            </a:pPr>
-            <a:r>
-              <a:rPr sz="1300" b="1" i="0">
-                <a:solidFill>
-                  <a:srgbClr val="0B2D5B"/>
+                <a:spcPts val="810"/>
+              </a:spcAft>
+            </a:pPr>
+            <a:r>
+              <a:rPr sz="1800" b="0" i="0">
+                <a:solidFill>
+                  <a:srgbClr val="5D5A54"/>
                 </a:solidFill>
                 <a:latin typeface="Inter Tight"/>
               </a:rPr>
-              <a:t>JORDAN</a:t>
-            </a:r>
-          </a:p>
-        </p:txBody>
-      </p:sp>
-      <p:sp>
-        <p:nvSpPr>
-          <p:cNvPr id="8" name="TextBox 7"/>
-          <p:cNvSpPr txBox="1"/>
-          <p:nvPr/>
-        </p:nvSpPr>
-        <p:spPr>
-          <a:xfrm>
-            <a:off x="1051560" y="2743200"/>
-            <a:ext cx="2865120" cy="3017520"/>
-          </a:xfrm>
-          <a:prstGeom prst="rect">
-            <a:avLst/>
-          </a:prstGeom>
-          <a:noFill/>
-        </p:spPr>
-        <p:txBody>
-          <a:bodyPr wrap="square" anchor="t" lIns="0" rIns="0" tIns="0" bIns="0">
-            <a:spAutoFit/>
-          </a:bodyPr>
-          <a:lstStyle/>
-          <a:p>
-            <a:pPr algn="l">
-              <a:spcAft>
-                <a:spcPts val="810"/>
-              </a:spcAft>
-            </a:pPr>
-            <a:r>
-              <a:rPr sz="1800" b="0" i="0">
-                <a:solidFill>
-                  <a:srgbClr val="1C1B19"/>
-                </a:solidFill>
-                <a:latin typeface="Source Serif 4"/>
-              </a:rPr>
-              <a:t>SAT score comes back 80 points below the goal. First thought: "I'm not smart enough for the schools I want. Why even try?"</a:t>
-            </a:r>
-          </a:p>
-        </p:txBody>
-      </p:sp>
-      <p:sp>
-        <p:nvSpPr>
-          <p:cNvPr id="9" name="Rectangle 8"/>
-          <p:cNvSpPr/>
-          <p:nvPr/>
-        </p:nvSpPr>
-        <p:spPr>
-          <a:xfrm>
-            <a:off x="4419600" y="2103120"/>
-            <a:ext cx="3322320" cy="3840480"/>
-          </a:xfrm>
-          <a:prstGeom prst="rect">
-            <a:avLst/>
-          </a:prstGeom>
-          <a:solidFill>
-            <a:srgbClr val="FFFFFF"/>
-          </a:solidFill>
-          <a:ln w="15875">
-            <a:solidFill>
-              <a:srgbClr val="D8D2C6"/>
-            </a:solidFill>
-          </a:ln>
-          <a:effectLst/>
-        </p:spPr>
-        <p:style>
-          <a:lnRef idx="1">
-            <a:schemeClr val="accent1"/>
-          </a:lnRef>
-          <a:fillRef idx="3">
-            <a:schemeClr val="accent1"/>
-          </a:fillRef>
-          <a:effectRef idx="2">
-            <a:schemeClr val="accent1"/>
-          </a:effectRef>
-          <a:fontRef idx="minor">
-            <a:schemeClr val="lt1"/>
-          </a:fontRef>
-        </p:style>
-        <p:txBody>
-          <a:bodyPr rtlCol="0" anchor="ctr"/>
-          <a:lstStyle/>
-          <a:p>
-            <a:pPr algn="ctr"/>
-          </a:p>
-        </p:txBody>
-      </p:sp>
-      <p:sp>
-        <p:nvSpPr>
-          <p:cNvPr id="10" name="TextBox 9"/>
-          <p:cNvSpPr txBox="1"/>
-          <p:nvPr/>
-        </p:nvSpPr>
-        <p:spPr>
-          <a:xfrm>
-            <a:off x="4648200" y="2286000"/>
-            <a:ext cx="2865120" cy="365760"/>
-          </a:xfrm>
-          <a:prstGeom prst="rect">
-            <a:avLst/>
-          </a:prstGeom>
-          <a:noFill/>
-        </p:spPr>
-        <p:txBody>
-          <a:bodyPr wrap="square" anchor="t" lIns="0" rIns="0" tIns="0" bIns="0">
-            <a:spAutoFit/>
-          </a:bodyPr>
-          <a:lstStyle/>
-          <a:p>
-            <a:pPr algn="l">
-              <a:spcAft>
-                <a:spcPts val="585"/>
-              </a:spcAft>
-            </a:pPr>
-            <a:r>
-              <a:rPr sz="1300" b="1" i="0">
-                <a:solidFill>
-                  <a:srgbClr val="0B2D5B"/>
-                </a:solidFill>
-                <a:latin typeface="Inter Tight"/>
-              </a:rPr>
-              <a:t>AALIYAH</a:t>
-            </a:r>
-          </a:p>
-        </p:txBody>
-      </p:sp>
-      <p:sp>
-        <p:nvSpPr>
-          <p:cNvPr id="11" name="TextBox 10"/>
-          <p:cNvSpPr txBox="1"/>
-          <p:nvPr/>
-        </p:nvSpPr>
-        <p:spPr>
-          <a:xfrm>
-            <a:off x="4648200" y="2743200"/>
-            <a:ext cx="2865120" cy="3017520"/>
-          </a:xfrm>
-          <a:prstGeom prst="rect">
-            <a:avLst/>
-          </a:prstGeom>
-          <a:noFill/>
-        </p:spPr>
-        <p:txBody>
-          <a:bodyPr wrap="square" anchor="t" lIns="0" rIns="0" tIns="0" bIns="0">
-            <a:spAutoFit/>
-          </a:bodyPr>
-          <a:lstStyle/>
-          <a:p>
-            <a:pPr algn="l">
-              <a:spcAft>
-                <a:spcPts val="810"/>
-              </a:spcAft>
-            </a:pPr>
-            <a:r>
-              <a:rPr sz="1800" b="0" i="0">
-                <a:solidFill>
-                  <a:srgbClr val="1C1B19"/>
-                </a:solidFill>
-                <a:latin typeface="Source Serif 4"/>
-              </a:rPr>
-              <a:t>Misses an easy shot at practice and hears a teammate laugh. "Everyone thinks I don't deserve my spot."</a:t>
-            </a:r>
-          </a:p>
-        </p:txBody>
-      </p:sp>
-      <p:sp>
-        <p:nvSpPr>
-          <p:cNvPr id="12" name="Rectangle 11"/>
-          <p:cNvSpPr/>
-          <p:nvPr/>
-        </p:nvSpPr>
-        <p:spPr>
-          <a:xfrm>
-            <a:off x="8016239" y="2103120"/>
-            <a:ext cx="3322320" cy="3840480"/>
-          </a:xfrm>
-          <a:prstGeom prst="rect">
-            <a:avLst/>
-          </a:prstGeom>
-          <a:solidFill>
-            <a:srgbClr val="FFFFFF"/>
-          </a:solidFill>
-          <a:ln w="15875">
-            <a:solidFill>
-              <a:srgbClr val="D8D2C6"/>
-            </a:solidFill>
-          </a:ln>
-          <a:effectLst/>
-        </p:spPr>
-        <p:style>
-          <a:lnRef idx="1">
-            <a:schemeClr val="accent1"/>
-          </a:lnRef>
-          <a:fillRef idx="3">
-            <a:schemeClr val="accent1"/>
-          </a:fillRef>
-          <a:effectRef idx="2">
-            <a:schemeClr val="accent1"/>
-          </a:effectRef>
-          <a:fontRef idx="minor">
-            <a:schemeClr val="lt1"/>
-          </a:fontRef>
-        </p:style>
-        <p:txBody>
-          <a:bodyPr rtlCol="0" anchor="ctr"/>
-          <a:lstStyle/>
-          <a:p>
-            <a:pPr algn="ctr"/>
-          </a:p>
-        </p:txBody>
-      </p:sp>
-      <p:sp>
-        <p:nvSpPr>
-          <p:cNvPr id="13" name="TextBox 12"/>
-          <p:cNvSpPr txBox="1"/>
-          <p:nvPr/>
-        </p:nvSpPr>
-        <p:spPr>
-          <a:xfrm>
-            <a:off x="8244839" y="2286000"/>
-            <a:ext cx="2865120" cy="365760"/>
-          </a:xfrm>
-          <a:prstGeom prst="rect">
-            <a:avLst/>
-          </a:prstGeom>
-          <a:noFill/>
-        </p:spPr>
-        <p:txBody>
-          <a:bodyPr wrap="square" anchor="t" lIns="0" rIns="0" tIns="0" bIns="0">
-            <a:spAutoFit/>
-          </a:bodyPr>
-          <a:lstStyle/>
-          <a:p>
-            <a:pPr algn="l">
-              <a:spcAft>
-                <a:spcPts val="585"/>
-              </a:spcAft>
-            </a:pPr>
-            <a:r>
-              <a:rPr sz="1300" b="1" i="0">
-                <a:solidFill>
-                  <a:srgbClr val="0B2D5B"/>
-                </a:solidFill>
-                <a:latin typeface="Inter Tight"/>
-              </a:rPr>
-              <a:t>MATEO</a:t>
-            </a:r>
-          </a:p>
-        </p:txBody>
-      </p:sp>
-      <p:sp>
-        <p:nvSpPr>
-          <p:cNvPr id="14" name="TextBox 13"/>
-          <p:cNvSpPr txBox="1"/>
-          <p:nvPr/>
-        </p:nvSpPr>
-        <p:spPr>
-          <a:xfrm>
-            <a:off x="8244839" y="2743200"/>
-            <a:ext cx="2865120" cy="3017520"/>
-          </a:xfrm>
-          <a:prstGeom prst="rect">
-            <a:avLst/>
-          </a:prstGeom>
-          <a:noFill/>
-        </p:spPr>
-        <p:txBody>
-          <a:bodyPr wrap="square" anchor="t" lIns="0" rIns="0" tIns="0" bIns="0">
-            <a:spAutoFit/>
-          </a:bodyPr>
-          <a:lstStyle/>
-          <a:p>
-            <a:pPr algn="l">
-              <a:spcAft>
-                <a:spcPts val="810"/>
-              </a:spcAft>
-            </a:pPr>
-            <a:r>
-              <a:rPr sz="1800" b="0" i="0">
-                <a:solidFill>
-                  <a:srgbClr val="1C1B19"/>
-                </a:solidFill>
-                <a:latin typeface="Source Serif 4"/>
-              </a:rPr>
-              <a:t>A friend has a small birthday dinner, and he wasn't invited. "Of course. Nobody actually likes me."</a:t>
+              <a:t>Write your guess on a scrap: a few, about a quarter, about half, almost everyone.</a:t>
             </a:r>
           </a:p>
         </p:txBody>
@@ -5212,7 +6938,7 @@
 </p:sld>
 </file>
 
-<file path=ppt/slides/slide11.xml><?xml version="1.0" encoding="utf-8"?>
+<file path=ppt/slides/slide4.xml><?xml version="1.0" encoding="utf-8"?>
 <p:sld xmlns:a="http://schemas.openxmlformats.org/drawingml/2006/main" xmlns:p="http://schemas.openxmlformats.org/presentationml/2006/main" xmlns:r="http://schemas.openxmlformats.org/officeDocument/2006/relationships">
   <p:cSld>
     <p:bg>
@@ -5308,7 +7034,7 @@
                 </a:solidFill>
                 <a:latin typeface="Inter Tight"/>
               </a:rPr>
-              <a:t>PRIVATE CARD</a:t>
+              <a:t>WHERE THE CRITIC LIVES</a:t>
             </a:r>
           </a:p>
         </p:txBody>
@@ -5354,45 +7080,40 @@
       </p:sp>
       <p:sp>
         <p:nvSpPr>
-          <p:cNvPr id="5" name="Rectangle 4"/>
-          <p:cNvSpPr/>
+          <p:cNvPr id="5" name="TextBox 4"/>
+          <p:cNvSpPr txBox="1"/>
           <p:nvPr/>
         </p:nvSpPr>
         <p:spPr>
           <a:xfrm>
-            <a:off x="822960" y="1371600"/>
-            <a:ext cx="73152" cy="3566160"/>
-          </a:xfrm>
-          <a:prstGeom prst="rect">
-            <a:avLst/>
-          </a:prstGeom>
-          <a:solidFill>
-            <a:srgbClr val="F47B20"/>
-          </a:solidFill>
-          <a:ln>
-            <a:noFill/>
-          </a:ln>
-          <a:effectLst/>
-        </p:spPr>
-        <p:style>
-          <a:lnRef idx="1">
-            <a:schemeClr val="accent1"/>
-          </a:lnRef>
-          <a:fillRef idx="3">
-            <a:schemeClr val="accent1"/>
-          </a:fillRef>
-          <a:effectRef idx="2">
-            <a:schemeClr val="accent1"/>
-          </a:effectRef>
-          <a:fontRef idx="minor">
-            <a:schemeClr val="lt1"/>
-          </a:fontRef>
-        </p:style>
-        <p:txBody>
-          <a:bodyPr rtlCol="0" anchor="ctr"/>
-          <a:lstStyle/>
-          <a:p>
-            <a:pPr algn="ctr"/>
+            <a:off x="822960" y="1005840"/>
+            <a:ext cx="10515600" cy="1097280"/>
+          </a:xfrm>
+          <a:prstGeom prst="rect">
+            <a:avLst/>
+          </a:prstGeom>
+          <a:noFill/>
+        </p:spPr>
+        <p:txBody>
+          <a:bodyPr wrap="square" anchor="t" lIns="0" rIns="0" tIns="0" bIns="0">
+            <a:spAutoFit/>
+          </a:bodyPr>
+          <a:lstStyle/>
+          <a:p>
+            <a:pPr algn="l">
+              <a:spcAft>
+                <a:spcPts val="1620"/>
+              </a:spcAft>
+            </a:pPr>
+            <a:r>
+              <a:rPr sz="3600" b="1" i="0">
+                <a:solidFill>
+                  <a:srgbClr val="1C1B19"/>
+                </a:solidFill>
+                <a:latin typeface="Source Serif 4"/>
+              </a:rPr>
+              <a:t>Three systems that are supposed to balance</a:t>
+            </a:r>
           </a:p>
         </p:txBody>
       </p:sp>
@@ -5404,8 +7125,8 @@
         </p:nvSpPr>
         <p:spPr>
           <a:xfrm>
-            <a:off x="1188720" y="1371600"/>
-            <a:ext cx="10058400" cy="3566160"/>
+            <a:off x="822960" y="2194560"/>
+            <a:ext cx="548640" cy="1051560"/>
           </a:xfrm>
           <a:prstGeom prst="rect">
             <a:avLst/>
@@ -5413,24 +7134,24 @@
           <a:noFill/>
         </p:spPr>
         <p:txBody>
-          <a:bodyPr wrap="square" anchor="ctr" lIns="0" rIns="0" tIns="0" bIns="0">
+          <a:bodyPr wrap="square" anchor="t" lIns="0" rIns="0" tIns="0" bIns="0">
             <a:spAutoFit/>
           </a:bodyPr>
           <a:lstStyle/>
           <a:p>
             <a:pPr algn="l">
               <a:spcAft>
-                <a:spcPts val="1800"/>
-              </a:spcAft>
-            </a:pPr>
-            <a:r>
-              <a:rPr sz="4000" b="0" i="1">
-                <a:solidFill>
-                  <a:srgbClr val="1C1B19"/>
+                <a:spcPts val="1170"/>
+              </a:spcAft>
+            </a:pPr>
+            <a:r>
+              <a:rPr sz="2600" b="1" i="0">
+                <a:solidFill>
+                  <a:srgbClr val="F47B20"/>
                 </a:solidFill>
                 <a:latin typeface="Source Serif 4"/>
               </a:rPr>
-              <a:t>Rewrite your critic as a coach.</a:t>
+              <a:t>1</a:t>
             </a:r>
           </a:p>
         </p:txBody>
@@ -5443,8 +7164,8 @@
         </p:nvSpPr>
         <p:spPr>
           <a:xfrm>
-            <a:off x="1188720" y="5120640"/>
-            <a:ext cx="10058400" cy="914400"/>
+            <a:off x="1463040" y="2231136"/>
+            <a:ext cx="9875520" cy="1051560"/>
           </a:xfrm>
           <a:prstGeom prst="rect">
             <a:avLst/>
@@ -5459,17 +7180,221 @@
           <a:p>
             <a:pPr algn="l">
               <a:spcAft>
-                <a:spcPts val="810"/>
-              </a:spcAft>
-            </a:pPr>
-            <a:r>
-              <a:rPr sz="1800" b="0" i="0">
+                <a:spcPts val="945"/>
+              </a:spcAft>
+            </a:pPr>
+            <a:r>
+              <a:rPr sz="2100" b="1" i="0">
+                <a:solidFill>
+                  <a:srgbClr val="1C1B19"/>
+                </a:solidFill>
+                <a:latin typeface="Source Serif 4"/>
+              </a:rPr>
+              <a:t>Threat: protect</a:t>
+            </a:r>
+          </a:p>
+          <a:p>
+            <a:pPr algn="l">
+              <a:spcAft>
+                <a:spcPts val="945"/>
+              </a:spcAft>
+            </a:pPr>
+            <a:r>
+              <a:rPr sz="1600" b="0" i="0">
                 <a:solidFill>
                   <a:srgbClr val="5D5A54"/>
                 </a:solidFill>
-                <a:latin typeface="Inter Tight"/>
-              </a:rPr>
-              <a:t>Write one thing your critic says. Then say it the way a coach on your side would, using your name.</a:t>
+                <a:latin typeface="Source Serif 4"/>
+              </a:rPr>
+              <a:t>Scans for danger. The critic runs here.</a:t>
+            </a:r>
+          </a:p>
+        </p:txBody>
+      </p:sp>
+      <p:sp>
+        <p:nvSpPr>
+          <p:cNvPr id="8" name="TextBox 7"/>
+          <p:cNvSpPr txBox="1"/>
+          <p:nvPr/>
+        </p:nvSpPr>
+        <p:spPr>
+          <a:xfrm>
+            <a:off x="822960" y="3246120"/>
+            <a:ext cx="548640" cy="1051560"/>
+          </a:xfrm>
+          <a:prstGeom prst="rect">
+            <a:avLst/>
+          </a:prstGeom>
+          <a:noFill/>
+        </p:spPr>
+        <p:txBody>
+          <a:bodyPr wrap="square" anchor="t" lIns="0" rIns="0" tIns="0" bIns="0">
+            <a:spAutoFit/>
+          </a:bodyPr>
+          <a:lstStyle/>
+          <a:p>
+            <a:pPr algn="l">
+              <a:spcAft>
+                <a:spcPts val="1170"/>
+              </a:spcAft>
+            </a:pPr>
+            <a:r>
+              <a:rPr sz="2600" b="1" i="0">
+                <a:solidFill>
+                  <a:srgbClr val="F47B20"/>
+                </a:solidFill>
+                <a:latin typeface="Source Serif 4"/>
+              </a:rPr>
+              <a:t>2</a:t>
+            </a:r>
+          </a:p>
+        </p:txBody>
+      </p:sp>
+      <p:sp>
+        <p:nvSpPr>
+          <p:cNvPr id="9" name="TextBox 8"/>
+          <p:cNvSpPr txBox="1"/>
+          <p:nvPr/>
+        </p:nvSpPr>
+        <p:spPr>
+          <a:xfrm>
+            <a:off x="1463040" y="3282696"/>
+            <a:ext cx="9875520" cy="1051560"/>
+          </a:xfrm>
+          <a:prstGeom prst="rect">
+            <a:avLst/>
+          </a:prstGeom>
+          <a:noFill/>
+        </p:spPr>
+        <p:txBody>
+          <a:bodyPr wrap="square" anchor="t" lIns="0" rIns="0" tIns="0" bIns="0">
+            <a:spAutoFit/>
+          </a:bodyPr>
+          <a:lstStyle/>
+          <a:p>
+            <a:pPr algn="l">
+              <a:spcAft>
+                <a:spcPts val="945"/>
+              </a:spcAft>
+            </a:pPr>
+            <a:r>
+              <a:rPr sz="2100" b="1" i="0">
+                <a:solidFill>
+                  <a:srgbClr val="1C1B19"/>
+                </a:solidFill>
+                <a:latin typeface="Source Serif 4"/>
+              </a:rPr>
+              <a:t>Drive: achieve</a:t>
+            </a:r>
+          </a:p>
+          <a:p>
+            <a:pPr algn="l">
+              <a:spcAft>
+                <a:spcPts val="945"/>
+              </a:spcAft>
+            </a:pPr>
+            <a:r>
+              <a:rPr sz="1600" b="0" i="0">
+                <a:solidFill>
+                  <a:srgbClr val="5D5A54"/>
+                </a:solidFill>
+                <a:latin typeface="Source Serif 4"/>
+              </a:rPr>
+              <a:t>Goals and rewards. Fused with fear, it feeds the critic.</a:t>
+            </a:r>
+          </a:p>
+        </p:txBody>
+      </p:sp>
+      <p:sp>
+        <p:nvSpPr>
+          <p:cNvPr id="10" name="TextBox 9"/>
+          <p:cNvSpPr txBox="1"/>
+          <p:nvPr/>
+        </p:nvSpPr>
+        <p:spPr>
+          <a:xfrm>
+            <a:off x="822960" y="4297679"/>
+            <a:ext cx="548640" cy="1051560"/>
+          </a:xfrm>
+          <a:prstGeom prst="rect">
+            <a:avLst/>
+          </a:prstGeom>
+          <a:noFill/>
+        </p:spPr>
+        <p:txBody>
+          <a:bodyPr wrap="square" anchor="t" lIns="0" rIns="0" tIns="0" bIns="0">
+            <a:spAutoFit/>
+          </a:bodyPr>
+          <a:lstStyle/>
+          <a:p>
+            <a:pPr algn="l">
+              <a:spcAft>
+                <a:spcPts val="1170"/>
+              </a:spcAft>
+            </a:pPr>
+            <a:r>
+              <a:rPr sz="2600" b="1" i="0">
+                <a:solidFill>
+                  <a:srgbClr val="F47B20"/>
+                </a:solidFill>
+                <a:latin typeface="Source Serif 4"/>
+              </a:rPr>
+              <a:t>3</a:t>
+            </a:r>
+          </a:p>
+        </p:txBody>
+      </p:sp>
+      <p:sp>
+        <p:nvSpPr>
+          <p:cNvPr id="11" name="TextBox 10"/>
+          <p:cNvSpPr txBox="1"/>
+          <p:nvPr/>
+        </p:nvSpPr>
+        <p:spPr>
+          <a:xfrm>
+            <a:off x="1463040" y="4334255"/>
+            <a:ext cx="9875520" cy="1051560"/>
+          </a:xfrm>
+          <a:prstGeom prst="rect">
+            <a:avLst/>
+          </a:prstGeom>
+          <a:noFill/>
+        </p:spPr>
+        <p:txBody>
+          <a:bodyPr wrap="square" anchor="t" lIns="0" rIns="0" tIns="0" bIns="0">
+            <a:spAutoFit/>
+          </a:bodyPr>
+          <a:lstStyle/>
+          <a:p>
+            <a:pPr algn="l">
+              <a:spcAft>
+                <a:spcPts val="945"/>
+              </a:spcAft>
+            </a:pPr>
+            <a:r>
+              <a:rPr sz="2100" b="1" i="0">
+                <a:solidFill>
+                  <a:srgbClr val="1C1B19"/>
+                </a:solidFill>
+                <a:latin typeface="Source Serif 4"/>
+              </a:rPr>
+              <a:t>Soothing: calm and connect</a:t>
+            </a:r>
+          </a:p>
+          <a:p>
+            <a:pPr algn="l">
+              <a:spcAft>
+                <a:spcPts val="945"/>
+              </a:spcAft>
+            </a:pPr>
+            <a:r>
+              <a:rPr sz="1600" b="0" i="0">
+                <a:solidFill>
+                  <a:srgbClr val="5D5A54"/>
+                </a:solidFill>
+                <a:latin typeface="Source Serif 4"/>
+              </a:rPr>
+              <a:t>Comes online when you feel safe and cared for.</a:t>
             </a:r>
           </a:p>
         </p:txBody>
@@ -5482,7 +7407,7 @@
 </p:sld>
 </file>
 
-<file path=ppt/slides/slide12.xml><?xml version="1.0" encoding="utf-8"?>
+<file path=ppt/slides/slide5.xml><?xml version="1.0" encoding="utf-8"?>
 <p:sld xmlns:a="http://schemas.openxmlformats.org/drawingml/2006/main" xmlns:p="http://schemas.openxmlformats.org/presentationml/2006/main" xmlns:r="http://schemas.openxmlformats.org/officeDocument/2006/relationships">
   <p:cSld>
     <p:bg>
@@ -5578,7 +7503,7 @@
                 </a:solidFill>
                 <a:latin typeface="Inter Tight"/>
               </a:rPr>
-              <a:t>BEFORE YOU GO</a:t>
+              <a:t>QUICK VOTE</a:t>
             </a:r>
           </a:p>
         </p:txBody>
@@ -5624,103 +7549,23 @@
       </p:sp>
       <p:sp>
         <p:nvSpPr>
-          <p:cNvPr id="5" name="TextBox 4"/>
-          <p:cNvSpPr txBox="1"/>
-          <p:nvPr/>
-        </p:nvSpPr>
-        <p:spPr>
-          <a:xfrm>
-            <a:off x="822960" y="1188720"/>
-            <a:ext cx="10515600" cy="914400"/>
-          </a:xfrm>
-          <a:prstGeom prst="rect">
-            <a:avLst/>
-          </a:prstGeom>
-          <a:noFill/>
-        </p:spPr>
-        <p:txBody>
-          <a:bodyPr wrap="square" anchor="t" lIns="0" rIns="0" tIns="0" bIns="0">
-            <a:spAutoFit/>
-          </a:bodyPr>
-          <a:lstStyle/>
-          <a:p>
-            <a:pPr algn="l">
-              <a:spcAft>
-                <a:spcPts val="1620"/>
-              </a:spcAft>
-            </a:pPr>
-            <a:r>
-              <a:rPr sz="3600" b="1" i="0">
-                <a:solidFill>
-                  <a:srgbClr val="1C1B19"/>
-                </a:solidFill>
-                <a:latin typeface="Source Serif 4"/>
-              </a:rPr>
-              <a:t>One thing to try</a:t>
-            </a:r>
-          </a:p>
-        </p:txBody>
-      </p:sp>
-      <p:sp>
-        <p:nvSpPr>
-          <p:cNvPr id="6" name="TextBox 5"/>
-          <p:cNvSpPr txBox="1"/>
-          <p:nvPr/>
-        </p:nvSpPr>
-        <p:spPr>
-          <a:xfrm>
-            <a:off x="822960" y="2286000"/>
-            <a:ext cx="10515600" cy="1463040"/>
-          </a:xfrm>
-          <a:prstGeom prst="rect">
-            <a:avLst/>
-          </a:prstGeom>
-          <a:noFill/>
-        </p:spPr>
-        <p:txBody>
-          <a:bodyPr wrap="square" anchor="t" lIns="0" rIns="0" tIns="0" bIns="0">
-            <a:spAutoFit/>
-          </a:bodyPr>
-          <a:lstStyle/>
-          <a:p>
-            <a:pPr algn="l">
-              <a:spcAft>
-                <a:spcPts val="1080"/>
-              </a:spcAft>
-            </a:pPr>
-            <a:r>
-              <a:rPr sz="2400" b="0" i="0">
-                <a:solidFill>
-                  <a:srgbClr val="1C1B19"/>
-                </a:solidFill>
-                <a:latin typeface="Source Serif 4"/>
-              </a:rPr>
-              <a:t>Your name, the evidence check, an evidence file, or muting a few accounts for a week. Which one, if any?</a:t>
-            </a:r>
-          </a:p>
-        </p:txBody>
-      </p:sp>
-      <p:sp>
-        <p:nvSpPr>
-          <p:cNvPr id="7" name="Rectangle 6"/>
+          <p:cNvPr id="5" name="Rectangle 4"/>
           <p:cNvSpPr/>
           <p:nvPr/>
         </p:nvSpPr>
         <p:spPr>
           <a:xfrm>
-            <a:off x="822960" y="4023360"/>
-            <a:ext cx="10515600" cy="1371600"/>
+            <a:off x="822960" y="1371600"/>
+            <a:ext cx="73152" cy="3566160"/>
           </a:xfrm>
           <a:prstGeom prst="rect">
             <a:avLst/>
           </a:prstGeom>
           <a:solidFill>
-            <a:srgbClr val="FFFFFF"/>
+            <a:srgbClr val="F47B20"/>
           </a:solidFill>
-          <a:ln w="15875">
-            <a:solidFill>
-              <a:srgbClr val="1C1B19"/>
-            </a:solidFill>
+          <a:ln>
+            <a:noFill/>
           </a:ln>
           <a:effectLst/>
         </p:spPr>
@@ -5748,14 +7593,53 @@
       </p:sp>
       <p:sp>
         <p:nvSpPr>
-          <p:cNvPr id="8" name="TextBox 7"/>
+          <p:cNvPr id="6" name="TextBox 5"/>
           <p:cNvSpPr txBox="1"/>
           <p:nvPr/>
         </p:nvSpPr>
         <p:spPr>
           <a:xfrm>
-            <a:off x="1097280" y="4206240"/>
-            <a:ext cx="10058400" cy="365760"/>
+            <a:off x="1188720" y="1371600"/>
+            <a:ext cx="10058400" cy="3566160"/>
+          </a:xfrm>
+          <a:prstGeom prst="rect">
+            <a:avLst/>
+          </a:prstGeom>
+          <a:noFill/>
+        </p:spPr>
+        <p:txBody>
+          <a:bodyPr wrap="square" anchor="ctr" lIns="0" rIns="0" tIns="0" bIns="0">
+            <a:spAutoFit/>
+          </a:bodyPr>
+          <a:lstStyle/>
+          <a:p>
+            <a:pPr algn="l">
+              <a:spcAft>
+                <a:spcPts val="1800"/>
+              </a:spcAft>
+            </a:pPr>
+            <a:r>
+              <a:rPr sz="4000" b="0" i="1">
+                <a:solidFill>
+                  <a:srgbClr val="1C1B19"/>
+                </a:solidFill>
+                <a:latin typeface="Source Serif 4"/>
+              </a:rPr>
+              <a:t>Does being hard on yourself keep you sharp?</a:t>
+            </a:r>
+          </a:p>
+        </p:txBody>
+      </p:sp>
+      <p:sp>
+        <p:nvSpPr>
+          <p:cNvPr id="7" name="TextBox 6"/>
+          <p:cNvSpPr txBox="1"/>
+          <p:nvPr/>
+        </p:nvSpPr>
+        <p:spPr>
+          <a:xfrm>
+            <a:off x="1188720" y="5120640"/>
+            <a:ext cx="10058400" cy="914400"/>
           </a:xfrm>
           <a:prstGeom prst="rect">
             <a:avLst/>
@@ -5770,1710 +7654,17 @@
           <a:p>
             <a:pPr algn="l">
               <a:spcAft>
-                <a:spcPts val="540"/>
-              </a:spcAft>
-            </a:pPr>
-            <a:r>
-              <a:rPr sz="1200" b="1" i="0">
-                <a:solidFill>
-                  <a:srgbClr val="0B2D5B"/>
+                <a:spcPts val="810"/>
+              </a:spcAft>
+            </a:pPr>
+            <a:r>
+              <a:rPr sz="1800" b="0" i="0">
+                <a:solidFill>
+                  <a:srgbClr val="5D5A54"/>
                 </a:solidFill>
                 <a:latin typeface="Inter Tight"/>
               </a:rPr>
-              <a:t>STUDENT PAGE</a:t>
-            </a:r>
-          </a:p>
-        </p:txBody>
-      </p:sp>
-      <p:sp>
-        <p:nvSpPr>
-          <p:cNvPr id="9" name="TextBox 8"/>
-          <p:cNvSpPr txBox="1"/>
-          <p:nvPr/>
-        </p:nvSpPr>
-        <p:spPr>
-          <a:xfrm>
-            <a:off x="1097280" y="4617720"/>
-            <a:ext cx="10058400" cy="640080"/>
-          </a:xfrm>
-          <a:prstGeom prst="rect">
-            <a:avLst/>
-          </a:prstGeom>
-          <a:noFill/>
-        </p:spPr>
-        <p:txBody>
-          <a:bodyPr wrap="square" anchor="t" lIns="0" rIns="0" tIns="0" bIns="0">
-            <a:spAutoFit/>
-          </a:bodyPr>
-          <a:lstStyle/>
-          <a:p>
-            <a:pPr algn="l">
-              <a:spcAft>
-                <a:spcPts val="900"/>
-              </a:spcAft>
-            </a:pPr>
-            <a:r>
-              <a:rPr sz="2000" b="0" i="0">
-                <a:solidFill>
-                  <a:srgbClr val="1C1B19"/>
-                </a:solidFill>
-                <a:latin typeface="Inter Tight"/>
-              </a:rPr>
-              <a:t>https://rmwtoolkit.github.io/bcds-toolkit/the-inner-critic-high-school.html</a:t>
-            </a:r>
-          </a:p>
-        </p:txBody>
-      </p:sp>
-    </p:spTree>
-  </p:cSld>
-  <p:clrMapOvr>
-    <a:masterClrMapping/>
-  </p:clrMapOvr>
-</p:sld>
-</file>
-
-<file path=ppt/slides/slide2.xml><?xml version="1.0" encoding="utf-8"?>
-<p:sld xmlns:a="http://schemas.openxmlformats.org/drawingml/2006/main" xmlns:p="http://schemas.openxmlformats.org/presentationml/2006/main" xmlns:r="http://schemas.openxmlformats.org/officeDocument/2006/relationships" show="0">
-  <p:cSld>
-    <p:bg>
-      <p:bgPr>
-        <a:solidFill>
-          <a:srgbClr val="EEEBE4"/>
-        </a:solidFill>
-        <a:effectLst/>
-      </p:bgPr>
-    </p:bg>
-    <p:spTree>
-      <p:nvGrpSpPr>
-        <p:cNvPr id="1" name=""/>
-        <p:cNvGrpSpPr/>
-        <p:nvPr/>
-      </p:nvGrpSpPr>
-      <p:grpSpPr/>
-      <p:sp>
-        <p:nvSpPr>
-          <p:cNvPr id="2" name="Rectangle 1"/>
-          <p:cNvSpPr/>
-          <p:nvPr/>
-        </p:nvSpPr>
-        <p:spPr>
-          <a:xfrm>
-            <a:off x="0" y="0"/>
-            <a:ext cx="12191695" cy="384048"/>
-          </a:xfrm>
-          <a:prstGeom prst="rect">
-            <a:avLst/>
-          </a:prstGeom>
-          <a:solidFill>
-            <a:srgbClr val="0B2D5B"/>
-          </a:solidFill>
-          <a:ln>
-            <a:noFill/>
-          </a:ln>
-          <a:effectLst/>
-        </p:spPr>
-        <p:style>
-          <a:lnRef idx="1">
-            <a:schemeClr val="accent1"/>
-          </a:lnRef>
-          <a:fillRef idx="3">
-            <a:schemeClr val="accent1"/>
-          </a:fillRef>
-          <a:effectRef idx="2">
-            <a:schemeClr val="accent1"/>
-          </a:effectRef>
-          <a:fontRef idx="minor">
-            <a:schemeClr val="lt1"/>
-          </a:fontRef>
-        </p:style>
-        <p:txBody>
-          <a:bodyPr rtlCol="0" anchor="ctr"/>
-          <a:lstStyle/>
-          <a:p>
-            <a:pPr algn="ctr"/>
-          </a:p>
-        </p:txBody>
-      </p:sp>
-      <p:sp>
-        <p:nvSpPr>
-          <p:cNvPr id="3" name="TextBox 2"/>
-          <p:cNvSpPr txBox="1"/>
-          <p:nvPr/>
-        </p:nvSpPr>
-        <p:spPr>
-          <a:xfrm>
-            <a:off x="548640" y="100584"/>
-            <a:ext cx="10972800" cy="274320"/>
-          </a:xfrm>
-          <a:prstGeom prst="rect">
-            <a:avLst/>
-          </a:prstGeom>
-          <a:noFill/>
-        </p:spPr>
-        <p:txBody>
-          <a:bodyPr wrap="square" anchor="t" lIns="0" rIns="0" tIns="0" bIns="0">
-            <a:spAutoFit/>
-          </a:bodyPr>
-          <a:lstStyle/>
-          <a:p>
-            <a:pPr algn="l">
-              <a:spcAft>
-                <a:spcPts val="495"/>
-              </a:spcAft>
-            </a:pPr>
-            <a:r>
-              <a:rPr sz="1100" b="1" i="0">
-                <a:solidFill>
-                  <a:srgbClr val="FFFFFF"/>
-                </a:solidFill>
-                <a:latin typeface="Inter Tight"/>
-              </a:rPr>
-              <a:t>TEACHER PAGE  ·  skipped when you present  ·  Before you teach</a:t>
-            </a:r>
-          </a:p>
-        </p:txBody>
-      </p:sp>
-      <p:sp>
-        <p:nvSpPr>
-          <p:cNvPr id="4" name="TextBox 3"/>
-          <p:cNvSpPr txBox="1"/>
-          <p:nvPr/>
-        </p:nvSpPr>
-        <p:spPr>
-          <a:xfrm>
-            <a:off x="548640" y="685800"/>
-            <a:ext cx="10972800" cy="640080"/>
-          </a:xfrm>
-          <a:prstGeom prst="rect">
-            <a:avLst/>
-          </a:prstGeom>
-          <a:noFill/>
-        </p:spPr>
-        <p:txBody>
-          <a:bodyPr wrap="square" anchor="t" lIns="0" rIns="0" tIns="0" bIns="0">
-            <a:spAutoFit/>
-          </a:bodyPr>
-          <a:lstStyle/>
-          <a:p>
-            <a:pPr algn="l">
-              <a:spcAft>
-                <a:spcPts val="1350"/>
-              </a:spcAft>
-            </a:pPr>
-            <a:r>
-              <a:rPr sz="3000" b="1" i="0">
-                <a:solidFill>
-                  <a:srgbClr val="1C1B19"/>
-                </a:solidFill>
-                <a:latin typeface="Source Serif 4"/>
-              </a:rPr>
-              <a:t>Before you teach</a:t>
-            </a:r>
-          </a:p>
-        </p:txBody>
-      </p:sp>
-      <p:sp>
-        <p:nvSpPr>
-          <p:cNvPr id="5" name="TextBox 4"/>
-          <p:cNvSpPr txBox="1"/>
-          <p:nvPr/>
-        </p:nvSpPr>
-        <p:spPr>
-          <a:xfrm>
-            <a:off x="548640" y="1463040"/>
-            <a:ext cx="5394960" cy="4937760"/>
-          </a:xfrm>
-          <a:prstGeom prst="rect">
-            <a:avLst/>
-          </a:prstGeom>
-          <a:noFill/>
-        </p:spPr>
-        <p:txBody>
-          <a:bodyPr wrap="square" anchor="t" lIns="0" rIns="0" tIns="0" bIns="0">
-            <a:spAutoFit/>
-          </a:bodyPr>
-          <a:lstStyle/>
-          <a:p>
-            <a:pPr algn="l">
-              <a:spcAft>
-                <a:spcPts val="585"/>
-              </a:spcAft>
-            </a:pPr>
-            <a:r>
-              <a:rPr sz="1500" b="1" i="0">
-                <a:solidFill>
-                  <a:srgbClr val="1C1B19"/>
-                </a:solidFill>
-                <a:latin typeface="Source Serif 4"/>
-              </a:rPr>
-              <a:t>Keep the critic's lines private.</a:t>
-            </a:r>
-          </a:p>
-          <a:p>
-            <a:pPr algn="l">
-              <a:spcAft>
-                <a:spcPts val="585"/>
-              </a:spcAft>
-            </a:pPr>
-            <a:r>
-              <a:rPr sz="1300" b="0" i="0">
-                <a:solidFill>
-                  <a:srgbClr val="1C1B19"/>
-                </a:solidFill>
-                <a:latin typeface="Source Serif 4"/>
-              </a:rPr>
-              <a:t>Nobody reads their card aloud or says what their critic tells them. The cards go home with the student.</a:t>
-            </a:r>
-          </a:p>
-          <a:p>
-            <a:pPr algn="l">
-              <a:spcAft>
-                <a:spcPts val="585"/>
-              </a:spcAft>
-            </a:pPr>
-            <a:r>
-              <a:rPr sz="1300" b="0" i="0">
-                <a:solidFill>
-                  <a:srgbClr val="1C1B19"/>
-                </a:solidFill>
-                <a:latin typeface="Source Serif 4"/>
-              </a:rPr>
-              <a:t/>
-            </a:r>
-          </a:p>
-          <a:p>
-            <a:pPr algn="l">
-              <a:spcAft>
-                <a:spcPts val="585"/>
-              </a:spcAft>
-            </a:pPr>
-            <a:r>
-              <a:rPr sz="1500" b="1" i="0">
-                <a:solidFill>
-                  <a:srgbClr val="1C1B19"/>
-                </a:solidFill>
-                <a:latin typeface="Source Serif 4"/>
-              </a:rPr>
-              <a:t>Worthless or hopeless goes to a counselor.</a:t>
-            </a:r>
-          </a:p>
-          <a:p>
-            <a:pPr algn="l">
-              <a:spcAft>
-                <a:spcPts val="585"/>
-              </a:spcAft>
-            </a:pPr>
-            <a:r>
-              <a:rPr sz="1300" b="0" i="0">
-                <a:solidFill>
-                  <a:srgbClr val="1C1B19"/>
-                </a:solidFill>
-                <a:latin typeface="Source Serif 4"/>
-              </a:rPr>
-              <a:t>If a student says the critic is loud most of the day, or that they feel worthless or hopeless, thank them, don't explore it in the circle, and connect them with a counselor that day. Don't ask screening questions in advisory.</a:t>
-            </a:r>
-          </a:p>
-          <a:p>
-            <a:pPr algn="l">
-              <a:spcAft>
-                <a:spcPts val="585"/>
-              </a:spcAft>
-            </a:pPr>
-            <a:r>
-              <a:rPr sz="1300" b="0" i="0">
-                <a:solidFill>
-                  <a:srgbClr val="1C1B19"/>
-                </a:solidFill>
-                <a:latin typeface="Source Serif 4"/>
-              </a:rPr>
-              <a:t/>
-            </a:r>
-          </a:p>
-          <a:p>
-            <a:pPr algn="l">
-              <a:spcAft>
-                <a:spcPts val="585"/>
-              </a:spcAft>
-            </a:pPr>
-            <a:r>
-              <a:rPr sz="1500" b="1" i="0">
-                <a:solidFill>
-                  <a:srgbClr val="1C1B19"/>
-                </a:solidFill>
-                <a:latin typeface="Source Serif 4"/>
-              </a:rPr>
-              <a:t>When the critic is about bodies or food.</a:t>
-            </a:r>
-          </a:p>
-          <a:p>
-            <a:pPr algn="l">
-              <a:spcAft>
-                <a:spcPts val="585"/>
-              </a:spcAft>
-            </a:pPr>
-            <a:r>
-              <a:rPr sz="1300" b="0" i="0">
-                <a:solidFill>
-                  <a:srgbClr val="1C1B19"/>
-                </a:solidFill>
-                <a:latin typeface="Source Serif 4"/>
-              </a:rPr>
-              <a:t>Keep every example away from weight, shape and eating. If a student's critic is mostly about their body, food or weight, that's a counselor conversation. The student page lists help for that.</a:t>
-            </a:r>
-          </a:p>
-          <a:p>
-            <a:pPr algn="l">
-              <a:spcAft>
-                <a:spcPts val="585"/>
-              </a:spcAft>
-            </a:pPr>
-            <a:r>
-              <a:rPr sz="1300" b="0" i="0">
-                <a:solidFill>
-                  <a:srgbClr val="1C1B19"/>
-                </a:solidFill>
-                <a:latin typeface="Source Serif 4"/>
-              </a:rPr>
-              <a:t/>
-            </a:r>
-          </a:p>
-        </p:txBody>
-      </p:sp>
-      <p:sp>
-        <p:nvSpPr>
-          <p:cNvPr id="6" name="TextBox 5"/>
-          <p:cNvSpPr txBox="1"/>
-          <p:nvPr/>
-        </p:nvSpPr>
-        <p:spPr>
-          <a:xfrm>
-            <a:off x="6217920" y="1463040"/>
-            <a:ext cx="5394960" cy="4937760"/>
-          </a:xfrm>
-          <a:prstGeom prst="rect">
-            <a:avLst/>
-          </a:prstGeom>
-          <a:noFill/>
-        </p:spPr>
-        <p:txBody>
-          <a:bodyPr wrap="square" anchor="t" lIns="0" rIns="0" tIns="0" bIns="0">
-            <a:spAutoFit/>
-          </a:bodyPr>
-          <a:lstStyle/>
-          <a:p>
-            <a:pPr algn="l">
-              <a:spcAft>
-                <a:spcPts val="585"/>
-              </a:spcAft>
-            </a:pPr>
-            <a:r>
-              <a:rPr sz="1500" b="1" i="0">
-                <a:solidFill>
-                  <a:srgbClr val="1C1B19"/>
-                </a:solidFill>
-                <a:latin typeface="Source Serif 4"/>
-              </a:rPr>
-              <a:t>Respect where a voice came from.</a:t>
-            </a:r>
-          </a:p>
-          <a:p>
-            <a:pPr algn="l">
-              <a:spcAft>
-                <a:spcPts val="585"/>
-              </a:spcAft>
-            </a:pPr>
-            <a:r>
-              <a:rPr sz="1300" b="0" i="0">
-                <a:solidFill>
-                  <a:srgbClr val="1C1B19"/>
-                </a:solidFill>
-                <a:latin typeface="Source Serif 4"/>
-              </a:rPr>
-              <a:t>Some students hear their critic in a parent's, coach's or grandparent's words. Don't invite anyone to criticize their family. The point from the student page is that a voice can be loving at its source and still not get the last word.</a:t>
-            </a:r>
-          </a:p>
-          <a:p>
-            <a:pPr algn="l">
-              <a:spcAft>
-                <a:spcPts val="585"/>
-              </a:spcAft>
-            </a:pPr>
-            <a:r>
-              <a:rPr sz="1300" b="0" i="0">
-                <a:solidFill>
-                  <a:srgbClr val="1C1B19"/>
-                </a:solidFill>
-                <a:latin typeface="Source Serif 4"/>
-              </a:rPr>
-              <a:t/>
-            </a:r>
-          </a:p>
-          <a:p>
-            <a:pPr algn="l">
-              <a:spcAft>
-                <a:spcPts val="585"/>
-              </a:spcAft>
-            </a:pPr>
-            <a:r>
-              <a:rPr sz="1500" b="1" i="0">
-                <a:solidFill>
-                  <a:srgbClr val="1C1B19"/>
-                </a:solidFill>
-                <a:latin typeface="Source Serif 4"/>
-              </a:rPr>
-              <a:t>The SAT card can land hard.</a:t>
-            </a:r>
-          </a:p>
-          <a:p>
-            <a:pPr algn="l">
-              <a:spcAft>
-                <a:spcPts val="585"/>
-              </a:spcAft>
-            </a:pPr>
-            <a:r>
-              <a:rPr sz="1300" b="0" i="0">
-                <a:solidFill>
-                  <a:srgbClr val="1C1B19"/>
-                </a:solidFill>
-                <a:latin typeface="Source Serif 4"/>
-              </a:rPr>
-              <a:t>Juniors and seniors may be in testing season. Keep it on the character, and don't ask anyone about their own scores.</a:t>
-            </a:r>
-          </a:p>
-          <a:p>
-            <a:pPr algn="l">
-              <a:spcAft>
-                <a:spcPts val="585"/>
-              </a:spcAft>
-            </a:pPr>
-            <a:r>
-              <a:rPr sz="1300" b="0" i="0">
-                <a:solidFill>
-                  <a:srgbClr val="1C1B19"/>
-                </a:solidFill>
-                <a:latin typeface="Source Serif 4"/>
-              </a:rPr>
-              <a:t/>
-            </a:r>
-          </a:p>
-          <a:p>
-            <a:pPr algn="l">
-              <a:spcAft>
-                <a:spcPts val="585"/>
-              </a:spcAft>
-            </a:pPr>
-            <a:r>
-              <a:rPr sz="1500" b="1" i="0">
-                <a:solidFill>
-                  <a:srgbClr val="1C1B19"/>
-                </a:solidFill>
-                <a:latin typeface="Source Serif 4"/>
-              </a:rPr>
-              <a:t>Don't push affirmations.</a:t>
-            </a:r>
-          </a:p>
-          <a:p>
-            <a:pPr algn="l">
-              <a:spcAft>
-                <a:spcPts val="585"/>
-              </a:spcAft>
-            </a:pPr>
-            <a:r>
-              <a:rPr sz="1300" b="0" i="0">
-                <a:solidFill>
-                  <a:srgbClr val="1C1B19"/>
-                </a:solidFill>
-                <a:latin typeface="Source Serif 4"/>
-              </a:rPr>
-              <a:t>If a student says "just tell yourself you're amazing," gently note that glowing lines you don't believe can make the gap feel bigger. Aim for fair and kind.</a:t>
-            </a:r>
-          </a:p>
-          <a:p>
-            <a:pPr algn="l">
-              <a:spcAft>
-                <a:spcPts val="585"/>
-              </a:spcAft>
-            </a:pPr>
-            <a:r>
-              <a:rPr sz="1300" b="0" i="0">
-                <a:solidFill>
-                  <a:srgbClr val="1C1B19"/>
-                </a:solidFill>
-                <a:latin typeface="Source Serif 4"/>
-              </a:rPr>
-              <a:t/>
-            </a:r>
-          </a:p>
-        </p:txBody>
-      </p:sp>
-    </p:spTree>
-  </p:cSld>
-  <p:clrMapOvr>
-    <a:masterClrMapping/>
-  </p:clrMapOvr>
-</p:sld>
-</file>
-
-<file path=ppt/slides/slide3.xml><?xml version="1.0" encoding="utf-8"?>
-<p:sld xmlns:a="http://schemas.openxmlformats.org/drawingml/2006/main" xmlns:p="http://schemas.openxmlformats.org/presentationml/2006/main" xmlns:r="http://schemas.openxmlformats.org/officeDocument/2006/relationships" show="0">
-  <p:cSld>
-    <p:bg>
-      <p:bgPr>
-        <a:solidFill>
-          <a:srgbClr val="EEEBE4"/>
-        </a:solidFill>
-        <a:effectLst/>
-      </p:bgPr>
-    </p:bg>
-    <p:spTree>
-      <p:nvGrpSpPr>
-        <p:cNvPr id="1" name=""/>
-        <p:cNvGrpSpPr/>
-        <p:nvPr/>
-      </p:nvGrpSpPr>
-      <p:grpSpPr/>
-      <p:sp>
-        <p:nvSpPr>
-          <p:cNvPr id="2" name="Rectangle 1"/>
-          <p:cNvSpPr/>
-          <p:nvPr/>
-        </p:nvSpPr>
-        <p:spPr>
-          <a:xfrm>
-            <a:off x="0" y="0"/>
-            <a:ext cx="12191695" cy="384048"/>
-          </a:xfrm>
-          <a:prstGeom prst="rect">
-            <a:avLst/>
-          </a:prstGeom>
-          <a:solidFill>
-            <a:srgbClr val="0B2D5B"/>
-          </a:solidFill>
-          <a:ln>
-            <a:noFill/>
-          </a:ln>
-          <a:effectLst/>
-        </p:spPr>
-        <p:style>
-          <a:lnRef idx="1">
-            <a:schemeClr val="accent1"/>
-          </a:lnRef>
-          <a:fillRef idx="3">
-            <a:schemeClr val="accent1"/>
-          </a:fillRef>
-          <a:effectRef idx="2">
-            <a:schemeClr val="accent1"/>
-          </a:effectRef>
-          <a:fontRef idx="minor">
-            <a:schemeClr val="lt1"/>
-          </a:fontRef>
-        </p:style>
-        <p:txBody>
-          <a:bodyPr rtlCol="0" anchor="ctr"/>
-          <a:lstStyle/>
-          <a:p>
-            <a:pPr algn="ctr"/>
-          </a:p>
-        </p:txBody>
-      </p:sp>
-      <p:sp>
-        <p:nvSpPr>
-          <p:cNvPr id="3" name="TextBox 2"/>
-          <p:cNvSpPr txBox="1"/>
-          <p:nvPr/>
-        </p:nvSpPr>
-        <p:spPr>
-          <a:xfrm>
-            <a:off x="548640" y="100584"/>
-            <a:ext cx="10972800" cy="274320"/>
-          </a:xfrm>
-          <a:prstGeom prst="rect">
-            <a:avLst/>
-          </a:prstGeom>
-          <a:noFill/>
-        </p:spPr>
-        <p:txBody>
-          <a:bodyPr wrap="square" anchor="t" lIns="0" rIns="0" tIns="0" bIns="0">
-            <a:spAutoFit/>
-          </a:bodyPr>
-          <a:lstStyle/>
-          <a:p>
-            <a:pPr algn="l">
-              <a:spcAft>
-                <a:spcPts val="495"/>
-              </a:spcAft>
-            </a:pPr>
-            <a:r>
-              <a:rPr sz="1100" b="1" i="0">
-                <a:solidFill>
-                  <a:srgbClr val="FFFFFF"/>
-                </a:solidFill>
-                <a:latin typeface="Inter Tight"/>
-              </a:rPr>
-              <a:t>TEACHER PAGE  ·  skipped when you present  ·  Every student in the room</a:t>
-            </a:r>
-          </a:p>
-        </p:txBody>
-      </p:sp>
-      <p:sp>
-        <p:nvSpPr>
-          <p:cNvPr id="4" name="TextBox 3"/>
-          <p:cNvSpPr txBox="1"/>
-          <p:nvPr/>
-        </p:nvSpPr>
-        <p:spPr>
-          <a:xfrm>
-            <a:off x="548640" y="685800"/>
-            <a:ext cx="10972800" cy="640080"/>
-          </a:xfrm>
-          <a:prstGeom prst="rect">
-            <a:avLst/>
-          </a:prstGeom>
-          <a:noFill/>
-        </p:spPr>
-        <p:txBody>
-          <a:bodyPr wrap="square" anchor="t" lIns="0" rIns="0" tIns="0" bIns="0">
-            <a:spAutoFit/>
-          </a:bodyPr>
-          <a:lstStyle/>
-          <a:p>
-            <a:pPr algn="l">
-              <a:spcAft>
-                <a:spcPts val="1350"/>
-              </a:spcAft>
-            </a:pPr>
-            <a:r>
-              <a:rPr sz="3000" b="1" i="0">
-                <a:solidFill>
-                  <a:srgbClr val="1C1B19"/>
-                </a:solidFill>
-                <a:latin typeface="Source Serif 4"/>
-              </a:rPr>
-              <a:t>Every student in the room</a:t>
-            </a:r>
-          </a:p>
-        </p:txBody>
-      </p:sp>
-      <p:sp>
-        <p:nvSpPr>
-          <p:cNvPr id="5" name="TextBox 4"/>
-          <p:cNvSpPr txBox="1"/>
-          <p:nvPr/>
-        </p:nvSpPr>
-        <p:spPr>
-          <a:xfrm>
-            <a:off x="548640" y="1325880"/>
-            <a:ext cx="10972800" cy="365760"/>
-          </a:xfrm>
-          <a:prstGeom prst="rect">
-            <a:avLst/>
-          </a:prstGeom>
-          <a:noFill/>
-        </p:spPr>
-        <p:txBody>
-          <a:bodyPr wrap="square" anchor="t" lIns="0" rIns="0" tIns="0" bIns="0">
-            <a:spAutoFit/>
-          </a:bodyPr>
-          <a:lstStyle/>
-          <a:p>
-            <a:pPr algn="l">
-              <a:spcAft>
-                <a:spcPts val="630"/>
-              </a:spcAft>
-            </a:pPr>
-            <a:r>
-              <a:rPr sz="1400" b="0" i="0">
-                <a:solidFill>
-                  <a:srgbClr val="5D5A54"/>
-                </a:solidFill>
-                <a:latin typeface="Inter Tight"/>
-              </a:rPr>
-              <a:t>Culture, family, identity, ability and money: what to keep in mind for this topic.</a:t>
-            </a:r>
-          </a:p>
-        </p:txBody>
-      </p:sp>
-      <p:sp>
-        <p:nvSpPr>
-          <p:cNvPr id="6" name="TextBox 5"/>
-          <p:cNvSpPr txBox="1"/>
-          <p:nvPr/>
-        </p:nvSpPr>
-        <p:spPr>
-          <a:xfrm>
-            <a:off x="548640" y="1828800"/>
-            <a:ext cx="5394960" cy="4572000"/>
-          </a:xfrm>
-          <a:prstGeom prst="rect">
-            <a:avLst/>
-          </a:prstGeom>
-          <a:noFill/>
-        </p:spPr>
-        <p:txBody>
-          <a:bodyPr wrap="square" anchor="t" lIns="0" rIns="0" tIns="0" bIns="0">
-            <a:spAutoFit/>
-          </a:bodyPr>
-          <a:lstStyle/>
-          <a:p>
-            <a:pPr algn="l">
-              <a:spcAft>
-                <a:spcPts val="585"/>
-              </a:spcAft>
-            </a:pPr>
-            <a:r>
-              <a:rPr sz="1500" b="1" i="0">
-                <a:solidFill>
-                  <a:srgbClr val="1C1B19"/>
-                </a:solidFill>
-                <a:latin typeface="Source Serif 4"/>
-              </a:rPr>
-              <a:t>Messages about race and background.</a:t>
-            </a:r>
-          </a:p>
-          <a:p>
-            <a:pPr algn="l">
-              <a:spcAft>
-                <a:spcPts val="585"/>
-              </a:spcAft>
-            </a:pPr>
-            <a:r>
-              <a:rPr sz="1300" b="0" i="0">
-                <a:solidFill>
-                  <a:srgbClr val="1C1B19"/>
-                </a:solidFill>
-                <a:latin typeface="Source Serif 4"/>
-              </a:rPr>
-              <a:t>Some critic lines start as messages students absorbed about their race, culture or background. Name that once, plainly, as something that comes from outside. Don't ask anyone to share which messages they've heard.</a:t>
-            </a:r>
-          </a:p>
-          <a:p>
-            <a:pPr algn="l">
-              <a:spcAft>
-                <a:spcPts val="585"/>
-              </a:spcAft>
-            </a:pPr>
-            <a:r>
-              <a:rPr sz="1300" b="0" i="0">
-                <a:solidFill>
-                  <a:srgbClr val="1C1B19"/>
-                </a:solidFill>
-                <a:latin typeface="Source Serif 4"/>
-              </a:rPr>
-              <a:t/>
-            </a:r>
-          </a:p>
-          <a:p>
-            <a:pPr algn="l">
-              <a:spcAft>
-                <a:spcPts val="585"/>
-              </a:spcAft>
-            </a:pPr>
-            <a:r>
-              <a:rPr sz="1500" b="1" i="0">
-                <a:solidFill>
-                  <a:srgbClr val="1C1B19"/>
-                </a:solidFill>
-                <a:latin typeface="Source Serif 4"/>
-              </a:rPr>
-              <a:t>High expectations at home.</a:t>
-            </a:r>
-          </a:p>
-          <a:p>
-            <a:pPr algn="l">
-              <a:spcAft>
-                <a:spcPts val="585"/>
-              </a:spcAft>
-            </a:pPr>
-            <a:r>
-              <a:rPr sz="1300" b="0" i="0">
-                <a:solidFill>
-                  <a:srgbClr val="1C1B19"/>
-                </a:solidFill>
-                <a:latin typeface="Source Serif 4"/>
-              </a:rPr>
-              <a:t>Some families show love through high expectations and blunt feedback, and for many students that's where drive comes from. Present it as loving and still able to leave a harsh voice behind. Avoid "In X families" generalizations, and say "parent or caregiver."</a:t>
-            </a:r>
-          </a:p>
-          <a:p>
-            <a:pPr algn="l">
-              <a:spcAft>
-                <a:spcPts val="585"/>
-              </a:spcAft>
-            </a:pPr>
-            <a:r>
-              <a:rPr sz="1300" b="0" i="0">
-                <a:solidFill>
-                  <a:srgbClr val="1C1B19"/>
-                </a:solidFill>
-                <a:latin typeface="Source Serif 4"/>
-              </a:rPr>
-              <a:t/>
-            </a:r>
-          </a:p>
-          <a:p>
-            <a:pPr algn="l">
-              <a:spcAft>
-                <a:spcPts val="585"/>
-              </a:spcAft>
-            </a:pPr>
-            <a:r>
-              <a:rPr sz="1500" b="1" i="0">
-                <a:solidFill>
-                  <a:srgbClr val="1C1B19"/>
-                </a:solidFill>
-                <a:latin typeface="Source Serif 4"/>
-              </a:rPr>
-              <a:t>LGBTQ+ students.</a:t>
-            </a:r>
-          </a:p>
-          <a:p>
-            <a:pPr algn="l">
-              <a:spcAft>
-                <a:spcPts val="585"/>
-              </a:spcAft>
-            </a:pPr>
-            <a:r>
-              <a:rPr sz="1300" b="0" i="0">
-                <a:solidFill>
-                  <a:srgbClr val="1C1B19"/>
-                </a:solidFill>
-                <a:latin typeface="Source Serif 4"/>
-              </a:rPr>
-              <a:t>The critic can repeat messages about sexuality or gender identity. If a student raises it privately, connect them with a counselor, who can also share The Trevor Project (1-866-488-7386, or text START to 678-678) and, for gender identity, Trans Lifeline (877-565-8860).</a:t>
-            </a:r>
-          </a:p>
-          <a:p>
-            <a:pPr algn="l">
-              <a:spcAft>
-                <a:spcPts val="585"/>
-              </a:spcAft>
-            </a:pPr>
-            <a:r>
-              <a:rPr sz="1300" b="0" i="0">
-                <a:solidFill>
-                  <a:srgbClr val="1C1B19"/>
-                </a:solidFill>
-                <a:latin typeface="Source Serif 4"/>
-              </a:rPr>
-              <a:t/>
-            </a:r>
-          </a:p>
-        </p:txBody>
-      </p:sp>
-      <p:sp>
-        <p:nvSpPr>
-          <p:cNvPr id="7" name="TextBox 6"/>
-          <p:cNvSpPr txBox="1"/>
-          <p:nvPr/>
-        </p:nvSpPr>
-        <p:spPr>
-          <a:xfrm>
-            <a:off x="6217920" y="1828800"/>
-            <a:ext cx="5394960" cy="4572000"/>
-          </a:xfrm>
-          <a:prstGeom prst="rect">
-            <a:avLst/>
-          </a:prstGeom>
-          <a:noFill/>
-        </p:spPr>
-        <p:txBody>
-          <a:bodyPr wrap="square" anchor="t" lIns="0" rIns="0" tIns="0" bIns="0">
-            <a:spAutoFit/>
-          </a:bodyPr>
-          <a:lstStyle/>
-          <a:p>
-            <a:pPr algn="l">
-              <a:spcAft>
-                <a:spcPts val="585"/>
-              </a:spcAft>
-            </a:pPr>
-            <a:r>
-              <a:rPr sz="1500" b="1" i="0">
-                <a:solidFill>
-                  <a:srgbClr val="1C1B19"/>
-                </a:solidFill>
-                <a:latin typeface="Source Serif 4"/>
-              </a:rPr>
-              <a:t>Students who've heard a lot of correction.</a:t>
-            </a:r>
-          </a:p>
-          <a:p>
-            <a:pPr algn="l">
-              <a:spcAft>
-                <a:spcPts val="585"/>
-              </a:spcAft>
-            </a:pPr>
-            <a:r>
-              <a:rPr sz="1300" b="0" i="0">
-                <a:solidFill>
-                  <a:srgbClr val="1C1B19"/>
-                </a:solidFill>
-                <a:latin typeface="Source Serif 4"/>
-              </a:rPr>
-              <a:t>Students with ADHD, learning differences or a learning plan have often heard more correction than praise, and the critic may sound like years of it. The evidence file helps here. Never use a diagnosis as a casual adjective.</a:t>
-            </a:r>
-          </a:p>
-          <a:p>
-            <a:pPr algn="l">
-              <a:spcAft>
-                <a:spcPts val="585"/>
-              </a:spcAft>
-            </a:pPr>
-            <a:r>
-              <a:rPr sz="1300" b="0" i="0">
-                <a:solidFill>
-                  <a:srgbClr val="1C1B19"/>
-                </a:solidFill>
-                <a:latin typeface="Source Serif 4"/>
-              </a:rPr>
-              <a:t/>
-            </a:r>
-          </a:p>
-          <a:p>
-            <a:pPr algn="l">
-              <a:spcAft>
-                <a:spcPts val="585"/>
-              </a:spcAft>
-            </a:pPr>
-            <a:r>
-              <a:rPr sz="1500" b="1" i="0">
-                <a:solidFill>
-                  <a:srgbClr val="1C1B19"/>
-                </a:solidFill>
-                <a:latin typeface="Source Serif 4"/>
-              </a:rPr>
-              <a:t>Bodies of every size.</a:t>
-            </a:r>
-          </a:p>
-          <a:p>
-            <a:pPr algn="l">
-              <a:spcAft>
-                <a:spcPts val="585"/>
-              </a:spcAft>
-            </a:pPr>
-            <a:r>
-              <a:rPr sz="1300" b="0" i="0">
-                <a:solidFill>
-                  <a:srgbClr val="1C1B19"/>
-                </a:solidFill>
-                <a:latin typeface="Source Serif 4"/>
-              </a:rPr>
-              <a:t>Body talk is part of many students' critic. Keep examples on grades, sports and friendships, and never offer weight loss or appearance as a fix.</a:t>
-            </a:r>
-          </a:p>
-          <a:p>
-            <a:pPr algn="l">
-              <a:spcAft>
-                <a:spcPts val="585"/>
-              </a:spcAft>
-            </a:pPr>
-            <a:r>
-              <a:rPr sz="1300" b="0" i="0">
-                <a:solidFill>
-                  <a:srgbClr val="1C1B19"/>
-                </a:solidFill>
-                <a:latin typeface="Source Serif 4"/>
-              </a:rPr>
-              <a:t/>
-            </a:r>
-          </a:p>
-          <a:p>
-            <a:pPr algn="l">
-              <a:spcAft>
-                <a:spcPts val="585"/>
-              </a:spcAft>
-            </a:pPr>
-            <a:r>
-              <a:rPr sz="1500" b="1" i="0">
-                <a:solidFill>
-                  <a:srgbClr val="1C1B19"/>
-                </a:solidFill>
-                <a:latin typeface="Source Serif 4"/>
-              </a:rPr>
-              <a:t>Retakes and tutoring cost money.</a:t>
-            </a:r>
-          </a:p>
-          <a:p>
-            <a:pPr algn="l">
-              <a:spcAft>
-                <a:spcPts val="585"/>
-              </a:spcAft>
-            </a:pPr>
-            <a:r>
-              <a:rPr sz="1300" b="0" i="0">
-                <a:solidFill>
-                  <a:srgbClr val="1C1B19"/>
-                </a:solidFill>
-                <a:latin typeface="Source Serif 4"/>
-              </a:rPr>
-              <a:t>In the SAT moment, "do I want to retake it?" assumes the fee and time are there. Point out that a coach voice works whether or not a retake happens, and that the college counseling office can talk through options.</a:t>
-            </a:r>
-          </a:p>
-          <a:p>
-            <a:pPr algn="l">
-              <a:spcAft>
-                <a:spcPts val="585"/>
-              </a:spcAft>
-            </a:pPr>
-            <a:r>
-              <a:rPr sz="1300" b="0" i="0">
-                <a:solidFill>
-                  <a:srgbClr val="1C1B19"/>
-                </a:solidFill>
-                <a:latin typeface="Source Serif 4"/>
-              </a:rPr>
-              <a:t/>
-            </a:r>
-          </a:p>
-        </p:txBody>
-      </p:sp>
-    </p:spTree>
-  </p:cSld>
-  <p:clrMapOvr>
-    <a:masterClrMapping/>
-  </p:clrMapOvr>
-</p:sld>
-</file>
-
-<file path=ppt/slides/slide4.xml><?xml version="1.0" encoding="utf-8"?>
-<p:sld xmlns:a="http://schemas.openxmlformats.org/drawingml/2006/main" xmlns:p="http://schemas.openxmlformats.org/presentationml/2006/main" xmlns:r="http://schemas.openxmlformats.org/officeDocument/2006/relationships" show="0">
-  <p:cSld>
-    <p:bg>
-      <p:bgPr>
-        <a:solidFill>
-          <a:srgbClr val="EEEBE4"/>
-        </a:solidFill>
-        <a:effectLst/>
-      </p:bgPr>
-    </p:bg>
-    <p:spTree>
-      <p:nvGrpSpPr>
-        <p:cNvPr id="1" name=""/>
-        <p:cNvGrpSpPr/>
-        <p:nvPr/>
-      </p:nvGrpSpPr>
-      <p:grpSpPr/>
-      <p:sp>
-        <p:nvSpPr>
-          <p:cNvPr id="2" name="Rectangle 1"/>
-          <p:cNvSpPr/>
-          <p:nvPr/>
-        </p:nvSpPr>
-        <p:spPr>
-          <a:xfrm>
-            <a:off x="0" y="0"/>
-            <a:ext cx="12191695" cy="384048"/>
-          </a:xfrm>
-          <a:prstGeom prst="rect">
-            <a:avLst/>
-          </a:prstGeom>
-          <a:solidFill>
-            <a:srgbClr val="0B2D5B"/>
-          </a:solidFill>
-          <a:ln>
-            <a:noFill/>
-          </a:ln>
-          <a:effectLst/>
-        </p:spPr>
-        <p:style>
-          <a:lnRef idx="1">
-            <a:schemeClr val="accent1"/>
-          </a:lnRef>
-          <a:fillRef idx="3">
-            <a:schemeClr val="accent1"/>
-          </a:fillRef>
-          <a:effectRef idx="2">
-            <a:schemeClr val="accent1"/>
-          </a:effectRef>
-          <a:fontRef idx="minor">
-            <a:schemeClr val="lt1"/>
-          </a:fontRef>
-        </p:style>
-        <p:txBody>
-          <a:bodyPr rtlCol="0" anchor="ctr"/>
-          <a:lstStyle/>
-          <a:p>
-            <a:pPr algn="ctr"/>
-          </a:p>
-        </p:txBody>
-      </p:sp>
-      <p:sp>
-        <p:nvSpPr>
-          <p:cNvPr id="3" name="TextBox 2"/>
-          <p:cNvSpPr txBox="1"/>
-          <p:nvPr/>
-        </p:nvSpPr>
-        <p:spPr>
-          <a:xfrm>
-            <a:off x="548640" y="100584"/>
-            <a:ext cx="10972800" cy="274320"/>
-          </a:xfrm>
-          <a:prstGeom prst="rect">
-            <a:avLst/>
-          </a:prstGeom>
-          <a:noFill/>
-        </p:spPr>
-        <p:txBody>
-          <a:bodyPr wrap="square" anchor="t" lIns="0" rIns="0" tIns="0" bIns="0">
-            <a:spAutoFit/>
-          </a:bodyPr>
-          <a:lstStyle/>
-          <a:p>
-            <a:pPr algn="l">
-              <a:spcAft>
-                <a:spcPts val="495"/>
-              </a:spcAft>
-            </a:pPr>
-            <a:r>
-              <a:rPr sz="1100" b="1" i="0">
-                <a:solidFill>
-                  <a:srgbClr val="FFFFFF"/>
-                </a:solidFill>
-                <a:latin typeface="Inter Tight"/>
-              </a:rPr>
-              <a:t>TEACHER PAGE  ·  skipped when you present  ·  Background</a:t>
-            </a:r>
-          </a:p>
-        </p:txBody>
-      </p:sp>
-      <p:sp>
-        <p:nvSpPr>
-          <p:cNvPr id="4" name="TextBox 3"/>
-          <p:cNvSpPr txBox="1"/>
-          <p:nvPr/>
-        </p:nvSpPr>
-        <p:spPr>
-          <a:xfrm>
-            <a:off x="548640" y="685800"/>
-            <a:ext cx="10972800" cy="640080"/>
-          </a:xfrm>
-          <a:prstGeom prst="rect">
-            <a:avLst/>
-          </a:prstGeom>
-          <a:noFill/>
-        </p:spPr>
-        <p:txBody>
-          <a:bodyPr wrap="square" anchor="t" lIns="0" rIns="0" tIns="0" bIns="0">
-            <a:spAutoFit/>
-          </a:bodyPr>
-          <a:lstStyle/>
-          <a:p>
-            <a:pPr algn="l">
-              <a:spcAft>
-                <a:spcPts val="1350"/>
-              </a:spcAft>
-            </a:pPr>
-            <a:r>
-              <a:rPr sz="3000" b="1" i="0">
-                <a:solidFill>
-                  <a:srgbClr val="1C1B19"/>
-                </a:solidFill>
-                <a:latin typeface="Source Serif 4"/>
-              </a:rPr>
-              <a:t>What the research says</a:t>
-            </a:r>
-          </a:p>
-        </p:txBody>
-      </p:sp>
-      <p:sp>
-        <p:nvSpPr>
-          <p:cNvPr id="5" name="TextBox 4"/>
-          <p:cNvSpPr txBox="1"/>
-          <p:nvPr/>
-        </p:nvSpPr>
-        <p:spPr>
-          <a:xfrm>
-            <a:off x="548640" y="1463040"/>
-            <a:ext cx="5394960" cy="4937760"/>
-          </a:xfrm>
-          <a:prstGeom prst="rect">
-            <a:avLst/>
-          </a:prstGeom>
-          <a:noFill/>
-        </p:spPr>
-        <p:txBody>
-          <a:bodyPr wrap="square" anchor="t" lIns="0" rIns="0" tIns="0" bIns="0">
-            <a:spAutoFit/>
-          </a:bodyPr>
-          <a:lstStyle/>
-          <a:p>
-            <a:pPr algn="l">
-              <a:spcAft>
-                <a:spcPts val="585"/>
-              </a:spcAft>
-            </a:pPr>
-            <a:r>
-              <a:rPr sz="1300" b="0" i="0">
-                <a:solidFill>
-                  <a:srgbClr val="1C1B19"/>
-                </a:solidFill>
-                <a:latin typeface="Source Serif 4"/>
-              </a:rPr>
-              <a:t>Psychologist Paul Gilbert describes three emotion systems: threat, drive and soothing. Self-critical people tend to underuse soothing, so the threat system runs unchecked. It's a model of how emotions work and doesn't map to brain regions.</a:t>
-            </a:r>
-          </a:p>
-          <a:p>
-            <a:pPr algn="l">
-              <a:spcAft>
-                <a:spcPts val="585"/>
-              </a:spcAft>
-            </a:pPr>
-            <a:r>
-              <a:rPr sz="1050" b="0" i="0">
-                <a:solidFill>
-                  <a:srgbClr val="5D5A54"/>
-                </a:solidFill>
-                <a:latin typeface="Inter Tight"/>
-              </a:rPr>
-              <a:t>Gilbert, 2009, Advances in Psychiatric Treatment</a:t>
-            </a:r>
-          </a:p>
-          <a:p>
-            <a:pPr algn="l">
-              <a:spcAft>
-                <a:spcPts val="585"/>
-              </a:spcAft>
-            </a:pPr>
-            <a:r>
-              <a:rPr sz="1300" b="0" i="0">
-                <a:solidFill>
-                  <a:srgbClr val="1C1B19"/>
-                </a:solidFill>
-                <a:latin typeface="Source Serif 4"/>
-              </a:rPr>
-              <a:t>After failing a hard test, college students prompted to treat themselves with compassion studied longer for a retest than students prompted to boost their self-esteem, or given no prompt.</a:t>
-            </a:r>
-          </a:p>
-          <a:p>
-            <a:pPr algn="l">
-              <a:spcAft>
-                <a:spcPts val="585"/>
-              </a:spcAft>
-            </a:pPr>
-            <a:r>
-              <a:rPr sz="1050" b="0" i="0">
-                <a:solidFill>
-                  <a:srgbClr val="5D5A54"/>
-                </a:solidFill>
-                <a:latin typeface="Inter Tight"/>
-              </a:rPr>
-              <a:t>Breines and Chen, 2012, Personality and Social Psychology Bulletin</a:t>
-            </a:r>
-          </a:p>
-          <a:p>
-            <a:pPr algn="l">
-              <a:spcAft>
-                <a:spcPts val="585"/>
-              </a:spcAft>
-            </a:pPr>
-            <a:r>
-              <a:rPr sz="1300" b="0" i="0">
-                <a:solidFill>
-                  <a:srgbClr val="1C1B19"/>
-                </a:solidFill>
-                <a:latin typeface="Source Serif 4"/>
-              </a:rPr>
-              <a:t>A review of 19 studies with more than 7,000 adolescents found a large link between higher self-compassion and lower anxiety, depression and stress. These are correlations, so they show a strong connection without proving cause.</a:t>
-            </a:r>
-          </a:p>
-          <a:p>
-            <a:pPr algn="l">
-              <a:spcAft>
-                <a:spcPts val="585"/>
-              </a:spcAft>
-            </a:pPr>
-            <a:r>
-              <a:rPr sz="1050" b="0" i="0">
-                <a:solidFill>
-                  <a:srgbClr val="5D5A54"/>
-                </a:solidFill>
-                <a:latin typeface="Inter Tight"/>
-              </a:rPr>
-              <a:t>Marsh, Chan and MacBeth, 2018, Mindfulness</a:t>
-            </a:r>
-          </a:p>
-        </p:txBody>
-      </p:sp>
-      <p:sp>
-        <p:nvSpPr>
-          <p:cNvPr id="6" name="TextBox 5"/>
-          <p:cNvSpPr txBox="1"/>
-          <p:nvPr/>
-        </p:nvSpPr>
-        <p:spPr>
-          <a:xfrm>
-            <a:off x="6217920" y="1463040"/>
-            <a:ext cx="5394960" cy="4937760"/>
-          </a:xfrm>
-          <a:prstGeom prst="rect">
-            <a:avLst/>
-          </a:prstGeom>
-          <a:noFill/>
-        </p:spPr>
-        <p:txBody>
-          <a:bodyPr wrap="square" anchor="t" lIns="0" rIns="0" tIns="0" bIns="0">
-            <a:spAutoFit/>
-          </a:bodyPr>
-          <a:lstStyle/>
-          <a:p>
-            <a:pPr algn="l">
-              <a:spcAft>
-                <a:spcPts val="585"/>
-              </a:spcAft>
-            </a:pPr>
-            <a:r>
-              <a:rPr sz="1300" b="0" i="0">
-                <a:solidFill>
-                  <a:srgbClr val="1C1B19"/>
-                </a:solidFill>
-                <a:latin typeface="Source Serif 4"/>
-              </a:rPr>
-              <a:t>Students who walked into a room in an embarrassing T-shirt guessed about half the room noticed. Fewer than a quarter did. Psychologists call it the spotlight effect.</a:t>
-            </a:r>
-          </a:p>
-          <a:p>
-            <a:pPr algn="l">
-              <a:spcAft>
-                <a:spcPts val="585"/>
-              </a:spcAft>
-            </a:pPr>
-            <a:r>
-              <a:rPr sz="1050" b="0" i="0">
-                <a:solidFill>
-                  <a:srgbClr val="5D5A54"/>
-                </a:solidFill>
-                <a:latin typeface="Inter Tight"/>
-              </a:rPr>
-              <a:t>Gilovich, Medvec and Savitsky, 2000, Journal of Personality and Social Psychology</a:t>
-            </a:r>
-          </a:p>
-          <a:p>
-            <a:pPr algn="l">
-              <a:spcAft>
-                <a:spcPts val="585"/>
-              </a:spcAft>
-            </a:pPr>
-            <a:r>
-              <a:rPr sz="1300" b="0" i="0">
-                <a:solidFill>
-                  <a:srgbClr val="1C1B19"/>
-                </a:solidFill>
-                <a:latin typeface="Source Serif 4"/>
-              </a:rPr>
-              <a:t>People who prepped for a stressful speech by talking to themselves by name or as "you" felt less anxious and gave better speeches than people who used "I."</a:t>
-            </a:r>
-          </a:p>
-          <a:p>
-            <a:pPr algn="l">
-              <a:spcAft>
-                <a:spcPts val="585"/>
-              </a:spcAft>
-            </a:pPr>
-            <a:r>
-              <a:rPr sz="1050" b="0" i="0">
-                <a:solidFill>
-                  <a:srgbClr val="5D5A54"/>
-                </a:solidFill>
-                <a:latin typeface="Inter Tight"/>
-              </a:rPr>
-              <a:t>Kross et al., 2014, Journal of Personality and Social Psychology</a:t>
-            </a:r>
-          </a:p>
-          <a:p>
-            <a:pPr algn="l">
-              <a:spcAft>
-                <a:spcPts val="585"/>
-              </a:spcAft>
-            </a:pPr>
-            <a:r>
-              <a:rPr sz="1300" b="0" i="0">
-                <a:solidFill>
-                  <a:srgbClr val="1C1B19"/>
-                </a:solidFill>
-                <a:latin typeface="Source Serif 4"/>
-              </a:rPr>
-              <a:t>People told not to think about a white bear ended up thinking about it more.</a:t>
-            </a:r>
-          </a:p>
-          <a:p>
-            <a:pPr algn="l">
-              <a:spcAft>
-                <a:spcPts val="585"/>
-              </a:spcAft>
-            </a:pPr>
-            <a:r>
-              <a:rPr sz="1050" b="0" i="0">
-                <a:solidFill>
-                  <a:srgbClr val="5D5A54"/>
-                </a:solidFill>
-                <a:latin typeface="Inter Tight"/>
-              </a:rPr>
-              <a:t>Wegner et al., 1987, Journal of Personality and Social Psychology</a:t>
-            </a:r>
-          </a:p>
-        </p:txBody>
-      </p:sp>
-    </p:spTree>
-  </p:cSld>
-  <p:clrMapOvr>
-    <a:masterClrMapping/>
-  </p:clrMapOvr>
-</p:sld>
-</file>
-
-<file path=ppt/slides/slide5.xml><?xml version="1.0" encoding="utf-8"?>
-<p:sld xmlns:a="http://schemas.openxmlformats.org/drawingml/2006/main" xmlns:p="http://schemas.openxmlformats.org/presentationml/2006/main" xmlns:r="http://schemas.openxmlformats.org/officeDocument/2006/relationships">
-  <p:cSld>
-    <p:bg>
-      <p:bgPr>
-        <a:solidFill>
-          <a:srgbClr val="0B2D5B"/>
-        </a:solidFill>
-        <a:effectLst/>
-      </p:bgPr>
-    </p:bg>
-    <p:spTree>
-      <p:nvGrpSpPr>
-        <p:cNvPr id="1" name=""/>
-        <p:cNvGrpSpPr/>
-        <p:nvPr/>
-      </p:nvGrpSpPr>
-      <p:grpSpPr/>
-      <p:sp>
-        <p:nvSpPr>
-          <p:cNvPr id="2" name="Rectangle 1"/>
-          <p:cNvSpPr/>
-          <p:nvPr/>
-        </p:nvSpPr>
-        <p:spPr>
-          <a:xfrm>
-            <a:off x="548640" y="502920"/>
-            <a:ext cx="457200" cy="54864"/>
-          </a:xfrm>
-          <a:prstGeom prst="rect">
-            <a:avLst/>
-          </a:prstGeom>
-          <a:solidFill>
-            <a:srgbClr val="F47B20"/>
-          </a:solidFill>
-          <a:ln>
-            <a:noFill/>
-          </a:ln>
-          <a:effectLst/>
-        </p:spPr>
-        <p:style>
-          <a:lnRef idx="1">
-            <a:schemeClr val="accent1"/>
-          </a:lnRef>
-          <a:fillRef idx="3">
-            <a:schemeClr val="accent1"/>
-          </a:fillRef>
-          <a:effectRef idx="2">
-            <a:schemeClr val="accent1"/>
-          </a:effectRef>
-          <a:fontRef idx="minor">
-            <a:schemeClr val="lt1"/>
-          </a:fontRef>
-        </p:style>
-        <p:txBody>
-          <a:bodyPr rtlCol="0" anchor="ctr"/>
-          <a:lstStyle/>
-          <a:p>
-            <a:pPr algn="ctr"/>
-          </a:p>
-        </p:txBody>
-      </p:sp>
-      <p:sp>
-        <p:nvSpPr>
-          <p:cNvPr id="3" name="TextBox 2"/>
-          <p:cNvSpPr txBox="1"/>
-          <p:nvPr/>
-        </p:nvSpPr>
-        <p:spPr>
-          <a:xfrm>
-            <a:off x="1143000" y="393192"/>
-            <a:ext cx="8229600" cy="274320"/>
-          </a:xfrm>
-          <a:prstGeom prst="rect">
-            <a:avLst/>
-          </a:prstGeom>
-          <a:noFill/>
-        </p:spPr>
-        <p:txBody>
-          <a:bodyPr wrap="square" anchor="t" lIns="0" rIns="0" tIns="0" bIns="0">
-            <a:spAutoFit/>
-          </a:bodyPr>
-          <a:lstStyle/>
-          <a:p>
-            <a:pPr algn="l">
-              <a:spcAft>
-                <a:spcPts val="540"/>
-              </a:spcAft>
-            </a:pPr>
-            <a:r>
-              <a:rPr sz="1200" b="1" i="0">
-                <a:solidFill>
-                  <a:srgbClr val="5D5A54"/>
-                </a:solidFill>
-                <a:latin typeface="Inter Tight"/>
-              </a:rPr>
-              <a:t>THE INNER CRITIC</a:t>
-            </a:r>
-          </a:p>
-        </p:txBody>
-      </p:sp>
-      <p:sp>
-        <p:nvSpPr>
-          <p:cNvPr id="4" name="TextBox 3"/>
-          <p:cNvSpPr txBox="1"/>
-          <p:nvPr/>
-        </p:nvSpPr>
-        <p:spPr>
-          <a:xfrm>
-            <a:off x="8229600" y="6400800"/>
-            <a:ext cx="3410712" cy="274320"/>
-          </a:xfrm>
-          <a:prstGeom prst="rect">
-            <a:avLst/>
-          </a:prstGeom>
-          <a:noFill/>
-        </p:spPr>
-        <p:txBody>
-          <a:bodyPr wrap="square" anchor="t" lIns="0" rIns="0" tIns="0" bIns="0">
-            <a:spAutoFit/>
-          </a:bodyPr>
-          <a:lstStyle/>
-          <a:p>
-            <a:pPr algn="r">
-              <a:spcAft>
-                <a:spcPts val="450"/>
-              </a:spcAft>
-            </a:pPr>
-            <a:r>
-              <a:rPr sz="1000" b="0" i="0">
-                <a:solidFill>
-                  <a:srgbClr val="5D5A54"/>
-                </a:solidFill>
-                <a:latin typeface="Inter Tight"/>
-              </a:rPr>
-              <a:t>Beaver Counseling</a:t>
-            </a:r>
-          </a:p>
-        </p:txBody>
-      </p:sp>
-      <p:sp>
-        <p:nvSpPr>
-          <p:cNvPr id="5" name="TextBox 4"/>
-          <p:cNvSpPr txBox="1"/>
-          <p:nvPr/>
-        </p:nvSpPr>
-        <p:spPr>
-          <a:xfrm>
-            <a:off x="822960" y="2011680"/>
-            <a:ext cx="10515600" cy="1463040"/>
-          </a:xfrm>
-          <a:prstGeom prst="rect">
-            <a:avLst/>
-          </a:prstGeom>
-          <a:noFill/>
-        </p:spPr>
-        <p:txBody>
-          <a:bodyPr wrap="square" anchor="b" lIns="0" rIns="0" tIns="0" bIns="0">
-            <a:spAutoFit/>
-          </a:bodyPr>
-          <a:lstStyle/>
-          <a:p>
-            <a:pPr algn="l">
-              <a:spcAft>
-                <a:spcPts val="2700"/>
-              </a:spcAft>
-            </a:pPr>
-            <a:r>
-              <a:rPr sz="6000" b="1" i="0">
-                <a:solidFill>
-                  <a:srgbClr val="FFFFFF"/>
-                </a:solidFill>
-                <a:latin typeface="Source Serif 4"/>
-              </a:rPr>
-              <a:t>The Inner Critic</a:t>
-            </a:r>
-          </a:p>
-        </p:txBody>
-      </p:sp>
-      <p:sp>
-        <p:nvSpPr>
-          <p:cNvPr id="6" name="TextBox 5"/>
-          <p:cNvSpPr txBox="1"/>
-          <p:nvPr/>
-        </p:nvSpPr>
-        <p:spPr>
-          <a:xfrm>
-            <a:off x="822960" y="3611880"/>
-            <a:ext cx="10515600" cy="914400"/>
-          </a:xfrm>
-          <a:prstGeom prst="rect">
-            <a:avLst/>
-          </a:prstGeom>
-          <a:noFill/>
-        </p:spPr>
-        <p:txBody>
-          <a:bodyPr wrap="square" anchor="t" lIns="0" rIns="0" tIns="0" bIns="0">
-            <a:spAutoFit/>
-          </a:bodyPr>
-          <a:lstStyle/>
-          <a:p>
-            <a:pPr algn="l">
-              <a:spcAft>
-                <a:spcPts val="1080"/>
-              </a:spcAft>
-            </a:pPr>
-            <a:r>
-              <a:rPr sz="2400" b="0" i="1">
-                <a:solidFill>
-                  <a:srgbClr val="E8E4DA"/>
-                </a:solidFill>
-                <a:latin typeface="Source Serif 4"/>
-              </a:rPr>
-              <a:t>You would never talk to a friend like this.</a:t>
-            </a:r>
-          </a:p>
-        </p:txBody>
-      </p:sp>
-      <p:sp>
-        <p:nvSpPr>
-          <p:cNvPr id="7" name="TextBox 6"/>
-          <p:cNvSpPr txBox="1"/>
-          <p:nvPr/>
-        </p:nvSpPr>
-        <p:spPr>
-          <a:xfrm>
-            <a:off x="822960" y="6035040"/>
-            <a:ext cx="7315200" cy="365760"/>
-          </a:xfrm>
-          <a:prstGeom prst="rect">
-            <a:avLst/>
-          </a:prstGeom>
-          <a:noFill/>
-        </p:spPr>
-        <p:txBody>
-          <a:bodyPr wrap="square" anchor="t" lIns="0" rIns="0" tIns="0" bIns="0">
-            <a:spAutoFit/>
-          </a:bodyPr>
-          <a:lstStyle/>
-          <a:p>
-            <a:pPr algn="l">
-              <a:spcAft>
-                <a:spcPts val="585"/>
-              </a:spcAft>
-            </a:pPr>
-            <a:r>
-              <a:rPr sz="1300" b="0" i="0">
-                <a:solidFill>
-                  <a:srgbClr val="E8E4DA"/>
-                </a:solidFill>
-                <a:latin typeface="Inter Tight"/>
-              </a:rPr>
-              <a:t>Beaver Upper School · Counseling</a:t>
+              <a:t>Thumbs up for yes, down for no, sideways if it depends.</a:t>
             </a:r>
           </a:p>
         </p:txBody>
@@ -7582,7 +7773,7 @@
                 </a:solidFill>
                 <a:latin typeface="Inter Tight"/>
               </a:rPr>
-              <a:t>THE GUESS</a:t>
+              <a:t>THE CORE SKILL</a:t>
             </a:r>
           </a:p>
         </p:txBody>
@@ -7628,23 +7819,64 @@
       </p:sp>
       <p:sp>
         <p:nvSpPr>
-          <p:cNvPr id="5" name="Rectangle 4"/>
+          <p:cNvPr id="5" name="TextBox 4"/>
+          <p:cNvSpPr txBox="1"/>
+          <p:nvPr/>
+        </p:nvSpPr>
+        <p:spPr>
+          <a:xfrm>
+            <a:off x="822960" y="1005840"/>
+            <a:ext cx="10515600" cy="914400"/>
+          </a:xfrm>
+          <a:prstGeom prst="rect">
+            <a:avLst/>
+          </a:prstGeom>
+          <a:noFill/>
+        </p:spPr>
+        <p:txBody>
+          <a:bodyPr wrap="square" anchor="t" lIns="0" rIns="0" tIns="0" bIns="0">
+            <a:spAutoFit/>
+          </a:bodyPr>
+          <a:lstStyle/>
+          <a:p>
+            <a:pPr algn="l">
+              <a:spcAft>
+                <a:spcPts val="1530"/>
+              </a:spcAft>
+            </a:pPr>
+            <a:r>
+              <a:rPr sz="3400" b="1" i="0">
+                <a:solidFill>
+                  <a:srgbClr val="1C1B19"/>
+                </a:solidFill>
+                <a:latin typeface="Source Serif 4"/>
+              </a:rPr>
+              <a:t>Get some distance from the voice.</a:t>
+            </a:r>
+          </a:p>
+        </p:txBody>
+      </p:sp>
+      <p:sp>
+        <p:nvSpPr>
+          <p:cNvPr id="6" name="Rectangle 5"/>
           <p:cNvSpPr/>
           <p:nvPr/>
         </p:nvSpPr>
         <p:spPr>
           <a:xfrm>
-            <a:off x="822960" y="1371600"/>
-            <a:ext cx="73152" cy="3566160"/>
+            <a:off x="822960" y="2743200"/>
+            <a:ext cx="1874519" cy="1005840"/>
           </a:xfrm>
           <a:prstGeom prst="rect">
             <a:avLst/>
           </a:prstGeom>
           <a:solidFill>
-            <a:srgbClr val="F47B20"/>
+            <a:srgbClr val="FFFFFF"/>
           </a:solidFill>
-          <a:ln>
-            <a:noFill/>
+          <a:ln w="15875">
+            <a:solidFill>
+              <a:srgbClr val="0B2D5B"/>
+            </a:solidFill>
           </a:ln>
           <a:effectLst/>
         </p:spPr>
@@ -7672,14 +7904,14 @@
       </p:sp>
       <p:sp>
         <p:nvSpPr>
-          <p:cNvPr id="6" name="TextBox 5"/>
+          <p:cNvPr id="7" name="TextBox 6"/>
           <p:cNvSpPr txBox="1"/>
           <p:nvPr/>
         </p:nvSpPr>
         <p:spPr>
           <a:xfrm>
-            <a:off x="1188720" y="1371600"/>
-            <a:ext cx="10058400" cy="3566160"/>
+            <a:off x="822960" y="2743200"/>
+            <a:ext cx="1874519" cy="1005840"/>
           </a:xfrm>
           <a:prstGeom prst="rect">
             <a:avLst/>
@@ -7692,33 +7924,396 @@
           </a:bodyPr>
           <a:lstStyle/>
           <a:p>
-            <a:pPr algn="l">
-              <a:spcAft>
-                <a:spcPts val="1800"/>
-              </a:spcAft>
-            </a:pPr>
-            <a:r>
-              <a:rPr sz="4000" b="0" i="1">
+            <a:pPr algn="ctr">
+              <a:spcAft>
+                <a:spcPts val="900"/>
+              </a:spcAft>
+            </a:pPr>
+            <a:r>
+              <a:rPr sz="2000" b="1" i="0">
                 <a:solidFill>
                   <a:srgbClr val="1C1B19"/>
                 </a:solidFill>
                 <a:latin typeface="Source Serif 4"/>
               </a:rPr>
-              <a:t>You walk in wearing an embarrassing T-shirt. Who notices?</a:t>
-            </a:r>
-          </a:p>
-        </p:txBody>
-      </p:sp>
-      <p:sp>
-        <p:nvSpPr>
-          <p:cNvPr id="7" name="TextBox 6"/>
+              <a:t>Notice it</a:t>
+            </a:r>
+          </a:p>
+        </p:txBody>
+      </p:sp>
+      <p:cxnSp>
+        <p:nvCxnSpPr>
+          <p:cNvPr id="8" name="Connector 7"/>
+          <p:cNvCxnSpPr/>
+          <p:nvPr/>
+        </p:nvCxnSpPr>
+        <p:spPr>
+          <a:xfrm>
+            <a:off x="2752344" y="3246120"/>
+            <a:ext cx="896112" cy="0"/>
+          </a:xfrm>
+          <a:prstGeom prst="line">
+            <a:avLst/>
+          </a:prstGeom>
+          <a:ln w="31750">
+            <a:solidFill>
+              <a:srgbClr val="F47B20"/>
+            </a:solidFill>
+            <a:tailEnd type="triangle"/>
+          </a:ln>
+        </p:spPr>
+        <p:style>
+          <a:lnRef idx="2">
+            <a:schemeClr val="accent1"/>
+          </a:lnRef>
+          <a:fillRef idx="0">
+            <a:schemeClr val="accent1"/>
+          </a:fillRef>
+          <a:effectRef idx="1">
+            <a:schemeClr val="accent1"/>
+          </a:effectRef>
+          <a:fontRef idx="minor">
+            <a:schemeClr val="tx1"/>
+          </a:fontRef>
+        </p:style>
+      </p:cxnSp>
+      <p:sp>
+        <p:nvSpPr>
+          <p:cNvPr id="9" name="Rectangle 8"/>
+          <p:cNvSpPr/>
+          <p:nvPr/>
+        </p:nvSpPr>
+        <p:spPr>
+          <a:xfrm>
+            <a:off x="3703320" y="2743200"/>
+            <a:ext cx="1874519" cy="1005840"/>
+          </a:xfrm>
+          <a:prstGeom prst="rect">
+            <a:avLst/>
+          </a:prstGeom>
+          <a:solidFill>
+            <a:srgbClr val="FFFFFF"/>
+          </a:solidFill>
+          <a:ln w="15875">
+            <a:solidFill>
+              <a:srgbClr val="0B2D5B"/>
+            </a:solidFill>
+          </a:ln>
+          <a:effectLst/>
+        </p:spPr>
+        <p:style>
+          <a:lnRef idx="1">
+            <a:schemeClr val="accent1"/>
+          </a:lnRef>
+          <a:fillRef idx="3">
+            <a:schemeClr val="accent1"/>
+          </a:fillRef>
+          <a:effectRef idx="2">
+            <a:schemeClr val="accent1"/>
+          </a:effectRef>
+          <a:fontRef idx="minor">
+            <a:schemeClr val="lt1"/>
+          </a:fontRef>
+        </p:style>
+        <p:txBody>
+          <a:bodyPr rtlCol="0" anchor="ctr"/>
+          <a:lstStyle/>
+          <a:p>
+            <a:pPr algn="ctr"/>
+          </a:p>
+        </p:txBody>
+      </p:sp>
+      <p:sp>
+        <p:nvSpPr>
+          <p:cNvPr id="10" name="TextBox 9"/>
           <p:cNvSpPr txBox="1"/>
           <p:nvPr/>
         </p:nvSpPr>
         <p:spPr>
           <a:xfrm>
-            <a:off x="1188720" y="5120640"/>
-            <a:ext cx="10058400" cy="914400"/>
+            <a:off x="3703320" y="2743200"/>
+            <a:ext cx="1874519" cy="1005840"/>
+          </a:xfrm>
+          <a:prstGeom prst="rect">
+            <a:avLst/>
+          </a:prstGeom>
+          <a:noFill/>
+        </p:spPr>
+        <p:txBody>
+          <a:bodyPr wrap="square" anchor="ctr" lIns="0" rIns="0" tIns="0" bIns="0">
+            <a:spAutoFit/>
+          </a:bodyPr>
+          <a:lstStyle/>
+          <a:p>
+            <a:pPr algn="ctr">
+              <a:spcAft>
+                <a:spcPts val="900"/>
+              </a:spcAft>
+            </a:pPr>
+            <a:r>
+              <a:rPr sz="2000" b="1" i="0">
+                <a:solidFill>
+                  <a:srgbClr val="1C1B19"/>
+                </a:solidFill>
+                <a:latin typeface="Source Serif 4"/>
+              </a:rPr>
+              <a:t>Use your name</a:t>
+            </a:r>
+          </a:p>
+        </p:txBody>
+      </p:sp>
+      <p:cxnSp>
+        <p:nvCxnSpPr>
+          <p:cNvPr id="11" name="Connector 10"/>
+          <p:cNvCxnSpPr/>
+          <p:nvPr/>
+        </p:nvCxnSpPr>
+        <p:spPr>
+          <a:xfrm>
+            <a:off x="5632704" y="3246120"/>
+            <a:ext cx="896112" cy="0"/>
+          </a:xfrm>
+          <a:prstGeom prst="line">
+            <a:avLst/>
+          </a:prstGeom>
+          <a:ln w="31750">
+            <a:solidFill>
+              <a:srgbClr val="F47B20"/>
+            </a:solidFill>
+            <a:tailEnd type="triangle"/>
+          </a:ln>
+        </p:spPr>
+        <p:style>
+          <a:lnRef idx="2">
+            <a:schemeClr val="accent1"/>
+          </a:lnRef>
+          <a:fillRef idx="0">
+            <a:schemeClr val="accent1"/>
+          </a:fillRef>
+          <a:effectRef idx="1">
+            <a:schemeClr val="accent1"/>
+          </a:effectRef>
+          <a:fontRef idx="minor">
+            <a:schemeClr val="tx1"/>
+          </a:fontRef>
+        </p:style>
+      </p:cxnSp>
+      <p:sp>
+        <p:nvSpPr>
+          <p:cNvPr id="12" name="Rectangle 11"/>
+          <p:cNvSpPr/>
+          <p:nvPr/>
+        </p:nvSpPr>
+        <p:spPr>
+          <a:xfrm>
+            <a:off x="6583680" y="2743200"/>
+            <a:ext cx="1874519" cy="1005840"/>
+          </a:xfrm>
+          <a:prstGeom prst="rect">
+            <a:avLst/>
+          </a:prstGeom>
+          <a:solidFill>
+            <a:srgbClr val="FFFFFF"/>
+          </a:solidFill>
+          <a:ln w="15875">
+            <a:solidFill>
+              <a:srgbClr val="0B2D5B"/>
+            </a:solidFill>
+          </a:ln>
+          <a:effectLst/>
+        </p:spPr>
+        <p:style>
+          <a:lnRef idx="1">
+            <a:schemeClr val="accent1"/>
+          </a:lnRef>
+          <a:fillRef idx="3">
+            <a:schemeClr val="accent1"/>
+          </a:fillRef>
+          <a:effectRef idx="2">
+            <a:schemeClr val="accent1"/>
+          </a:effectRef>
+          <a:fontRef idx="minor">
+            <a:schemeClr val="lt1"/>
+          </a:fontRef>
+        </p:style>
+        <p:txBody>
+          <a:bodyPr rtlCol="0" anchor="ctr"/>
+          <a:lstStyle/>
+          <a:p>
+            <a:pPr algn="ctr"/>
+          </a:p>
+        </p:txBody>
+      </p:sp>
+      <p:sp>
+        <p:nvSpPr>
+          <p:cNvPr id="13" name="TextBox 12"/>
+          <p:cNvSpPr txBox="1"/>
+          <p:nvPr/>
+        </p:nvSpPr>
+        <p:spPr>
+          <a:xfrm>
+            <a:off x="6583680" y="2743200"/>
+            <a:ext cx="1874519" cy="1005840"/>
+          </a:xfrm>
+          <a:prstGeom prst="rect">
+            <a:avLst/>
+          </a:prstGeom>
+          <a:noFill/>
+        </p:spPr>
+        <p:txBody>
+          <a:bodyPr wrap="square" anchor="ctr" lIns="0" rIns="0" tIns="0" bIns="0">
+            <a:spAutoFit/>
+          </a:bodyPr>
+          <a:lstStyle/>
+          <a:p>
+            <a:pPr algn="ctr">
+              <a:spcAft>
+                <a:spcPts val="900"/>
+              </a:spcAft>
+            </a:pPr>
+            <a:r>
+              <a:rPr sz="2000" b="1" i="0">
+                <a:solidFill>
+                  <a:srgbClr val="1C1B19"/>
+                </a:solidFill>
+                <a:latin typeface="Source Serif 4"/>
+              </a:rPr>
+              <a:t>Check the evidence</a:t>
+            </a:r>
+          </a:p>
+        </p:txBody>
+      </p:sp>
+      <p:cxnSp>
+        <p:nvCxnSpPr>
+          <p:cNvPr id="14" name="Connector 13"/>
+          <p:cNvCxnSpPr/>
+          <p:nvPr/>
+        </p:nvCxnSpPr>
+        <p:spPr>
+          <a:xfrm>
+            <a:off x="8513064" y="3246120"/>
+            <a:ext cx="896112" cy="0"/>
+          </a:xfrm>
+          <a:prstGeom prst="line">
+            <a:avLst/>
+          </a:prstGeom>
+          <a:ln w="31750">
+            <a:solidFill>
+              <a:srgbClr val="F47B20"/>
+            </a:solidFill>
+            <a:tailEnd type="triangle"/>
+          </a:ln>
+        </p:spPr>
+        <p:style>
+          <a:lnRef idx="2">
+            <a:schemeClr val="accent1"/>
+          </a:lnRef>
+          <a:fillRef idx="0">
+            <a:schemeClr val="accent1"/>
+          </a:fillRef>
+          <a:effectRef idx="1">
+            <a:schemeClr val="accent1"/>
+          </a:effectRef>
+          <a:fontRef idx="minor">
+            <a:schemeClr val="tx1"/>
+          </a:fontRef>
+        </p:style>
+      </p:cxnSp>
+      <p:sp>
+        <p:nvSpPr>
+          <p:cNvPr id="15" name="Rectangle 14"/>
+          <p:cNvSpPr/>
+          <p:nvPr/>
+        </p:nvSpPr>
+        <p:spPr>
+          <a:xfrm>
+            <a:off x="9464040" y="2743200"/>
+            <a:ext cx="1874519" cy="1005840"/>
+          </a:xfrm>
+          <a:prstGeom prst="rect">
+            <a:avLst/>
+          </a:prstGeom>
+          <a:solidFill>
+            <a:srgbClr val="FFFFFF"/>
+          </a:solidFill>
+          <a:ln w="15875">
+            <a:solidFill>
+              <a:srgbClr val="0B2D5B"/>
+            </a:solidFill>
+          </a:ln>
+          <a:effectLst/>
+        </p:spPr>
+        <p:style>
+          <a:lnRef idx="1">
+            <a:schemeClr val="accent1"/>
+          </a:lnRef>
+          <a:fillRef idx="3">
+            <a:schemeClr val="accent1"/>
+          </a:fillRef>
+          <a:effectRef idx="2">
+            <a:schemeClr val="accent1"/>
+          </a:effectRef>
+          <a:fontRef idx="minor">
+            <a:schemeClr val="lt1"/>
+          </a:fontRef>
+        </p:style>
+        <p:txBody>
+          <a:bodyPr rtlCol="0" anchor="ctr"/>
+          <a:lstStyle/>
+          <a:p>
+            <a:pPr algn="ctr"/>
+          </a:p>
+        </p:txBody>
+      </p:sp>
+      <p:sp>
+        <p:nvSpPr>
+          <p:cNvPr id="16" name="TextBox 15"/>
+          <p:cNvSpPr txBox="1"/>
+          <p:nvPr/>
+        </p:nvSpPr>
+        <p:spPr>
+          <a:xfrm>
+            <a:off x="9464040" y="2743200"/>
+            <a:ext cx="1874519" cy="1005840"/>
+          </a:xfrm>
+          <a:prstGeom prst="rect">
+            <a:avLst/>
+          </a:prstGeom>
+          <a:noFill/>
+        </p:spPr>
+        <p:txBody>
+          <a:bodyPr wrap="square" anchor="ctr" lIns="0" rIns="0" tIns="0" bIns="0">
+            <a:spAutoFit/>
+          </a:bodyPr>
+          <a:lstStyle/>
+          <a:p>
+            <a:pPr algn="ctr">
+              <a:spcAft>
+                <a:spcPts val="900"/>
+              </a:spcAft>
+            </a:pPr>
+            <a:r>
+              <a:rPr sz="2000" b="1" i="0">
+                <a:solidFill>
+                  <a:srgbClr val="1C1B19"/>
+                </a:solidFill>
+                <a:latin typeface="Source Serif 4"/>
+              </a:rPr>
+              <a:t>Coach, don't condemn</a:t>
+            </a:r>
+          </a:p>
+        </p:txBody>
+      </p:sp>
+      <p:sp>
+        <p:nvSpPr>
+          <p:cNvPr id="17" name="TextBox 16"/>
+          <p:cNvSpPr txBox="1"/>
+          <p:nvPr/>
+        </p:nvSpPr>
+        <p:spPr>
+          <a:xfrm>
+            <a:off x="822960" y="4160520"/>
+            <a:ext cx="10515600" cy="457200"/>
           </a:xfrm>
           <a:prstGeom prst="rect">
             <a:avLst/>
@@ -7731,19 +8326,58 @@
           </a:bodyPr>
           <a:lstStyle/>
           <a:p>
-            <a:pPr algn="l">
+            <a:pPr algn="ctr">
               <a:spcAft>
                 <a:spcPts val="810"/>
               </a:spcAft>
             </a:pPr>
             <a:r>
-              <a:rPr sz="1800" b="0" i="0">
+              <a:rPr sz="1800" b="1" i="0">
+                <a:solidFill>
+                  <a:srgbClr val="F47B20"/>
+                </a:solidFill>
+                <a:latin typeface="Inter Tight"/>
+              </a:rPr>
+              <a:t>↺  and around again</a:t>
+            </a:r>
+          </a:p>
+        </p:txBody>
+      </p:sp>
+      <p:sp>
+        <p:nvSpPr>
+          <p:cNvPr id="18" name="TextBox 17"/>
+          <p:cNvSpPr txBox="1"/>
+          <p:nvPr/>
+        </p:nvSpPr>
+        <p:spPr>
+          <a:xfrm>
+            <a:off x="822960" y="4846320"/>
+            <a:ext cx="10515600" cy="1188720"/>
+          </a:xfrm>
+          <a:prstGeom prst="rect">
+            <a:avLst/>
+          </a:prstGeom>
+          <a:noFill/>
+        </p:spPr>
+        <p:txBody>
+          <a:bodyPr wrap="square" anchor="t" lIns="0" rIns="0" tIns="0" bIns="0">
+            <a:spAutoFit/>
+          </a:bodyPr>
+          <a:lstStyle/>
+          <a:p>
+            <a:pPr algn="ctr">
+              <a:spcAft>
+                <a:spcPts val="900"/>
+              </a:spcAft>
+            </a:pPr>
+            <a:r>
+              <a:rPr sz="2000" b="0" i="1">
                 <a:solidFill>
                   <a:srgbClr val="5D5A54"/>
                 </a:solidFill>
-                <a:latin typeface="Inter Tight"/>
-              </a:rPr>
-              <a:t>Write your guess on a scrap: a few, about a quarter, about half, almost everyone.</a:t>
+                <a:latin typeface="Source Serif 4"/>
+              </a:rPr>
+              <a:t>You can't delete the critic. You can change how much it gets to decide.</a:t>
             </a:r>
           </a:p>
         </p:txBody>
@@ -7852,7 +8486,7 @@
                 </a:solidFill>
                 <a:latin typeface="Inter Tight"/>
               </a:rPr>
-              <a:t>WHERE THE CRITIC LIVES</a:t>
+              <a:t>THREE MOMENTS</a:t>
             </a:r>
           </a:p>
         </p:txBody>
@@ -7905,7 +8539,7 @@
         <p:spPr>
           <a:xfrm>
             <a:off x="822960" y="1005840"/>
-            <a:ext cx="10515600" cy="1097280"/>
+            <a:ext cx="10515600" cy="914400"/>
           </a:xfrm>
           <a:prstGeom prst="rect">
             <a:avLst/>
@@ -7920,31 +8554,77 @@
           <a:p>
             <a:pPr algn="l">
               <a:spcAft>
-                <a:spcPts val="1620"/>
-              </a:spcAft>
-            </a:pPr>
-            <a:r>
-              <a:rPr sz="3600" b="1" i="0">
+                <a:spcPts val="1530"/>
+              </a:spcAft>
+            </a:pPr>
+            <a:r>
+              <a:rPr sz="3400" b="1" i="0">
                 <a:solidFill>
                   <a:srgbClr val="1C1B19"/>
                 </a:solidFill>
                 <a:latin typeface="Source Serif 4"/>
               </a:rPr>
-              <a:t>Three systems that are supposed to balance</a:t>
-            </a:r>
-          </a:p>
-        </p:txBody>
-      </p:sp>
-      <p:sp>
-        <p:nvSpPr>
-          <p:cNvPr id="6" name="TextBox 5"/>
+              <a:t>Which voice is talking?</a:t>
+            </a:r>
+          </a:p>
+        </p:txBody>
+      </p:sp>
+      <p:sp>
+        <p:nvSpPr>
+          <p:cNvPr id="6" name="Rectangle 5"/>
+          <p:cNvSpPr/>
+          <p:nvPr/>
+        </p:nvSpPr>
+        <p:spPr>
+          <a:xfrm>
+            <a:off x="822960" y="2103120"/>
+            <a:ext cx="3322320" cy="3840480"/>
+          </a:xfrm>
+          <a:prstGeom prst="rect">
+            <a:avLst/>
+          </a:prstGeom>
+          <a:solidFill>
+            <a:srgbClr val="FFFFFF"/>
+          </a:solidFill>
+          <a:ln w="15875">
+            <a:solidFill>
+              <a:srgbClr val="D8D2C6"/>
+            </a:solidFill>
+          </a:ln>
+          <a:effectLst/>
+        </p:spPr>
+        <p:style>
+          <a:lnRef idx="1">
+            <a:schemeClr val="accent1"/>
+          </a:lnRef>
+          <a:fillRef idx="3">
+            <a:schemeClr val="accent1"/>
+          </a:fillRef>
+          <a:effectRef idx="2">
+            <a:schemeClr val="accent1"/>
+          </a:effectRef>
+          <a:fontRef idx="minor">
+            <a:schemeClr val="lt1"/>
+          </a:fontRef>
+        </p:style>
+        <p:txBody>
+          <a:bodyPr rtlCol="0" anchor="ctr"/>
+          <a:lstStyle/>
+          <a:p>
+            <a:pPr algn="ctr"/>
+          </a:p>
+        </p:txBody>
+      </p:sp>
+      <p:sp>
+        <p:nvSpPr>
+          <p:cNvPr id="7" name="TextBox 6"/>
           <p:cNvSpPr txBox="1"/>
           <p:nvPr/>
         </p:nvSpPr>
         <p:spPr>
           <a:xfrm>
-            <a:off x="822960" y="2194560"/>
-            <a:ext cx="548640" cy="1051560"/>
+            <a:off x="1051560" y="2286000"/>
+            <a:ext cx="2865120" cy="365760"/>
           </a:xfrm>
           <a:prstGeom prst="rect">
             <a:avLst/>
@@ -7959,31 +8639,31 @@
           <a:p>
             <a:pPr algn="l">
               <a:spcAft>
-                <a:spcPts val="1170"/>
-              </a:spcAft>
-            </a:pPr>
-            <a:r>
-              <a:rPr sz="2600" b="1" i="0">
-                <a:solidFill>
-                  <a:srgbClr val="F47B20"/>
-                </a:solidFill>
-                <a:latin typeface="Source Serif 4"/>
-              </a:rPr>
-              <a:t>1</a:t>
-            </a:r>
-          </a:p>
-        </p:txBody>
-      </p:sp>
-      <p:sp>
-        <p:nvSpPr>
-          <p:cNvPr id="7" name="TextBox 6"/>
+                <a:spcPts val="585"/>
+              </a:spcAft>
+            </a:pPr>
+            <a:r>
+              <a:rPr sz="1300" b="1" i="0">
+                <a:solidFill>
+                  <a:srgbClr val="0B2D5B"/>
+                </a:solidFill>
+                <a:latin typeface="Inter Tight"/>
+              </a:rPr>
+              <a:t>JORDAN</a:t>
+            </a:r>
+          </a:p>
+        </p:txBody>
+      </p:sp>
+      <p:sp>
+        <p:nvSpPr>
+          <p:cNvPr id="8" name="TextBox 7"/>
           <p:cNvSpPr txBox="1"/>
           <p:nvPr/>
         </p:nvSpPr>
         <p:spPr>
           <a:xfrm>
-            <a:off x="1463040" y="2231136"/>
-            <a:ext cx="9875520" cy="1051560"/>
+            <a:off x="1051560" y="2743200"/>
+            <a:ext cx="2865120" cy="3017520"/>
           </a:xfrm>
           <a:prstGeom prst="rect">
             <a:avLst/>
@@ -7998,47 +8678,77 @@
           <a:p>
             <a:pPr algn="l">
               <a:spcAft>
-                <a:spcPts val="945"/>
-              </a:spcAft>
-            </a:pPr>
-            <a:r>
-              <a:rPr sz="2100" b="1" i="0">
+                <a:spcPts val="810"/>
+              </a:spcAft>
+            </a:pPr>
+            <a:r>
+              <a:rPr sz="1800" b="0" i="0">
                 <a:solidFill>
                   <a:srgbClr val="1C1B19"/>
                 </a:solidFill>
                 <a:latin typeface="Source Serif 4"/>
               </a:rPr>
-              <a:t>Threat: protect</a:t>
-            </a:r>
-          </a:p>
-          <a:p>
-            <a:pPr algn="l">
-              <a:spcAft>
-                <a:spcPts val="945"/>
-              </a:spcAft>
-            </a:pPr>
-            <a:r>
-              <a:rPr sz="1600" b="0" i="0">
-                <a:solidFill>
-                  <a:srgbClr val="5D5A54"/>
-                </a:solidFill>
-                <a:latin typeface="Source Serif 4"/>
-              </a:rPr>
-              <a:t>Scans for danger. The critic runs here.</a:t>
-            </a:r>
-          </a:p>
-        </p:txBody>
-      </p:sp>
-      <p:sp>
-        <p:nvSpPr>
-          <p:cNvPr id="8" name="TextBox 7"/>
+              <a:t>SAT score comes back 80 points below the goal. First thought: "I'm not smart enough for the schools I want. Why even try?"</a:t>
+            </a:r>
+          </a:p>
+        </p:txBody>
+      </p:sp>
+      <p:sp>
+        <p:nvSpPr>
+          <p:cNvPr id="9" name="Rectangle 8"/>
+          <p:cNvSpPr/>
+          <p:nvPr/>
+        </p:nvSpPr>
+        <p:spPr>
+          <a:xfrm>
+            <a:off x="4419600" y="2103120"/>
+            <a:ext cx="3322320" cy="3840480"/>
+          </a:xfrm>
+          <a:prstGeom prst="rect">
+            <a:avLst/>
+          </a:prstGeom>
+          <a:solidFill>
+            <a:srgbClr val="FFFFFF"/>
+          </a:solidFill>
+          <a:ln w="15875">
+            <a:solidFill>
+              <a:srgbClr val="D8D2C6"/>
+            </a:solidFill>
+          </a:ln>
+          <a:effectLst/>
+        </p:spPr>
+        <p:style>
+          <a:lnRef idx="1">
+            <a:schemeClr val="accent1"/>
+          </a:lnRef>
+          <a:fillRef idx="3">
+            <a:schemeClr val="accent1"/>
+          </a:fillRef>
+          <a:effectRef idx="2">
+            <a:schemeClr val="accent1"/>
+          </a:effectRef>
+          <a:fontRef idx="minor">
+            <a:schemeClr val="lt1"/>
+          </a:fontRef>
+        </p:style>
+        <p:txBody>
+          <a:bodyPr rtlCol="0" anchor="ctr"/>
+          <a:lstStyle/>
+          <a:p>
+            <a:pPr algn="ctr"/>
+          </a:p>
+        </p:txBody>
+      </p:sp>
+      <p:sp>
+        <p:nvSpPr>
+          <p:cNvPr id="10" name="TextBox 9"/>
           <p:cNvSpPr txBox="1"/>
           <p:nvPr/>
         </p:nvSpPr>
         <p:spPr>
           <a:xfrm>
-            <a:off x="822960" y="3246120"/>
-            <a:ext cx="548640" cy="1051560"/>
+            <a:off x="4648200" y="2286000"/>
+            <a:ext cx="2865120" cy="365760"/>
           </a:xfrm>
           <a:prstGeom prst="rect">
             <a:avLst/>
@@ -8053,31 +8763,31 @@
           <a:p>
             <a:pPr algn="l">
               <a:spcAft>
-                <a:spcPts val="1170"/>
-              </a:spcAft>
-            </a:pPr>
-            <a:r>
-              <a:rPr sz="2600" b="1" i="0">
-                <a:solidFill>
-                  <a:srgbClr val="F47B20"/>
-                </a:solidFill>
-                <a:latin typeface="Source Serif 4"/>
-              </a:rPr>
-              <a:t>2</a:t>
-            </a:r>
-          </a:p>
-        </p:txBody>
-      </p:sp>
-      <p:sp>
-        <p:nvSpPr>
-          <p:cNvPr id="9" name="TextBox 8"/>
+                <a:spcPts val="585"/>
+              </a:spcAft>
+            </a:pPr>
+            <a:r>
+              <a:rPr sz="1300" b="1" i="0">
+                <a:solidFill>
+                  <a:srgbClr val="0B2D5B"/>
+                </a:solidFill>
+                <a:latin typeface="Inter Tight"/>
+              </a:rPr>
+              <a:t>AALIYAH</a:t>
+            </a:r>
+          </a:p>
+        </p:txBody>
+      </p:sp>
+      <p:sp>
+        <p:nvSpPr>
+          <p:cNvPr id="11" name="TextBox 10"/>
           <p:cNvSpPr txBox="1"/>
           <p:nvPr/>
         </p:nvSpPr>
         <p:spPr>
           <a:xfrm>
-            <a:off x="1463040" y="3282696"/>
-            <a:ext cx="9875520" cy="1051560"/>
+            <a:off x="4648200" y="2743200"/>
+            <a:ext cx="2865120" cy="3017520"/>
           </a:xfrm>
           <a:prstGeom prst="rect">
             <a:avLst/>
@@ -8092,47 +8802,77 @@
           <a:p>
             <a:pPr algn="l">
               <a:spcAft>
-                <a:spcPts val="945"/>
-              </a:spcAft>
-            </a:pPr>
-            <a:r>
-              <a:rPr sz="2100" b="1" i="0">
+                <a:spcPts val="810"/>
+              </a:spcAft>
+            </a:pPr>
+            <a:r>
+              <a:rPr sz="1800" b="0" i="0">
                 <a:solidFill>
                   <a:srgbClr val="1C1B19"/>
                 </a:solidFill>
                 <a:latin typeface="Source Serif 4"/>
               </a:rPr>
-              <a:t>Drive: achieve</a:t>
-            </a:r>
-          </a:p>
-          <a:p>
-            <a:pPr algn="l">
-              <a:spcAft>
-                <a:spcPts val="945"/>
-              </a:spcAft>
-            </a:pPr>
-            <a:r>
-              <a:rPr sz="1600" b="0" i="0">
-                <a:solidFill>
-                  <a:srgbClr val="5D5A54"/>
-                </a:solidFill>
-                <a:latin typeface="Source Serif 4"/>
-              </a:rPr>
-              <a:t>Goals and rewards. Fused with fear, it feeds the critic.</a:t>
-            </a:r>
-          </a:p>
-        </p:txBody>
-      </p:sp>
-      <p:sp>
-        <p:nvSpPr>
-          <p:cNvPr id="10" name="TextBox 9"/>
+              <a:t>Misses an easy shot at practice and hears a teammate laugh. "Everyone thinks I don't deserve my spot."</a:t>
+            </a:r>
+          </a:p>
+        </p:txBody>
+      </p:sp>
+      <p:sp>
+        <p:nvSpPr>
+          <p:cNvPr id="12" name="Rectangle 11"/>
+          <p:cNvSpPr/>
+          <p:nvPr/>
+        </p:nvSpPr>
+        <p:spPr>
+          <a:xfrm>
+            <a:off x="8016239" y="2103120"/>
+            <a:ext cx="3322320" cy="3840480"/>
+          </a:xfrm>
+          <a:prstGeom prst="rect">
+            <a:avLst/>
+          </a:prstGeom>
+          <a:solidFill>
+            <a:srgbClr val="FFFFFF"/>
+          </a:solidFill>
+          <a:ln w="15875">
+            <a:solidFill>
+              <a:srgbClr val="D8D2C6"/>
+            </a:solidFill>
+          </a:ln>
+          <a:effectLst/>
+        </p:spPr>
+        <p:style>
+          <a:lnRef idx="1">
+            <a:schemeClr val="accent1"/>
+          </a:lnRef>
+          <a:fillRef idx="3">
+            <a:schemeClr val="accent1"/>
+          </a:fillRef>
+          <a:effectRef idx="2">
+            <a:schemeClr val="accent1"/>
+          </a:effectRef>
+          <a:fontRef idx="minor">
+            <a:schemeClr val="lt1"/>
+          </a:fontRef>
+        </p:style>
+        <p:txBody>
+          <a:bodyPr rtlCol="0" anchor="ctr"/>
+          <a:lstStyle/>
+          <a:p>
+            <a:pPr algn="ctr"/>
+          </a:p>
+        </p:txBody>
+      </p:sp>
+      <p:sp>
+        <p:nvSpPr>
+          <p:cNvPr id="13" name="TextBox 12"/>
           <p:cNvSpPr txBox="1"/>
           <p:nvPr/>
         </p:nvSpPr>
         <p:spPr>
           <a:xfrm>
-            <a:off x="822960" y="4297679"/>
-            <a:ext cx="548640" cy="1051560"/>
+            <a:off x="8244839" y="2286000"/>
+            <a:ext cx="2865120" cy="365760"/>
           </a:xfrm>
           <a:prstGeom prst="rect">
             <a:avLst/>
@@ -8147,31 +8887,31 @@
           <a:p>
             <a:pPr algn="l">
               <a:spcAft>
-                <a:spcPts val="1170"/>
-              </a:spcAft>
-            </a:pPr>
-            <a:r>
-              <a:rPr sz="2600" b="1" i="0">
-                <a:solidFill>
-                  <a:srgbClr val="F47B20"/>
-                </a:solidFill>
-                <a:latin typeface="Source Serif 4"/>
-              </a:rPr>
-              <a:t>3</a:t>
-            </a:r>
-          </a:p>
-        </p:txBody>
-      </p:sp>
-      <p:sp>
-        <p:nvSpPr>
-          <p:cNvPr id="11" name="TextBox 10"/>
+                <a:spcPts val="585"/>
+              </a:spcAft>
+            </a:pPr>
+            <a:r>
+              <a:rPr sz="1300" b="1" i="0">
+                <a:solidFill>
+                  <a:srgbClr val="0B2D5B"/>
+                </a:solidFill>
+                <a:latin typeface="Inter Tight"/>
+              </a:rPr>
+              <a:t>MATEO</a:t>
+            </a:r>
+          </a:p>
+        </p:txBody>
+      </p:sp>
+      <p:sp>
+        <p:nvSpPr>
+          <p:cNvPr id="14" name="TextBox 13"/>
           <p:cNvSpPr txBox="1"/>
           <p:nvPr/>
         </p:nvSpPr>
         <p:spPr>
           <a:xfrm>
-            <a:off x="1463040" y="4334255"/>
-            <a:ext cx="9875520" cy="1051560"/>
+            <a:off x="8244839" y="2743200"/>
+            <a:ext cx="2865120" cy="3017520"/>
           </a:xfrm>
           <a:prstGeom prst="rect">
             <a:avLst/>
@@ -8186,33 +8926,17 @@
           <a:p>
             <a:pPr algn="l">
               <a:spcAft>
-                <a:spcPts val="945"/>
-              </a:spcAft>
-            </a:pPr>
-            <a:r>
-              <a:rPr sz="2100" b="1" i="0">
+                <a:spcPts val="810"/>
+              </a:spcAft>
+            </a:pPr>
+            <a:r>
+              <a:rPr sz="1800" b="0" i="0">
                 <a:solidFill>
                   <a:srgbClr val="1C1B19"/>
                 </a:solidFill>
                 <a:latin typeface="Source Serif 4"/>
               </a:rPr>
-              <a:t>Soothing: calm and connect</a:t>
-            </a:r>
-          </a:p>
-          <a:p>
-            <a:pPr algn="l">
-              <a:spcAft>
-                <a:spcPts val="945"/>
-              </a:spcAft>
-            </a:pPr>
-            <a:r>
-              <a:rPr sz="1600" b="0" i="0">
-                <a:solidFill>
-                  <a:srgbClr val="5D5A54"/>
-                </a:solidFill>
-                <a:latin typeface="Source Serif 4"/>
-              </a:rPr>
-              <a:t>Comes online when you feel safe and cared for.</a:t>
+              <a:t>A friend has a small birthday dinner, and he wasn't invited. "Of course. Nobody actually likes me."</a:t>
             </a:r>
           </a:p>
         </p:txBody>
@@ -8321,7 +9045,7 @@
                 </a:solidFill>
                 <a:latin typeface="Inter Tight"/>
               </a:rPr>
-              <a:t>QUICK VOTE</a:t>
+              <a:t>PRIVATE CARD</a:t>
             </a:r>
           </a:p>
         </p:txBody>
@@ -8443,7 +9167,7 @@
                 </a:solidFill>
                 <a:latin typeface="Source Serif 4"/>
               </a:rPr>
-              <a:t>Does being hard on yourself keep you sharp?</a:t>
+              <a:t>Rewrite your critic as a coach.</a:t>
             </a:r>
           </a:p>
         </p:txBody>
@@ -8482,7 +9206,7 @@
                 </a:solidFill>
                 <a:latin typeface="Inter Tight"/>
               </a:rPr>
-              <a:t>Thumbs up for yes, down for no, sideways if it depends.</a:t>
+              <a:t>Write one thing your critic says. Then say it the way a coach on your side would, using your name.</a:t>
             </a:r>
           </a:p>
         </p:txBody>
@@ -8591,7 +9315,7 @@
                 </a:solidFill>
                 <a:latin typeface="Inter Tight"/>
               </a:rPr>
-              <a:t>THE CORE SKILL</a:t>
+              <a:t>BEFORE YOU GO</a:t>
             </a:r>
           </a:p>
         </p:txBody>
@@ -8643,7 +9367,7 @@
         </p:nvSpPr>
         <p:spPr>
           <a:xfrm>
-            <a:off x="822960" y="1005840"/>
+            <a:off x="822960" y="1188720"/>
             <a:ext cx="10515600" cy="914400"/>
           </a:xfrm>
           <a:prstGeom prst="rect">
@@ -8659,31 +9383,70 @@
           <a:p>
             <a:pPr algn="l">
               <a:spcAft>
-                <a:spcPts val="1530"/>
-              </a:spcAft>
-            </a:pPr>
-            <a:r>
-              <a:rPr sz="3400" b="1" i="0">
+                <a:spcPts val="1620"/>
+              </a:spcAft>
+            </a:pPr>
+            <a:r>
+              <a:rPr sz="3600" b="1" i="0">
                 <a:solidFill>
                   <a:srgbClr val="1C1B19"/>
                 </a:solidFill>
                 <a:latin typeface="Source Serif 4"/>
               </a:rPr>
-              <a:t>Get some distance from the voice.</a:t>
-            </a:r>
-          </a:p>
-        </p:txBody>
-      </p:sp>
-      <p:sp>
-        <p:nvSpPr>
-          <p:cNvPr id="6" name="Rectangle 5"/>
+              <a:t>One thing to try</a:t>
+            </a:r>
+          </a:p>
+        </p:txBody>
+      </p:sp>
+      <p:sp>
+        <p:nvSpPr>
+          <p:cNvPr id="6" name="TextBox 5"/>
+          <p:cNvSpPr txBox="1"/>
+          <p:nvPr/>
+        </p:nvSpPr>
+        <p:spPr>
+          <a:xfrm>
+            <a:off x="822960" y="2286000"/>
+            <a:ext cx="10515600" cy="1463040"/>
+          </a:xfrm>
+          <a:prstGeom prst="rect">
+            <a:avLst/>
+          </a:prstGeom>
+          <a:noFill/>
+        </p:spPr>
+        <p:txBody>
+          <a:bodyPr wrap="square" anchor="t" lIns="0" rIns="0" tIns="0" bIns="0">
+            <a:spAutoFit/>
+          </a:bodyPr>
+          <a:lstStyle/>
+          <a:p>
+            <a:pPr algn="l">
+              <a:spcAft>
+                <a:spcPts val="1080"/>
+              </a:spcAft>
+            </a:pPr>
+            <a:r>
+              <a:rPr sz="2400" b="0" i="0">
+                <a:solidFill>
+                  <a:srgbClr val="1C1B19"/>
+                </a:solidFill>
+                <a:latin typeface="Source Serif 4"/>
+              </a:rPr>
+              <a:t>Your name, the evidence check, an evidence file, or muting a few accounts for a week. Which one, if any?</a:t>
+            </a:r>
+          </a:p>
+        </p:txBody>
+      </p:sp>
+      <p:sp>
+        <p:nvSpPr>
+          <p:cNvPr id="7" name="Rectangle 6"/>
           <p:cNvSpPr/>
           <p:nvPr/>
         </p:nvSpPr>
         <p:spPr>
           <a:xfrm>
-            <a:off x="822960" y="2743200"/>
-            <a:ext cx="1874519" cy="1005840"/>
+            <a:off x="822960" y="4023360"/>
+            <a:ext cx="10515600" cy="1371600"/>
           </a:xfrm>
           <a:prstGeom prst="rect">
             <a:avLst/>
@@ -8693,7 +9456,7 @@
           </a:solidFill>
           <a:ln w="15875">
             <a:solidFill>
-              <a:srgbClr val="0B2D5B"/>
+              <a:srgbClr val="1C1B19"/>
             </a:solidFill>
           </a:ln>
           <a:effectLst/>
@@ -8722,416 +9485,14 @@
       </p:sp>
       <p:sp>
         <p:nvSpPr>
-          <p:cNvPr id="7" name="TextBox 6"/>
+          <p:cNvPr id="8" name="TextBox 7"/>
           <p:cNvSpPr txBox="1"/>
           <p:nvPr/>
         </p:nvSpPr>
         <p:spPr>
           <a:xfrm>
-            <a:off x="822960" y="2743200"/>
-            <a:ext cx="1874519" cy="1005840"/>
-          </a:xfrm>
-          <a:prstGeom prst="rect">
-            <a:avLst/>
-          </a:prstGeom>
-          <a:noFill/>
-        </p:spPr>
-        <p:txBody>
-          <a:bodyPr wrap="square" anchor="ctr" lIns="0" rIns="0" tIns="0" bIns="0">
-            <a:spAutoFit/>
-          </a:bodyPr>
-          <a:lstStyle/>
-          <a:p>
-            <a:pPr algn="ctr">
-              <a:spcAft>
-                <a:spcPts val="900"/>
-              </a:spcAft>
-            </a:pPr>
-            <a:r>
-              <a:rPr sz="2000" b="1" i="0">
-                <a:solidFill>
-                  <a:srgbClr val="1C1B19"/>
-                </a:solidFill>
-                <a:latin typeface="Source Serif 4"/>
-              </a:rPr>
-              <a:t>Notice it</a:t>
-            </a:r>
-          </a:p>
-        </p:txBody>
-      </p:sp>
-      <p:cxnSp>
-        <p:nvCxnSpPr>
-          <p:cNvPr id="8" name="Connector 7"/>
-          <p:cNvCxnSpPr/>
-          <p:nvPr/>
-        </p:nvCxnSpPr>
-        <p:spPr>
-          <a:xfrm>
-            <a:off x="2752344" y="3246120"/>
-            <a:ext cx="896112" cy="0"/>
-          </a:xfrm>
-          <a:prstGeom prst="line">
-            <a:avLst/>
-          </a:prstGeom>
-          <a:ln w="31750">
-            <a:solidFill>
-              <a:srgbClr val="F47B20"/>
-            </a:solidFill>
-            <a:tailEnd type="triangle"/>
-          </a:ln>
-        </p:spPr>
-        <p:style>
-          <a:lnRef idx="2">
-            <a:schemeClr val="accent1"/>
-          </a:lnRef>
-          <a:fillRef idx="0">
-            <a:schemeClr val="accent1"/>
-          </a:fillRef>
-          <a:effectRef idx="1">
-            <a:schemeClr val="accent1"/>
-          </a:effectRef>
-          <a:fontRef idx="minor">
-            <a:schemeClr val="tx1"/>
-          </a:fontRef>
-        </p:style>
-      </p:cxnSp>
-      <p:sp>
-        <p:nvSpPr>
-          <p:cNvPr id="9" name="Rectangle 8"/>
-          <p:cNvSpPr/>
-          <p:nvPr/>
-        </p:nvSpPr>
-        <p:spPr>
-          <a:xfrm>
-            <a:off x="3703320" y="2743200"/>
-            <a:ext cx="1874519" cy="1005840"/>
-          </a:xfrm>
-          <a:prstGeom prst="rect">
-            <a:avLst/>
-          </a:prstGeom>
-          <a:solidFill>
-            <a:srgbClr val="FFFFFF"/>
-          </a:solidFill>
-          <a:ln w="15875">
-            <a:solidFill>
-              <a:srgbClr val="0B2D5B"/>
-            </a:solidFill>
-          </a:ln>
-          <a:effectLst/>
-        </p:spPr>
-        <p:style>
-          <a:lnRef idx="1">
-            <a:schemeClr val="accent1"/>
-          </a:lnRef>
-          <a:fillRef idx="3">
-            <a:schemeClr val="accent1"/>
-          </a:fillRef>
-          <a:effectRef idx="2">
-            <a:schemeClr val="accent1"/>
-          </a:effectRef>
-          <a:fontRef idx="minor">
-            <a:schemeClr val="lt1"/>
-          </a:fontRef>
-        </p:style>
-        <p:txBody>
-          <a:bodyPr rtlCol="0" anchor="ctr"/>
-          <a:lstStyle/>
-          <a:p>
-            <a:pPr algn="ctr"/>
-          </a:p>
-        </p:txBody>
-      </p:sp>
-      <p:sp>
-        <p:nvSpPr>
-          <p:cNvPr id="10" name="TextBox 9"/>
-          <p:cNvSpPr txBox="1"/>
-          <p:nvPr/>
-        </p:nvSpPr>
-        <p:spPr>
-          <a:xfrm>
-            <a:off x="3703320" y="2743200"/>
-            <a:ext cx="1874519" cy="1005840"/>
-          </a:xfrm>
-          <a:prstGeom prst="rect">
-            <a:avLst/>
-          </a:prstGeom>
-          <a:noFill/>
-        </p:spPr>
-        <p:txBody>
-          <a:bodyPr wrap="square" anchor="ctr" lIns="0" rIns="0" tIns="0" bIns="0">
-            <a:spAutoFit/>
-          </a:bodyPr>
-          <a:lstStyle/>
-          <a:p>
-            <a:pPr algn="ctr">
-              <a:spcAft>
-                <a:spcPts val="900"/>
-              </a:spcAft>
-            </a:pPr>
-            <a:r>
-              <a:rPr sz="2000" b="1" i="0">
-                <a:solidFill>
-                  <a:srgbClr val="1C1B19"/>
-                </a:solidFill>
-                <a:latin typeface="Source Serif 4"/>
-              </a:rPr>
-              <a:t>Use your name</a:t>
-            </a:r>
-          </a:p>
-        </p:txBody>
-      </p:sp>
-      <p:cxnSp>
-        <p:nvCxnSpPr>
-          <p:cNvPr id="11" name="Connector 10"/>
-          <p:cNvCxnSpPr/>
-          <p:nvPr/>
-        </p:nvCxnSpPr>
-        <p:spPr>
-          <a:xfrm>
-            <a:off x="5632704" y="3246120"/>
-            <a:ext cx="896112" cy="0"/>
-          </a:xfrm>
-          <a:prstGeom prst="line">
-            <a:avLst/>
-          </a:prstGeom>
-          <a:ln w="31750">
-            <a:solidFill>
-              <a:srgbClr val="F47B20"/>
-            </a:solidFill>
-            <a:tailEnd type="triangle"/>
-          </a:ln>
-        </p:spPr>
-        <p:style>
-          <a:lnRef idx="2">
-            <a:schemeClr val="accent1"/>
-          </a:lnRef>
-          <a:fillRef idx="0">
-            <a:schemeClr val="accent1"/>
-          </a:fillRef>
-          <a:effectRef idx="1">
-            <a:schemeClr val="accent1"/>
-          </a:effectRef>
-          <a:fontRef idx="minor">
-            <a:schemeClr val="tx1"/>
-          </a:fontRef>
-        </p:style>
-      </p:cxnSp>
-      <p:sp>
-        <p:nvSpPr>
-          <p:cNvPr id="12" name="Rectangle 11"/>
-          <p:cNvSpPr/>
-          <p:nvPr/>
-        </p:nvSpPr>
-        <p:spPr>
-          <a:xfrm>
-            <a:off x="6583680" y="2743200"/>
-            <a:ext cx="1874519" cy="1005840"/>
-          </a:xfrm>
-          <a:prstGeom prst="rect">
-            <a:avLst/>
-          </a:prstGeom>
-          <a:solidFill>
-            <a:srgbClr val="FFFFFF"/>
-          </a:solidFill>
-          <a:ln w="15875">
-            <a:solidFill>
-              <a:srgbClr val="0B2D5B"/>
-            </a:solidFill>
-          </a:ln>
-          <a:effectLst/>
-        </p:spPr>
-        <p:style>
-          <a:lnRef idx="1">
-            <a:schemeClr val="accent1"/>
-          </a:lnRef>
-          <a:fillRef idx="3">
-            <a:schemeClr val="accent1"/>
-          </a:fillRef>
-          <a:effectRef idx="2">
-            <a:schemeClr val="accent1"/>
-          </a:effectRef>
-          <a:fontRef idx="minor">
-            <a:schemeClr val="lt1"/>
-          </a:fontRef>
-        </p:style>
-        <p:txBody>
-          <a:bodyPr rtlCol="0" anchor="ctr"/>
-          <a:lstStyle/>
-          <a:p>
-            <a:pPr algn="ctr"/>
-          </a:p>
-        </p:txBody>
-      </p:sp>
-      <p:sp>
-        <p:nvSpPr>
-          <p:cNvPr id="13" name="TextBox 12"/>
-          <p:cNvSpPr txBox="1"/>
-          <p:nvPr/>
-        </p:nvSpPr>
-        <p:spPr>
-          <a:xfrm>
-            <a:off x="6583680" y="2743200"/>
-            <a:ext cx="1874519" cy="1005840"/>
-          </a:xfrm>
-          <a:prstGeom prst="rect">
-            <a:avLst/>
-          </a:prstGeom>
-          <a:noFill/>
-        </p:spPr>
-        <p:txBody>
-          <a:bodyPr wrap="square" anchor="ctr" lIns="0" rIns="0" tIns="0" bIns="0">
-            <a:spAutoFit/>
-          </a:bodyPr>
-          <a:lstStyle/>
-          <a:p>
-            <a:pPr algn="ctr">
-              <a:spcAft>
-                <a:spcPts val="900"/>
-              </a:spcAft>
-            </a:pPr>
-            <a:r>
-              <a:rPr sz="2000" b="1" i="0">
-                <a:solidFill>
-                  <a:srgbClr val="1C1B19"/>
-                </a:solidFill>
-                <a:latin typeface="Source Serif 4"/>
-              </a:rPr>
-              <a:t>Check the evidence</a:t>
-            </a:r>
-          </a:p>
-        </p:txBody>
-      </p:sp>
-      <p:cxnSp>
-        <p:nvCxnSpPr>
-          <p:cNvPr id="14" name="Connector 13"/>
-          <p:cNvCxnSpPr/>
-          <p:nvPr/>
-        </p:nvCxnSpPr>
-        <p:spPr>
-          <a:xfrm>
-            <a:off x="8513064" y="3246120"/>
-            <a:ext cx="896112" cy="0"/>
-          </a:xfrm>
-          <a:prstGeom prst="line">
-            <a:avLst/>
-          </a:prstGeom>
-          <a:ln w="31750">
-            <a:solidFill>
-              <a:srgbClr val="F47B20"/>
-            </a:solidFill>
-            <a:tailEnd type="triangle"/>
-          </a:ln>
-        </p:spPr>
-        <p:style>
-          <a:lnRef idx="2">
-            <a:schemeClr val="accent1"/>
-          </a:lnRef>
-          <a:fillRef idx="0">
-            <a:schemeClr val="accent1"/>
-          </a:fillRef>
-          <a:effectRef idx="1">
-            <a:schemeClr val="accent1"/>
-          </a:effectRef>
-          <a:fontRef idx="minor">
-            <a:schemeClr val="tx1"/>
-          </a:fontRef>
-        </p:style>
-      </p:cxnSp>
-      <p:sp>
-        <p:nvSpPr>
-          <p:cNvPr id="15" name="Rectangle 14"/>
-          <p:cNvSpPr/>
-          <p:nvPr/>
-        </p:nvSpPr>
-        <p:spPr>
-          <a:xfrm>
-            <a:off x="9464040" y="2743200"/>
-            <a:ext cx="1874519" cy="1005840"/>
-          </a:xfrm>
-          <a:prstGeom prst="rect">
-            <a:avLst/>
-          </a:prstGeom>
-          <a:solidFill>
-            <a:srgbClr val="FFFFFF"/>
-          </a:solidFill>
-          <a:ln w="15875">
-            <a:solidFill>
-              <a:srgbClr val="0B2D5B"/>
-            </a:solidFill>
-          </a:ln>
-          <a:effectLst/>
-        </p:spPr>
-        <p:style>
-          <a:lnRef idx="1">
-            <a:schemeClr val="accent1"/>
-          </a:lnRef>
-          <a:fillRef idx="3">
-            <a:schemeClr val="accent1"/>
-          </a:fillRef>
-          <a:effectRef idx="2">
-            <a:schemeClr val="accent1"/>
-          </a:effectRef>
-          <a:fontRef idx="minor">
-            <a:schemeClr val="lt1"/>
-          </a:fontRef>
-        </p:style>
-        <p:txBody>
-          <a:bodyPr rtlCol="0" anchor="ctr"/>
-          <a:lstStyle/>
-          <a:p>
-            <a:pPr algn="ctr"/>
-          </a:p>
-        </p:txBody>
-      </p:sp>
-      <p:sp>
-        <p:nvSpPr>
-          <p:cNvPr id="16" name="TextBox 15"/>
-          <p:cNvSpPr txBox="1"/>
-          <p:nvPr/>
-        </p:nvSpPr>
-        <p:spPr>
-          <a:xfrm>
-            <a:off x="9464040" y="2743200"/>
-            <a:ext cx="1874519" cy="1005840"/>
-          </a:xfrm>
-          <a:prstGeom prst="rect">
-            <a:avLst/>
-          </a:prstGeom>
-          <a:noFill/>
-        </p:spPr>
-        <p:txBody>
-          <a:bodyPr wrap="square" anchor="ctr" lIns="0" rIns="0" tIns="0" bIns="0">
-            <a:spAutoFit/>
-          </a:bodyPr>
-          <a:lstStyle/>
-          <a:p>
-            <a:pPr algn="ctr">
-              <a:spcAft>
-                <a:spcPts val="900"/>
-              </a:spcAft>
-            </a:pPr>
-            <a:r>
-              <a:rPr sz="2000" b="1" i="0">
-                <a:solidFill>
-                  <a:srgbClr val="1C1B19"/>
-                </a:solidFill>
-                <a:latin typeface="Source Serif 4"/>
-              </a:rPr>
-              <a:t>Coach, don't condemn</a:t>
-            </a:r>
-          </a:p>
-        </p:txBody>
-      </p:sp>
-      <p:sp>
-        <p:nvSpPr>
-          <p:cNvPr id="17" name="TextBox 16"/>
-          <p:cNvSpPr txBox="1"/>
-          <p:nvPr/>
-        </p:nvSpPr>
-        <p:spPr>
-          <a:xfrm>
-            <a:off x="822960" y="4160520"/>
-            <a:ext cx="10515600" cy="457200"/>
+            <a:off x="1097280" y="4206240"/>
+            <a:ext cx="10058400" cy="365760"/>
           </a:xfrm>
           <a:prstGeom prst="rect">
             <a:avLst/>
@@ -9144,33 +9505,33 @@
           </a:bodyPr>
           <a:lstStyle/>
           <a:p>
-            <a:pPr algn="ctr">
-              <a:spcAft>
-                <a:spcPts val="810"/>
-              </a:spcAft>
-            </a:pPr>
-            <a:r>
-              <a:rPr sz="1800" b="1" i="0">
-                <a:solidFill>
-                  <a:srgbClr val="F47B20"/>
+            <a:pPr algn="l">
+              <a:spcAft>
+                <a:spcPts val="540"/>
+              </a:spcAft>
+            </a:pPr>
+            <a:r>
+              <a:rPr sz="1200" b="1" i="0">
+                <a:solidFill>
+                  <a:srgbClr val="0B2D5B"/>
                 </a:solidFill>
                 <a:latin typeface="Inter Tight"/>
               </a:rPr>
-              <a:t>↺  and around again</a:t>
-            </a:r>
-          </a:p>
-        </p:txBody>
-      </p:sp>
-      <p:sp>
-        <p:nvSpPr>
-          <p:cNvPr id="18" name="TextBox 17"/>
+              <a:t>STUDENT PAGE</a:t>
+            </a:r>
+          </a:p>
+        </p:txBody>
+      </p:sp>
+      <p:sp>
+        <p:nvSpPr>
+          <p:cNvPr id="9" name="TextBox 8"/>
           <p:cNvSpPr txBox="1"/>
           <p:nvPr/>
         </p:nvSpPr>
         <p:spPr>
           <a:xfrm>
-            <a:off x="822960" y="4846320"/>
-            <a:ext cx="10515600" cy="1188720"/>
+            <a:off x="1097280" y="4617720"/>
+            <a:ext cx="10058400" cy="640080"/>
           </a:xfrm>
           <a:prstGeom prst="rect">
             <a:avLst/>
@@ -9183,19 +9544,19 @@
           </a:bodyPr>
           <a:lstStyle/>
           <a:p>
-            <a:pPr algn="ctr">
+            <a:pPr algn="l">
               <a:spcAft>
                 <a:spcPts val="900"/>
               </a:spcAft>
             </a:pPr>
             <a:r>
-              <a:rPr sz="2000" b="0" i="1">
-                <a:solidFill>
-                  <a:srgbClr val="5D5A54"/>
-                </a:solidFill>
-                <a:latin typeface="Source Serif 4"/>
-              </a:rPr>
-              <a:t>You can't delete the critic. You can change how much it gets to decide.</a:t>
+              <a:rPr sz="2000" b="0" i="0">
+                <a:solidFill>
+                  <a:srgbClr val="1C1B19"/>
+                </a:solidFill>
+                <a:latin typeface="Inter Tight"/>
+              </a:rPr>
+              <a:t>https://rmwtoolkit.github.io/bcds-toolkit/the-inner-critic-high-school.html</a:t>
             </a:r>
           </a:p>
         </p:txBody>

--- a/decks/the-inner-critic-lesson-v2.pptx
+++ b/decks/the-inner-critic-lesson-v2.pptx
@@ -6656,6 +6656,45 @@
                 <a:latin typeface="Inter Tight"/>
               </a:rPr>
               <a:t>Beaver Upper School · Counseling</a:t>
+            </a:r>
+          </a:p>
+        </p:txBody>
+      </p:sp>
+      <p:sp>
+        <p:nvSpPr>
+          <p:cNvPr id="8" name="TextBox 7"/>
+          <p:cNvSpPr txBox="1"/>
+          <p:nvPr/>
+        </p:nvSpPr>
+        <p:spPr>
+          <a:xfrm>
+            <a:off x="6766560" y="5897880"/>
+            <a:ext cx="4846320" cy="640080"/>
+          </a:xfrm>
+          <a:prstGeom prst="rect">
+            <a:avLst/>
+          </a:prstGeom>
+          <a:noFill/>
+        </p:spPr>
+        <p:txBody>
+          <a:bodyPr wrap="square" anchor="t" lIns="0" rIns="0" tIns="0" bIns="0">
+            <a:spAutoFit/>
+          </a:bodyPr>
+          <a:lstStyle/>
+          <a:p>
+            <a:pPr algn="r">
+              <a:spcAft>
+                <a:spcPts val="495"/>
+              </a:spcAft>
+            </a:pPr>
+            <a:r>
+              <a:rPr sz="1100" b="0" i="0">
+                <a:solidFill>
+                  <a:srgbClr val="E8E4DA"/>
+                </a:solidFill>
+                <a:latin typeface="Inter Tight"/>
+              </a:rPr>
+              <a:t>Written by Dr. Rick Wilson, with AI-assisted drafting. Every lesson is reviewed and edited by Dr. Wilson.</a:t>
             </a:r>
           </a:p>
         </p:txBody>
